--- a/Repeat_Breeding.pptx
+++ b/Repeat_Breeding.pptx
@@ -23,6 +23,7 @@
     <p:sldId id="271" r:id="rId22"/>
     <p:sldId id="272" r:id="rId23"/>
     <p:sldId id="273" r:id="rId24"/>
+    <p:sldId id="274" r:id="rId25"/>
   </p:sldIdLst>
   <p:sldSz cx="12191695" cy="6858000" type="screen4x3"/>
   <p:notesSz cx="6858000" cy="9144000"/>
@@ -3120,7 +3121,7 @@
             <a:avLst/>
           </a:prstGeom>
           <a:solidFill>
-            <a:srgbClr val="0B3D2E"/>
+            <a:srgbClr val="1B3A57"/>
           </a:solidFill>
           <a:ln>
             <a:noFill/>
@@ -3156,14 +3157,14 @@
         </p:nvSpPr>
         <p:spPr>
           <a:xfrm>
-            <a:off x="0" y="2834640"/>
-            <a:ext cx="12191695" cy="1280160"/>
-          </a:xfrm>
-          <a:prstGeom prst="rect">
-            <a:avLst/>
-          </a:prstGeom>
-          <a:solidFill>
-            <a:srgbClr val="C9A227"/>
+            <a:off x="0" y="2743200"/>
+            <a:ext cx="12191695" cy="1371600"/>
+          </a:xfrm>
+          <a:prstGeom prst="rect">
+            <a:avLst/>
+          </a:prstGeom>
+          <a:solidFill>
+            <a:srgbClr val="E07A18"/>
           </a:solidFill>
           <a:ln>
             <a:noFill/>
@@ -3193,88 +3194,20 @@
       </p:sp>
       <p:sp>
         <p:nvSpPr>
-          <p:cNvPr id="4" name="TextBox 3"/>
-          <p:cNvSpPr txBox="1"/>
-          <p:nvPr/>
-        </p:nvSpPr>
-        <p:spPr>
-          <a:xfrm>
-            <a:off x="640080" y="2926080"/>
-            <a:ext cx="10972800" cy="731520"/>
-          </a:xfrm>
-          <a:prstGeom prst="rect">
-            <a:avLst/>
-          </a:prstGeom>
-          <a:noFill/>
-        </p:spPr>
-        <p:txBody>
-          <a:bodyPr wrap="none">
-            <a:spAutoFit/>
-          </a:bodyPr>
-          <a:lstStyle/>
-          <a:p>
-            <a:r>
-              <a:rPr sz="5400" b="1">
-                <a:solidFill>
-                  <a:srgbClr val="0B3D2E"/>
-                </a:solidFill>
-                <a:latin typeface="Calibri"/>
-              </a:rPr>
-              <a:t>REPEAT BREEDING</a:t>
-            </a:r>
-          </a:p>
-        </p:txBody>
-      </p:sp>
-      <p:sp>
-        <p:nvSpPr>
-          <p:cNvPr id="5" name="TextBox 4"/>
-          <p:cNvSpPr txBox="1"/>
-          <p:nvPr/>
-        </p:nvSpPr>
-        <p:spPr>
-          <a:xfrm>
-            <a:off x="640080" y="3611880"/>
-            <a:ext cx="10972800" cy="548640"/>
-          </a:xfrm>
-          <a:prstGeom prst="rect">
-            <a:avLst/>
-          </a:prstGeom>
-          <a:noFill/>
-        </p:spPr>
-        <p:txBody>
-          <a:bodyPr wrap="none">
-            <a:spAutoFit/>
-          </a:bodyPr>
-          <a:lstStyle/>
-          <a:p>
-            <a:r>
-              <a:rPr sz="2200" i="1">
-                <a:solidFill>
-                  <a:srgbClr val="1F2A24"/>
-                </a:solidFill>
-                <a:latin typeface="Calibri"/>
-              </a:rPr>
-              <a:t>Causes, Diagnosis, Treatment &amp; Prevention in Dairy Cattle</a:t>
-            </a:r>
-          </a:p>
-        </p:txBody>
-      </p:sp>
-      <p:sp>
-        <p:nvSpPr>
-          <p:cNvPr id="6" name="Rectangle 5"/>
+          <p:cNvPr id="4" name="Rectangle 3"/>
           <p:cNvSpPr/>
           <p:nvPr/>
         </p:nvSpPr>
         <p:spPr>
           <a:xfrm>
-            <a:off x="640080" y="640080"/>
-            <a:ext cx="2743200" cy="411480"/>
-          </a:xfrm>
-          <a:prstGeom prst="rect">
-            <a:avLst/>
-          </a:prstGeom>
-          <a:solidFill>
-            <a:srgbClr val="C9A227"/>
+            <a:off x="594360" y="594360"/>
+            <a:ext cx="2926080" cy="411480"/>
+          </a:xfrm>
+          <a:prstGeom prst="rect">
+            <a:avLst/>
+          </a:prstGeom>
+          <a:solidFill>
+            <a:srgbClr val="E07A18"/>
           </a:solidFill>
           <a:ln>
             <a:noFill/>
@@ -3302,7 +3235,7 @@
             <a:r>
               <a:rPr sz="1300" b="1">
                 <a:solidFill>
-                  <a:srgbClr val="0B3D2E"/>
+                  <a:srgbClr val="1B3A57"/>
                 </a:solidFill>
                 <a:latin typeface="Calibri"/>
               </a:rPr>
@@ -3313,14 +3246,14 @@
       </p:sp>
       <p:sp>
         <p:nvSpPr>
-          <p:cNvPr id="7" name="TextBox 6"/>
+          <p:cNvPr id="5" name="TextBox 4"/>
           <p:cNvSpPr txBox="1"/>
           <p:nvPr/>
         </p:nvSpPr>
         <p:spPr>
           <a:xfrm>
-            <a:off x="640080" y="5852160"/>
-            <a:ext cx="10972800" cy="548640"/>
+            <a:off x="594360" y="2834640"/>
+            <a:ext cx="10972800" cy="822960"/>
           </a:xfrm>
           <a:prstGeom prst="rect">
             <a:avLst/>
@@ -3334,13 +3267,299 @@
           <a:lstStyle/>
           <a:p>
             <a:r>
-              <a:rPr sz="1400">
+              <a:rPr sz="5600" b="1">
+                <a:solidFill>
+                  <a:srgbClr val="1B3A57"/>
+                </a:solidFill>
+                <a:latin typeface="Calibri"/>
+              </a:rPr>
+              <a:t>REPEAT BREEDING</a:t>
+            </a:r>
+          </a:p>
+        </p:txBody>
+      </p:sp>
+      <p:sp>
+        <p:nvSpPr>
+          <p:cNvPr id="6" name="TextBox 5"/>
+          <p:cNvSpPr txBox="1"/>
+          <p:nvPr/>
+        </p:nvSpPr>
+        <p:spPr>
+          <a:xfrm>
+            <a:off x="594360" y="3611880"/>
+            <a:ext cx="10972800" cy="548640"/>
+          </a:xfrm>
+          <a:prstGeom prst="rect">
+            <a:avLst/>
+          </a:prstGeom>
+          <a:noFill/>
+        </p:spPr>
+        <p:txBody>
+          <a:bodyPr wrap="none">
+            <a:spAutoFit/>
+          </a:bodyPr>
+          <a:lstStyle/>
+          <a:p>
+            <a:r>
+              <a:rPr sz="2200" i="1">
+                <a:solidFill>
+                  <a:srgbClr val="1F2533"/>
+                </a:solidFill>
+                <a:latin typeface="Calibri"/>
+              </a:rPr>
+              <a:t>Causes, Diagnosis, Treatment &amp; Prevention in Cows and Buffaloes</a:t>
+            </a:r>
+          </a:p>
+        </p:txBody>
+      </p:sp>
+      <p:sp>
+        <p:nvSpPr>
+          <p:cNvPr id="7" name="Rectangle 6"/>
+          <p:cNvSpPr/>
+          <p:nvPr/>
+        </p:nvSpPr>
+        <p:spPr>
+          <a:xfrm>
+            <a:off x="548640" y="4572000"/>
+            <a:ext cx="3749040" cy="1645920"/>
+          </a:xfrm>
+          <a:prstGeom prst="rect">
+            <a:avLst/>
+          </a:prstGeom>
+          <a:solidFill>
+            <a:srgbClr val="FFFFFF"/>
+          </a:solidFill>
+          <a:ln>
+            <a:noFill/>
+          </a:ln>
+        </p:spPr>
+        <p:style>
+          <a:lnRef idx="1">
+            <a:schemeClr val="accent1"/>
+          </a:lnRef>
+          <a:fillRef idx="3">
+            <a:schemeClr val="accent1"/>
+          </a:fillRef>
+          <a:effectRef idx="2">
+            <a:schemeClr val="accent1"/>
+          </a:effectRef>
+          <a:fontRef idx="minor">
+            <a:schemeClr val="lt1"/>
+          </a:fontRef>
+        </p:style>
+        <p:txBody>
+          <a:bodyPr rtlCol="0" anchor="ctr"/>
+          <a:lstStyle/>
+          <a:p>
+            <a:pPr algn="ctr"/>
+          </a:p>
+        </p:txBody>
+      </p:sp>
+      <p:pic>
+        <p:nvPicPr>
+          <p:cNvPr id="8" name="Picture 7" descr="cow_holstein.jpg"/>
+          <p:cNvPicPr>
+            <a:picLocks noChangeAspect="1"/>
+          </p:cNvPicPr>
+          <p:nvPr/>
+        </p:nvPicPr>
+        <p:blipFill>
+          <a:blip r:embed="rId2"/>
+          <a:stretch>
+            <a:fillRect/>
+          </a:stretch>
+        </p:blipFill>
+        <p:spPr>
+          <a:xfrm>
+            <a:off x="594360" y="4617720"/>
+            <a:ext cx="3657600" cy="1554480"/>
+          </a:xfrm>
+          <a:prstGeom prst="rect">
+            <a:avLst/>
+          </a:prstGeom>
+        </p:spPr>
+      </p:pic>
+      <p:sp>
+        <p:nvSpPr>
+          <p:cNvPr id="9" name="TextBox 8"/>
+          <p:cNvSpPr txBox="1"/>
+          <p:nvPr/>
+        </p:nvSpPr>
+        <p:spPr>
+          <a:xfrm>
+            <a:off x="594360" y="6217920"/>
+            <a:ext cx="3657600" cy="274320"/>
+          </a:xfrm>
+          <a:prstGeom prst="rect">
+            <a:avLst/>
+          </a:prstGeom>
+          <a:noFill/>
+        </p:spPr>
+        <p:txBody>
+          <a:bodyPr wrap="none">
+            <a:spAutoFit/>
+          </a:bodyPr>
+          <a:lstStyle/>
+          <a:p>
+            <a:pPr algn="ctr"/>
+            <a:r>
+              <a:rPr sz="1000" i="1">
+                <a:solidFill>
+                  <a:srgbClr val="555C66"/>
+                </a:solidFill>
+                <a:latin typeface="Calibri"/>
+              </a:rPr>
+              <a:t>Holstein Friesian (dairy cow)</a:t>
+            </a:r>
+          </a:p>
+        </p:txBody>
+      </p:sp>
+      <p:sp>
+        <p:nvSpPr>
+          <p:cNvPr id="10" name="Rectangle 9"/>
+          <p:cNvSpPr/>
+          <p:nvPr/>
+        </p:nvSpPr>
+        <p:spPr>
+          <a:xfrm>
+            <a:off x="7909559" y="4572000"/>
+            <a:ext cx="3749040" cy="1645920"/>
+          </a:xfrm>
+          <a:prstGeom prst="rect">
+            <a:avLst/>
+          </a:prstGeom>
+          <a:solidFill>
+            <a:srgbClr val="FFFFFF"/>
+          </a:solidFill>
+          <a:ln>
+            <a:noFill/>
+          </a:ln>
+        </p:spPr>
+        <p:style>
+          <a:lnRef idx="1">
+            <a:schemeClr val="accent1"/>
+          </a:lnRef>
+          <a:fillRef idx="3">
+            <a:schemeClr val="accent1"/>
+          </a:fillRef>
+          <a:effectRef idx="2">
+            <a:schemeClr val="accent1"/>
+          </a:effectRef>
+          <a:fontRef idx="minor">
+            <a:schemeClr val="lt1"/>
+          </a:fontRef>
+        </p:style>
+        <p:txBody>
+          <a:bodyPr rtlCol="0" anchor="ctr"/>
+          <a:lstStyle/>
+          <a:p>
+            <a:pPr algn="ctr"/>
+          </a:p>
+        </p:txBody>
+      </p:sp>
+      <p:pic>
+        <p:nvPicPr>
+          <p:cNvPr id="11" name="Picture 10" descr="buffalo_murrah.jpg"/>
+          <p:cNvPicPr>
+            <a:picLocks noChangeAspect="1"/>
+          </p:cNvPicPr>
+          <p:nvPr/>
+        </p:nvPicPr>
+        <p:blipFill>
+          <a:blip r:embed="rId3"/>
+          <a:stretch>
+            <a:fillRect/>
+          </a:stretch>
+        </p:blipFill>
+        <p:spPr>
+          <a:xfrm>
+            <a:off x="7955279" y="4617720"/>
+            <a:ext cx="3657600" cy="1554480"/>
+          </a:xfrm>
+          <a:prstGeom prst="rect">
+            <a:avLst/>
+          </a:prstGeom>
+        </p:spPr>
+      </p:pic>
+      <p:sp>
+        <p:nvSpPr>
+          <p:cNvPr id="12" name="TextBox 11"/>
+          <p:cNvSpPr txBox="1"/>
+          <p:nvPr/>
+        </p:nvSpPr>
+        <p:spPr>
+          <a:xfrm>
+            <a:off x="7955279" y="6217920"/>
+            <a:ext cx="3657600" cy="274320"/>
+          </a:xfrm>
+          <a:prstGeom prst="rect">
+            <a:avLst/>
+          </a:prstGeom>
+          <a:noFill/>
+        </p:spPr>
+        <p:txBody>
+          <a:bodyPr wrap="none">
+            <a:spAutoFit/>
+          </a:bodyPr>
+          <a:lstStyle/>
+          <a:p>
+            <a:pPr algn="ctr"/>
+            <a:r>
+              <a:rPr sz="1000" i="1">
+                <a:solidFill>
+                  <a:srgbClr val="555C66"/>
+                </a:solidFill>
+                <a:latin typeface="Calibri"/>
+              </a:rPr>
+              <a:t>Murrah buffalo</a:t>
+            </a:r>
+          </a:p>
+        </p:txBody>
+      </p:sp>
+      <p:sp>
+        <p:nvSpPr>
+          <p:cNvPr id="13" name="TextBox 12"/>
+          <p:cNvSpPr txBox="1"/>
+          <p:nvPr/>
+        </p:nvSpPr>
+        <p:spPr>
+          <a:xfrm>
+            <a:off x="4389120" y="4937760"/>
+            <a:ext cx="3474720" cy="1280160"/>
+          </a:xfrm>
+          <a:prstGeom prst="rect">
+            <a:avLst/>
+          </a:prstGeom>
+          <a:noFill/>
+        </p:spPr>
+        <p:txBody>
+          <a:bodyPr wrap="none">
+            <a:spAutoFit/>
+          </a:bodyPr>
+          <a:lstStyle/>
+          <a:p>
+            <a:pPr algn="ctr"/>
+            <a:r>
+              <a:rPr sz="1800" b="1">
                 <a:solidFill>
                   <a:srgbClr val="FFFFFF"/>
                 </a:solidFill>
                 <a:latin typeface="Calibri"/>
               </a:rPr>
-              <a:t>Veterinary Gynaecology &amp; Obstetrics  |  Seminar Presentation</a:t>
+              <a:t>Veterinary Gynaecology
+&amp; Obstetrics</a:t>
+            </a:r>
+          </a:p>
+          <a:p>
+            <a:pPr algn="ctr"/>
+            <a:r>
+              <a:rPr sz="1300" i="1">
+                <a:solidFill>
+                  <a:srgbClr val="FFFFFF"/>
+                </a:solidFill>
+                <a:latin typeface="Calibri"/>
+              </a:rPr>
+              <a:t>Seminar Presentation</a:t>
             </a:r>
           </a:p>
         </p:txBody>
@@ -3378,7 +3597,7 @@
             <a:avLst/>
           </a:prstGeom>
           <a:solidFill>
-            <a:srgbClr val="F5F1E8"/>
+            <a:srgbClr val="F7F3EB"/>
           </a:solidFill>
           <a:ln>
             <a:noFill/>
@@ -3415,13 +3634,13 @@
         <p:spPr>
           <a:xfrm>
             <a:off x="0" y="0"/>
-            <a:ext cx="320040" cy="6858000"/>
-          </a:xfrm>
-          <a:prstGeom prst="rect">
-            <a:avLst/>
-          </a:prstGeom>
-          <a:solidFill>
-            <a:srgbClr val="0B3D2E"/>
+            <a:ext cx="292608" cy="6858000"/>
+          </a:xfrm>
+          <a:prstGeom prst="rect">
+            <a:avLst/>
+          </a:prstGeom>
+          <a:solidFill>
+            <a:srgbClr val="1B3A57"/>
           </a:solidFill>
           <a:ln>
             <a:noFill/>
@@ -3457,14 +3676,14 @@
         </p:nvSpPr>
         <p:spPr>
           <a:xfrm>
-            <a:off x="320040" y="0"/>
-            <a:ext cx="73152" cy="6858000"/>
-          </a:xfrm>
-          <a:prstGeom prst="rect">
-            <a:avLst/>
-          </a:prstGeom>
-          <a:solidFill>
-            <a:srgbClr val="C9A227"/>
+            <a:off x="292608" y="0"/>
+            <a:ext cx="64008" cy="6858000"/>
+          </a:xfrm>
+          <a:prstGeom prst="rect">
+            <a:avLst/>
+          </a:prstGeom>
+          <a:solidFill>
+            <a:srgbClr val="E07A18"/>
           </a:solidFill>
           <a:ln>
             <a:noFill/>
@@ -3500,7 +3719,7 @@
         </p:nvSpPr>
         <p:spPr>
           <a:xfrm>
-            <a:off x="640080" y="320040"/>
+            <a:off x="594360" y="292608"/>
             <a:ext cx="11155680" cy="822960"/>
           </a:xfrm>
           <a:prstGeom prst="rect">
@@ -3517,7 +3736,7 @@
             <a:r>
               <a:rPr sz="3400" b="1">
                 <a:solidFill>
-                  <a:srgbClr val="0B3D2E"/>
+                  <a:srgbClr val="1B3A57"/>
                 </a:solidFill>
                 <a:latin typeface="Calibri"/>
               </a:rPr>
@@ -3534,14 +3753,14 @@
         </p:nvSpPr>
         <p:spPr>
           <a:xfrm>
-            <a:off x="640080" y="1078992"/>
-            <a:ext cx="1097280" cy="64008"/>
-          </a:xfrm>
-          <a:prstGeom prst="rect">
-            <a:avLst/>
-          </a:prstGeom>
-          <a:solidFill>
-            <a:srgbClr val="C9A227"/>
+            <a:off x="594360" y="1078992"/>
+            <a:ext cx="1280160" cy="64008"/>
+          </a:xfrm>
+          <a:prstGeom prst="rect">
+            <a:avLst/>
+          </a:prstGeom>
+          <a:solidFill>
+            <a:srgbClr val="E07A18"/>
           </a:solidFill>
           <a:ln>
             <a:noFill/>
@@ -3597,9 +3816,9 @@
               </a:spcAft>
             </a:pPr>
             <a:r>
-              <a:rPr sz="1700" b="0">
-                <a:solidFill>
-                  <a:srgbClr val="1F2A24"/>
+              <a:rPr sz="1700">
+                <a:solidFill>
+                  <a:srgbClr val="1F2533"/>
                 </a:solidFill>
                 <a:latin typeface="Calibri"/>
               </a:rPr>
@@ -3613,9 +3832,9 @@
               </a:spcAft>
             </a:pPr>
             <a:r>
-              <a:rPr sz="1700" b="0">
-                <a:solidFill>
-                  <a:srgbClr val="1F2A24"/>
+              <a:rPr sz="1700">
+                <a:solidFill>
+                  <a:srgbClr val="1F2533"/>
                 </a:solidFill>
                 <a:latin typeface="Calibri"/>
               </a:rPr>
@@ -3629,9 +3848,9 @@
               </a:spcAft>
             </a:pPr>
             <a:r>
-              <a:rPr sz="1700" b="0">
-                <a:solidFill>
-                  <a:srgbClr val="1F2A24"/>
+              <a:rPr sz="1700">
+                <a:solidFill>
+                  <a:srgbClr val="1F2533"/>
                 </a:solidFill>
                 <a:latin typeface="Calibri"/>
               </a:rPr>
@@ -3645,9 +3864,9 @@
               </a:spcAft>
             </a:pPr>
             <a:r>
-              <a:rPr sz="1700" b="0">
-                <a:solidFill>
-                  <a:srgbClr val="1F2A24"/>
+              <a:rPr sz="1700">
+                <a:solidFill>
+                  <a:srgbClr val="1F2533"/>
                 </a:solidFill>
                 <a:latin typeface="Calibri"/>
               </a:rPr>
@@ -3661,9 +3880,9 @@
               </a:spcAft>
             </a:pPr>
             <a:r>
-              <a:rPr sz="1700" b="0">
-                <a:solidFill>
-                  <a:srgbClr val="1F2A24"/>
+              <a:rPr sz="1700">
+                <a:solidFill>
+                  <a:srgbClr val="1F2533"/>
                 </a:solidFill>
                 <a:latin typeface="Calibri"/>
               </a:rPr>
@@ -3677,9 +3896,9 @@
               </a:spcAft>
             </a:pPr>
             <a:r>
-              <a:rPr sz="1700" b="0">
-                <a:solidFill>
-                  <a:srgbClr val="1F2A24"/>
+              <a:rPr sz="1700">
+                <a:solidFill>
+                  <a:srgbClr val="1F2533"/>
                 </a:solidFill>
                 <a:latin typeface="Calibri"/>
               </a:rPr>
@@ -3693,9 +3912,9 @@
               </a:spcAft>
             </a:pPr>
             <a:r>
-              <a:rPr sz="1700" b="0">
-                <a:solidFill>
-                  <a:srgbClr val="1F2A24"/>
+              <a:rPr sz="1700">
+                <a:solidFill>
+                  <a:srgbClr val="1F2533"/>
                 </a:solidFill>
                 <a:latin typeface="Calibri"/>
               </a:rPr>
@@ -3730,7 +3949,7 @@
             <a:r>
               <a:rPr sz="1000">
                 <a:solidFill>
-                  <a:srgbClr val="555555"/>
+                  <a:srgbClr val="555C66"/>
                 </a:solidFill>
                 <a:latin typeface="Calibri"/>
               </a:rPr>
@@ -3765,11 +3984,11 @@
             <a:r>
               <a:rPr sz="1000">
                 <a:solidFill>
-                  <a:srgbClr val="555555"/>
-                </a:solidFill>
-                <a:latin typeface="Calibri"/>
-              </a:rPr>
-              <a:t>10 / 18</a:t>
+                  <a:srgbClr val="555C66"/>
+                </a:solidFill>
+                <a:latin typeface="Calibri"/>
+              </a:rPr>
+              <a:t>10 / 19</a:t>
             </a:r>
           </a:p>
         </p:txBody>
@@ -3807,7 +4026,7 @@
             <a:avLst/>
           </a:prstGeom>
           <a:solidFill>
-            <a:srgbClr val="F5F1E8"/>
+            <a:srgbClr val="F7F3EB"/>
           </a:solidFill>
           <a:ln>
             <a:noFill/>
@@ -3844,13 +4063,13 @@
         <p:spPr>
           <a:xfrm>
             <a:off x="0" y="0"/>
-            <a:ext cx="320040" cy="6858000"/>
-          </a:xfrm>
-          <a:prstGeom prst="rect">
-            <a:avLst/>
-          </a:prstGeom>
-          <a:solidFill>
-            <a:srgbClr val="0B3D2E"/>
+            <a:ext cx="292608" cy="6858000"/>
+          </a:xfrm>
+          <a:prstGeom prst="rect">
+            <a:avLst/>
+          </a:prstGeom>
+          <a:solidFill>
+            <a:srgbClr val="1B3A57"/>
           </a:solidFill>
           <a:ln>
             <a:noFill/>
@@ -3886,14 +4105,14 @@
         </p:nvSpPr>
         <p:spPr>
           <a:xfrm>
-            <a:off x="320040" y="0"/>
-            <a:ext cx="73152" cy="6858000"/>
-          </a:xfrm>
-          <a:prstGeom prst="rect">
-            <a:avLst/>
-          </a:prstGeom>
-          <a:solidFill>
-            <a:srgbClr val="C9A227"/>
+            <a:off x="292608" y="0"/>
+            <a:ext cx="64008" cy="6858000"/>
+          </a:xfrm>
+          <a:prstGeom prst="rect">
+            <a:avLst/>
+          </a:prstGeom>
+          <a:solidFill>
+            <a:srgbClr val="E07A18"/>
           </a:solidFill>
           <a:ln>
             <a:noFill/>
@@ -3929,7 +4148,7 @@
         </p:nvSpPr>
         <p:spPr>
           <a:xfrm>
-            <a:off x="640080" y="320040"/>
+            <a:off x="594360" y="292608"/>
             <a:ext cx="11155680" cy="822960"/>
           </a:xfrm>
           <a:prstGeom prst="rect">
@@ -3946,7 +4165,7 @@
             <a:r>
               <a:rPr sz="3400" b="1">
                 <a:solidFill>
-                  <a:srgbClr val="0B3D2E"/>
+                  <a:srgbClr val="1B3A57"/>
                 </a:solidFill>
                 <a:latin typeface="Calibri"/>
               </a:rPr>
@@ -3963,14 +4182,14 @@
         </p:nvSpPr>
         <p:spPr>
           <a:xfrm>
-            <a:off x="640080" y="1078992"/>
-            <a:ext cx="1097280" cy="64008"/>
-          </a:xfrm>
-          <a:prstGeom prst="rect">
-            <a:avLst/>
-          </a:prstGeom>
-          <a:solidFill>
-            <a:srgbClr val="C9A227"/>
+            <a:off x="594360" y="1078992"/>
+            <a:ext cx="1280160" cy="64008"/>
+          </a:xfrm>
+          <a:prstGeom prst="rect">
+            <a:avLst/>
+          </a:prstGeom>
+          <a:solidFill>
+            <a:srgbClr val="E07A18"/>
           </a:solidFill>
           <a:ln>
             <a:noFill/>
@@ -4013,7 +4232,7 @@
             <a:avLst/>
           </a:prstGeom>
           <a:solidFill>
-            <a:srgbClr val="0B3D2E"/>
+            <a:srgbClr val="1B3A57"/>
           </a:solidFill>
           <a:ln>
             <a:noFill/>
@@ -4066,7 +4285,7 @@
             <a:avLst/>
           </a:prstGeom>
           <a:solidFill>
-            <a:srgbClr val="C9A227"/>
+            <a:srgbClr val="E07A18"/>
           </a:solidFill>
           <a:ln>
             <a:noFill/>
@@ -4119,7 +4338,7 @@
             <a:avLst/>
           </a:prstGeom>
           <a:solidFill>
-            <a:srgbClr val="0B3D2E"/>
+            <a:srgbClr val="1B3A57"/>
           </a:solidFill>
           <a:ln>
             <a:noFill/>
@@ -4171,7 +4390,7 @@
             <a:avLst/>
           </a:prstGeom>
           <a:solidFill>
-            <a:srgbClr val="C9A227"/>
+            <a:srgbClr val="E07A18"/>
           </a:solidFill>
           <a:ln>
             <a:noFill/>
@@ -4224,7 +4443,7 @@
             <a:avLst/>
           </a:prstGeom>
           <a:solidFill>
-            <a:srgbClr val="0B3D2E"/>
+            <a:srgbClr val="1B3A57"/>
           </a:solidFill>
           <a:ln>
             <a:noFill/>
@@ -4277,7 +4496,7 @@
             <a:avLst/>
           </a:prstGeom>
           <a:solidFill>
-            <a:srgbClr val="C9A227"/>
+            <a:srgbClr val="E07A18"/>
           </a:solidFill>
           <a:ln>
             <a:noFill/>
@@ -4329,7 +4548,7 @@
             <a:avLst/>
           </a:prstGeom>
           <a:solidFill>
-            <a:srgbClr val="1F2A24"/>
+            <a:srgbClr val="1F2533"/>
           </a:solidFill>
           <a:ln>
             <a:noFill/>
@@ -4372,7 +4591,7 @@
             <a:avLst/>
           </a:prstGeom>
           <a:solidFill>
-            <a:srgbClr val="1F2A24"/>
+            <a:srgbClr val="1F2533"/>
           </a:solidFill>
           <a:ln>
             <a:noFill/>
@@ -4415,7 +4634,7 @@
             <a:avLst/>
           </a:prstGeom>
           <a:solidFill>
-            <a:srgbClr val="1F2A24"/>
+            <a:srgbClr val="1F2533"/>
           </a:solidFill>
           <a:ln>
             <a:noFill/>
@@ -4458,7 +4677,7 @@
             <a:avLst/>
           </a:prstGeom>
           <a:solidFill>
-            <a:srgbClr val="1F2A24"/>
+            <a:srgbClr val="1F2533"/>
           </a:solidFill>
           <a:ln>
             <a:noFill/>
@@ -4501,7 +4720,7 @@
             <a:avLst/>
           </a:prstGeom>
           <a:solidFill>
-            <a:srgbClr val="1F2A24"/>
+            <a:srgbClr val="1F2533"/>
           </a:solidFill>
           <a:ln>
             <a:noFill/>
@@ -4557,9 +4776,9 @@
               </a:spcAft>
             </a:pPr>
             <a:r>
-              <a:rPr sz="1600" b="0">
-                <a:solidFill>
-                  <a:srgbClr val="1F2A24"/>
+              <a:rPr sz="1600">
+                <a:solidFill>
+                  <a:srgbClr val="1F2533"/>
                 </a:solidFill>
                 <a:latin typeface="Calibri"/>
               </a:rPr>
@@ -4573,9 +4792,9 @@
               </a:spcAft>
             </a:pPr>
             <a:r>
-              <a:rPr sz="1600" b="0">
-                <a:solidFill>
-                  <a:srgbClr val="1F2A24"/>
+              <a:rPr sz="1600">
+                <a:solidFill>
+                  <a:srgbClr val="1F2533"/>
                 </a:solidFill>
                 <a:latin typeface="Calibri"/>
               </a:rPr>
@@ -4589,9 +4808,9 @@
               </a:spcAft>
             </a:pPr>
             <a:r>
-              <a:rPr sz="1600" b="0">
-                <a:solidFill>
-                  <a:srgbClr val="1F2A24"/>
+              <a:rPr sz="1600">
+                <a:solidFill>
+                  <a:srgbClr val="1F2533"/>
                 </a:solidFill>
                 <a:latin typeface="Calibri"/>
               </a:rPr>
@@ -4605,9 +4824,9 @@
               </a:spcAft>
             </a:pPr>
             <a:r>
-              <a:rPr sz="1600" b="0">
-                <a:solidFill>
-                  <a:srgbClr val="1F2A24"/>
+              <a:rPr sz="1600">
+                <a:solidFill>
+                  <a:srgbClr val="1F2533"/>
                 </a:solidFill>
                 <a:latin typeface="Calibri"/>
               </a:rPr>
@@ -4621,9 +4840,9 @@
               </a:spcAft>
             </a:pPr>
             <a:r>
-              <a:rPr sz="1600" b="0">
-                <a:solidFill>
-                  <a:srgbClr val="1F2A24"/>
+              <a:rPr sz="1600">
+                <a:solidFill>
+                  <a:srgbClr val="1F2533"/>
                 </a:solidFill>
                 <a:latin typeface="Calibri"/>
               </a:rPr>
@@ -4658,7 +4877,7 @@
             <a:r>
               <a:rPr sz="1000">
                 <a:solidFill>
-                  <a:srgbClr val="555555"/>
+                  <a:srgbClr val="555C66"/>
                 </a:solidFill>
                 <a:latin typeface="Calibri"/>
               </a:rPr>
@@ -4693,11 +4912,11 @@
             <a:r>
               <a:rPr sz="1000">
                 <a:solidFill>
-                  <a:srgbClr val="555555"/>
-                </a:solidFill>
-                <a:latin typeface="Calibri"/>
-              </a:rPr>
-              <a:t>11 / 18</a:t>
+                  <a:srgbClr val="555C66"/>
+                </a:solidFill>
+                <a:latin typeface="Calibri"/>
+              </a:rPr>
+              <a:t>11 / 19</a:t>
             </a:r>
           </a:p>
         </p:txBody>
@@ -4735,7 +4954,7 @@
             <a:avLst/>
           </a:prstGeom>
           <a:solidFill>
-            <a:srgbClr val="F5F1E8"/>
+            <a:srgbClr val="F7F3EB"/>
           </a:solidFill>
           <a:ln>
             <a:noFill/>
@@ -4772,13 +4991,13 @@
         <p:spPr>
           <a:xfrm>
             <a:off x="0" y="0"/>
-            <a:ext cx="320040" cy="6858000"/>
-          </a:xfrm>
-          <a:prstGeom prst="rect">
-            <a:avLst/>
-          </a:prstGeom>
-          <a:solidFill>
-            <a:srgbClr val="0B3D2E"/>
+            <a:ext cx="292608" cy="6858000"/>
+          </a:xfrm>
+          <a:prstGeom prst="rect">
+            <a:avLst/>
+          </a:prstGeom>
+          <a:solidFill>
+            <a:srgbClr val="1B3A57"/>
           </a:solidFill>
           <a:ln>
             <a:noFill/>
@@ -4814,14 +5033,14 @@
         </p:nvSpPr>
         <p:spPr>
           <a:xfrm>
-            <a:off x="320040" y="0"/>
-            <a:ext cx="73152" cy="6858000"/>
-          </a:xfrm>
-          <a:prstGeom prst="rect">
-            <a:avLst/>
-          </a:prstGeom>
-          <a:solidFill>
-            <a:srgbClr val="C9A227"/>
+            <a:off x="292608" y="0"/>
+            <a:ext cx="64008" cy="6858000"/>
+          </a:xfrm>
+          <a:prstGeom prst="rect">
+            <a:avLst/>
+          </a:prstGeom>
+          <a:solidFill>
+            <a:srgbClr val="E07A18"/>
           </a:solidFill>
           <a:ln>
             <a:noFill/>
@@ -4857,7 +5076,7 @@
         </p:nvSpPr>
         <p:spPr>
           <a:xfrm>
-            <a:off x="640080" y="320040"/>
+            <a:off x="594360" y="292608"/>
             <a:ext cx="11155680" cy="822960"/>
           </a:xfrm>
           <a:prstGeom prst="rect">
@@ -4874,7 +5093,7 @@
             <a:r>
               <a:rPr sz="3400" b="1">
                 <a:solidFill>
-                  <a:srgbClr val="0B3D2E"/>
+                  <a:srgbClr val="1B3A57"/>
                 </a:solidFill>
                 <a:latin typeface="Calibri"/>
               </a:rPr>
@@ -4891,14 +5110,14 @@
         </p:nvSpPr>
         <p:spPr>
           <a:xfrm>
-            <a:off x="640080" y="1078992"/>
-            <a:ext cx="1097280" cy="64008"/>
-          </a:xfrm>
-          <a:prstGeom prst="rect">
-            <a:avLst/>
-          </a:prstGeom>
-          <a:solidFill>
-            <a:srgbClr val="C9A227"/>
+            <a:off x="594360" y="1078992"/>
+            <a:ext cx="1280160" cy="64008"/>
+          </a:xfrm>
+          <a:prstGeom prst="rect">
+            <a:avLst/>
+          </a:prstGeom>
+          <a:solidFill>
+            <a:srgbClr val="E07A18"/>
           </a:solidFill>
           <a:ln>
             <a:noFill/>
@@ -4934,7 +5153,7 @@
         </p:nvSpPr>
         <p:spPr>
           <a:xfrm>
-            <a:off x="777240" y="1645920"/>
+            <a:off x="777240" y="1691640"/>
             <a:ext cx="10972800" cy="4572000"/>
           </a:xfrm>
           <a:prstGeom prst="rect">
@@ -4954,9 +5173,9 @@
               </a:spcAft>
             </a:pPr>
             <a:r>
-              <a:rPr sz="1500" b="0">
-                <a:solidFill>
-                  <a:srgbClr val="1F2A24"/>
+              <a:rPr sz="1500">
+                <a:solidFill>
+                  <a:srgbClr val="1F2533"/>
                 </a:solidFill>
                 <a:latin typeface="Calibri"/>
               </a:rPr>
@@ -4972,7 +5191,7 @@
             <a:r>
               <a:rPr sz="1300">
                 <a:solidFill>
-                  <a:srgbClr val="1F2A24"/>
+                  <a:srgbClr val="1F2533"/>
                 </a:solidFill>
                 <a:latin typeface="Calibri"/>
               </a:rPr>
@@ -4988,7 +5207,7 @@
             <a:r>
               <a:rPr sz="1300">
                 <a:solidFill>
-                  <a:srgbClr val="1F2A24"/>
+                  <a:srgbClr val="1F2533"/>
                 </a:solidFill>
                 <a:latin typeface="Calibri"/>
               </a:rPr>
@@ -5002,9 +5221,9 @@
               </a:spcAft>
             </a:pPr>
             <a:r>
-              <a:rPr sz="1500" b="0">
-                <a:solidFill>
-                  <a:srgbClr val="1F2A24"/>
+              <a:rPr sz="1500">
+                <a:solidFill>
+                  <a:srgbClr val="1F2533"/>
                 </a:solidFill>
                 <a:latin typeface="Calibri"/>
               </a:rPr>
@@ -5018,9 +5237,9 @@
               </a:spcAft>
             </a:pPr>
             <a:r>
-              <a:rPr sz="1500" b="0">
-                <a:solidFill>
-                  <a:srgbClr val="1F2A24"/>
+              <a:rPr sz="1500">
+                <a:solidFill>
+                  <a:srgbClr val="1F2533"/>
                 </a:solidFill>
                 <a:latin typeface="Calibri"/>
               </a:rPr>
@@ -5036,7 +5255,7 @@
             <a:r>
               <a:rPr sz="1300">
                 <a:solidFill>
-                  <a:srgbClr val="1F2A24"/>
+                  <a:srgbClr val="1F2533"/>
                 </a:solidFill>
                 <a:latin typeface="Calibri"/>
               </a:rPr>
@@ -5052,7 +5271,7 @@
             <a:r>
               <a:rPr sz="1300">
                 <a:solidFill>
-                  <a:srgbClr val="1F2A24"/>
+                  <a:srgbClr val="1F2533"/>
                 </a:solidFill>
                 <a:latin typeface="Calibri"/>
               </a:rPr>
@@ -5068,7 +5287,7 @@
             <a:r>
               <a:rPr sz="1300">
                 <a:solidFill>
-                  <a:srgbClr val="1F2A24"/>
+                  <a:srgbClr val="1F2533"/>
                 </a:solidFill>
                 <a:latin typeface="Calibri"/>
               </a:rPr>
@@ -5082,9 +5301,9 @@
               </a:spcAft>
             </a:pPr>
             <a:r>
-              <a:rPr sz="1500" b="0">
-                <a:solidFill>
-                  <a:srgbClr val="1F2A24"/>
+              <a:rPr sz="1500">
+                <a:solidFill>
+                  <a:srgbClr val="1F2533"/>
                 </a:solidFill>
                 <a:latin typeface="Calibri"/>
               </a:rPr>
@@ -5100,7 +5319,7 @@
             <a:r>
               <a:rPr sz="1300">
                 <a:solidFill>
-                  <a:srgbClr val="1F2A24"/>
+                  <a:srgbClr val="1F2533"/>
                 </a:solidFill>
                 <a:latin typeface="Calibri"/>
               </a:rPr>
@@ -5116,7 +5335,7 @@
             <a:r>
               <a:rPr sz="1300">
                 <a:solidFill>
-                  <a:srgbClr val="1F2A24"/>
+                  <a:srgbClr val="1F2533"/>
                 </a:solidFill>
                 <a:latin typeface="Calibri"/>
               </a:rPr>
@@ -5132,7 +5351,7 @@
             <a:r>
               <a:rPr sz="1300">
                 <a:solidFill>
-                  <a:srgbClr val="1F2A24"/>
+                  <a:srgbClr val="1F2533"/>
                 </a:solidFill>
                 <a:latin typeface="Calibri"/>
               </a:rPr>
@@ -5167,7 +5386,7 @@
             <a:r>
               <a:rPr sz="1000">
                 <a:solidFill>
-                  <a:srgbClr val="555555"/>
+                  <a:srgbClr val="555C66"/>
                 </a:solidFill>
                 <a:latin typeface="Calibri"/>
               </a:rPr>
@@ -5202,11 +5421,11 @@
             <a:r>
               <a:rPr sz="1000">
                 <a:solidFill>
-                  <a:srgbClr val="555555"/>
-                </a:solidFill>
-                <a:latin typeface="Calibri"/>
-              </a:rPr>
-              <a:t>12 / 18</a:t>
+                  <a:srgbClr val="555C66"/>
+                </a:solidFill>
+                <a:latin typeface="Calibri"/>
+              </a:rPr>
+              <a:t>12 / 19</a:t>
             </a:r>
           </a:p>
         </p:txBody>
@@ -5244,7 +5463,7 @@
             <a:avLst/>
           </a:prstGeom>
           <a:solidFill>
-            <a:srgbClr val="F5F1E8"/>
+            <a:srgbClr val="F7F3EB"/>
           </a:solidFill>
           <a:ln>
             <a:noFill/>
@@ -5281,13 +5500,13 @@
         <p:spPr>
           <a:xfrm>
             <a:off x="0" y="0"/>
-            <a:ext cx="320040" cy="6858000"/>
-          </a:xfrm>
-          <a:prstGeom prst="rect">
-            <a:avLst/>
-          </a:prstGeom>
-          <a:solidFill>
-            <a:srgbClr val="0B3D2E"/>
+            <a:ext cx="292608" cy="6858000"/>
+          </a:xfrm>
+          <a:prstGeom prst="rect">
+            <a:avLst/>
+          </a:prstGeom>
+          <a:solidFill>
+            <a:srgbClr val="1B3A57"/>
           </a:solidFill>
           <a:ln>
             <a:noFill/>
@@ -5323,14 +5542,14 @@
         </p:nvSpPr>
         <p:spPr>
           <a:xfrm>
-            <a:off x="320040" y="0"/>
-            <a:ext cx="73152" cy="6858000"/>
-          </a:xfrm>
-          <a:prstGeom prst="rect">
-            <a:avLst/>
-          </a:prstGeom>
-          <a:solidFill>
-            <a:srgbClr val="C9A227"/>
+            <a:off x="292608" y="0"/>
+            <a:ext cx="64008" cy="6858000"/>
+          </a:xfrm>
+          <a:prstGeom prst="rect">
+            <a:avLst/>
+          </a:prstGeom>
+          <a:solidFill>
+            <a:srgbClr val="E07A18"/>
           </a:solidFill>
           <a:ln>
             <a:noFill/>
@@ -5366,7 +5585,7 @@
         </p:nvSpPr>
         <p:spPr>
           <a:xfrm>
-            <a:off x="640080" y="320040"/>
+            <a:off x="594360" y="292608"/>
             <a:ext cx="11155680" cy="822960"/>
           </a:xfrm>
           <a:prstGeom prst="rect">
@@ -5383,7 +5602,7 @@
             <a:r>
               <a:rPr sz="3400" b="1">
                 <a:solidFill>
-                  <a:srgbClr val="0B3D2E"/>
+                  <a:srgbClr val="1B3A57"/>
                 </a:solidFill>
                 <a:latin typeface="Calibri"/>
               </a:rPr>
@@ -5400,14 +5619,14 @@
         </p:nvSpPr>
         <p:spPr>
           <a:xfrm>
-            <a:off x="640080" y="1078992"/>
-            <a:ext cx="1097280" cy="64008"/>
-          </a:xfrm>
-          <a:prstGeom prst="rect">
-            <a:avLst/>
-          </a:prstGeom>
-          <a:solidFill>
-            <a:srgbClr val="C9A227"/>
+            <a:off x="594360" y="1078992"/>
+            <a:ext cx="1280160" cy="64008"/>
+          </a:xfrm>
+          <a:prstGeom prst="rect">
+            <a:avLst/>
+          </a:prstGeom>
+          <a:solidFill>
+            <a:srgbClr val="E07A18"/>
           </a:solidFill>
           <a:ln>
             <a:noFill/>
@@ -5443,7 +5662,7 @@
         </p:nvSpPr>
         <p:spPr>
           <a:xfrm>
-            <a:off x="640080" y="1170432"/>
+            <a:off x="594360" y="1170432"/>
             <a:ext cx="11155680" cy="365760"/>
           </a:xfrm>
           <a:prstGeom prst="rect">
@@ -5460,7 +5679,7 @@
             <a:r>
               <a:rPr sz="1400" i="1">
                 <a:solidFill>
-                  <a:srgbClr val="555555"/>
+                  <a:srgbClr val="555C66"/>
                 </a:solidFill>
                 <a:latin typeface="Calibri"/>
               </a:rPr>
@@ -5478,7 +5697,7 @@
         <p:spPr>
           <a:xfrm>
             <a:off x="777240" y="1691640"/>
-            <a:ext cx="10972800" cy="4572000"/>
+            <a:ext cx="7315200" cy="4572000"/>
           </a:xfrm>
           <a:prstGeom prst="rect">
             <a:avLst/>
@@ -5497,9 +5716,9 @@
               </a:spcAft>
             </a:pPr>
             <a:r>
-              <a:rPr sz="1800" b="0">
-                <a:solidFill>
-                  <a:srgbClr val="1F2A24"/>
+              <a:rPr sz="1600">
+                <a:solidFill>
+                  <a:srgbClr val="1F2533"/>
                 </a:solidFill>
                 <a:latin typeface="Calibri"/>
               </a:rPr>
@@ -5513,9 +5732,9 @@
               </a:spcAft>
             </a:pPr>
             <a:r>
-              <a:rPr sz="1800" b="0">
-                <a:solidFill>
-                  <a:srgbClr val="1F2A24"/>
+              <a:rPr sz="1600">
+                <a:solidFill>
+                  <a:srgbClr val="1F2533"/>
                 </a:solidFill>
                 <a:latin typeface="Calibri"/>
               </a:rPr>
@@ -5529,9 +5748,9 @@
               </a:spcAft>
             </a:pPr>
             <a:r>
-              <a:rPr sz="1800" b="0">
-                <a:solidFill>
-                  <a:srgbClr val="1F2A24"/>
+              <a:rPr sz="1600">
+                <a:solidFill>
+                  <a:srgbClr val="1F2533"/>
                 </a:solidFill>
                 <a:latin typeface="Calibri"/>
               </a:rPr>
@@ -5545,13 +5764,13 @@
               </a:spcAft>
             </a:pPr>
             <a:r>
-              <a:rPr sz="1800" b="0">
-                <a:solidFill>
-                  <a:srgbClr val="1F2A24"/>
-                </a:solidFill>
-                <a:latin typeface="Calibri"/>
-              </a:rPr>
-              <a:t>•  Improve heat detection and AI timing (AM-PM rule / use of activity meters).</a:t>
+              <a:rPr sz="1600">
+                <a:solidFill>
+                  <a:srgbClr val="1F2533"/>
+                </a:solidFill>
+                <a:latin typeface="Calibri"/>
+              </a:rPr>
+              <a:t>•  Improve heat detection and AI timing (AM-PM rule / activity meters).</a:t>
             </a:r>
           </a:p>
           <a:p>
@@ -5561,9 +5780,9 @@
               </a:spcAft>
             </a:pPr>
             <a:r>
-              <a:rPr sz="1800" b="0">
-                <a:solidFill>
-                  <a:srgbClr val="1F2A24"/>
+              <a:rPr sz="1600">
+                <a:solidFill>
+                  <a:srgbClr val="1F2533"/>
                 </a:solidFill>
                 <a:latin typeface="Calibri"/>
               </a:rPr>
@@ -5577,9 +5796,9 @@
               </a:spcAft>
             </a:pPr>
             <a:r>
-              <a:rPr sz="1800" b="0">
-                <a:solidFill>
-                  <a:srgbClr val="1F2A24"/>
+              <a:rPr sz="1600">
+                <a:solidFill>
+                  <a:srgbClr val="1F2533"/>
                 </a:solidFill>
                 <a:latin typeface="Calibri"/>
               </a:rPr>
@@ -5593,9 +5812,9 @@
               </a:spcAft>
             </a:pPr>
             <a:r>
-              <a:rPr sz="1800" b="0">
-                <a:solidFill>
-                  <a:srgbClr val="1F2A24"/>
+              <a:rPr sz="1600">
+                <a:solidFill>
+                  <a:srgbClr val="1F2533"/>
                 </a:solidFill>
                 <a:latin typeface="Calibri"/>
               </a:rPr>
@@ -5606,7 +5825,180 @@
       </p:sp>
       <p:sp>
         <p:nvSpPr>
-          <p:cNvPr id="9" name="TextBox 8"/>
+          <p:cNvPr id="9" name="Rectangle 8"/>
+          <p:cNvSpPr/>
+          <p:nvPr/>
+        </p:nvSpPr>
+        <p:spPr>
+          <a:xfrm>
+            <a:off x="8275320" y="1783080"/>
+            <a:ext cx="3474720" cy="2596896"/>
+          </a:xfrm>
+          <a:prstGeom prst="rect">
+            <a:avLst/>
+          </a:prstGeom>
+          <a:solidFill>
+            <a:srgbClr val="1B3A57"/>
+          </a:solidFill>
+          <a:ln>
+            <a:noFill/>
+          </a:ln>
+        </p:spPr>
+        <p:style>
+          <a:lnRef idx="1">
+            <a:schemeClr val="accent1"/>
+          </a:lnRef>
+          <a:fillRef idx="3">
+            <a:schemeClr val="accent1"/>
+          </a:fillRef>
+          <a:effectRef idx="2">
+            <a:schemeClr val="accent1"/>
+          </a:effectRef>
+          <a:fontRef idx="minor">
+            <a:schemeClr val="lt1"/>
+          </a:fontRef>
+        </p:style>
+        <p:txBody>
+          <a:bodyPr rtlCol="0" anchor="ctr"/>
+          <a:lstStyle/>
+          <a:p>
+            <a:pPr algn="ctr"/>
+          </a:p>
+        </p:txBody>
+      </p:sp>
+      <p:pic>
+        <p:nvPicPr>
+          <p:cNvPr id="10" name="Picture 9" descr="cow_farm.jpg"/>
+          <p:cNvPicPr>
+            <a:picLocks noChangeAspect="1"/>
+          </p:cNvPicPr>
+          <p:nvPr/>
+        </p:nvPicPr>
+        <p:blipFill>
+          <a:blip r:embed="rId2"/>
+          <a:stretch>
+            <a:fillRect/>
+          </a:stretch>
+        </p:blipFill>
+        <p:spPr>
+          <a:xfrm>
+            <a:off x="8321040" y="1828800"/>
+            <a:ext cx="3383280" cy="2505456"/>
+          </a:xfrm>
+          <a:prstGeom prst="rect">
+            <a:avLst/>
+          </a:prstGeom>
+        </p:spPr>
+      </p:pic>
+      <p:sp>
+        <p:nvSpPr>
+          <p:cNvPr id="11" name="TextBox 10"/>
+          <p:cNvSpPr txBox="1"/>
+          <p:nvPr/>
+        </p:nvSpPr>
+        <p:spPr>
+          <a:xfrm>
+            <a:off x="8321040" y="4379976"/>
+            <a:ext cx="3383280" cy="274320"/>
+          </a:xfrm>
+          <a:prstGeom prst="rect">
+            <a:avLst/>
+          </a:prstGeom>
+          <a:noFill/>
+        </p:spPr>
+        <p:txBody>
+          <a:bodyPr wrap="none">
+            <a:spAutoFit/>
+          </a:bodyPr>
+          <a:lstStyle/>
+          <a:p>
+            <a:pPr algn="ctr"/>
+            <a:r>
+              <a:rPr sz="1000" i="1">
+                <a:solidFill>
+                  <a:srgbClr val="555C66"/>
+                </a:solidFill>
+                <a:latin typeface="Calibri"/>
+              </a:rPr>
+              <a:t>Well-managed dairy cow on farm</a:t>
+            </a:r>
+          </a:p>
+        </p:txBody>
+      </p:sp>
+      <p:sp>
+        <p:nvSpPr>
+          <p:cNvPr id="12" name="Rounded Rectangle 11"/>
+          <p:cNvSpPr/>
+          <p:nvPr/>
+        </p:nvSpPr>
+        <p:spPr>
+          <a:xfrm>
+            <a:off x="8321040" y="4663440"/>
+            <a:ext cx="3383280" cy="1463040"/>
+          </a:xfrm>
+          <a:prstGeom prst="roundRect">
+            <a:avLst/>
+          </a:prstGeom>
+          <a:solidFill>
+            <a:srgbClr val="FFFFFF"/>
+          </a:solidFill>
+          <a:ln w="19050">
+            <a:solidFill>
+              <a:srgbClr val="E07A18"/>
+            </a:solidFill>
+          </a:ln>
+        </p:spPr>
+        <p:style>
+          <a:lnRef idx="1">
+            <a:schemeClr val="accent1"/>
+          </a:lnRef>
+          <a:fillRef idx="3">
+            <a:schemeClr val="accent1"/>
+          </a:fillRef>
+          <a:effectRef idx="2">
+            <a:schemeClr val="accent1"/>
+          </a:effectRef>
+          <a:fontRef idx="minor">
+            <a:schemeClr val="lt1"/>
+          </a:fontRef>
+        </p:style>
+        <p:txBody>
+          <a:bodyPr rtlCol="0" anchor="ctr" wrap="square" lIns="137160" rIns="137160" tIns="91440"/>
+          <a:lstStyle/>
+          <a:p>
+            <a:pPr algn="ctr"/>
+            <a:r>
+              <a:rPr sz="1400" i="1" b="1">
+                <a:solidFill>
+                  <a:srgbClr val="1B3A57"/>
+                </a:solidFill>
+              </a:rPr>
+              <a:t>“Prevention is better, </a:t>
+            </a:r>
+            <a:r>
+              <a:rPr sz="1400" i="1">
+                <a:solidFill>
+                  <a:srgbClr val="1F2533"/>
+                </a:solidFill>
+              </a:rPr>
+              <a:t>but timely treatment saves the cow.”</a:t>
+            </a:r>
+          </a:p>
+          <a:p>
+            <a:r>
+              <a:rPr sz="1100">
+                <a:solidFill>
+                  <a:srgbClr val="555C66"/>
+                </a:solidFill>
+              </a:rPr>
+              <a:t>— Field motto in dairy practice</a:t>
+            </a:r>
+          </a:p>
+        </p:txBody>
+      </p:sp>
+      <p:sp>
+        <p:nvSpPr>
+          <p:cNvPr id="13" name="TextBox 12"/>
           <p:cNvSpPr txBox="1"/>
           <p:nvPr/>
         </p:nvSpPr>
@@ -5630,7 +6022,7 @@
             <a:r>
               <a:rPr sz="1000">
                 <a:solidFill>
-                  <a:srgbClr val="555555"/>
+                  <a:srgbClr val="555C66"/>
                 </a:solidFill>
                 <a:latin typeface="Calibri"/>
               </a:rPr>
@@ -5641,7 +6033,7 @@
       </p:sp>
       <p:sp>
         <p:nvSpPr>
-          <p:cNvPr id="10" name="TextBox 9"/>
+          <p:cNvPr id="14" name="TextBox 13"/>
           <p:cNvSpPr txBox="1"/>
           <p:nvPr/>
         </p:nvSpPr>
@@ -5665,11 +6057,11 @@
             <a:r>
               <a:rPr sz="1000">
                 <a:solidFill>
-                  <a:srgbClr val="555555"/>
-                </a:solidFill>
-                <a:latin typeface="Calibri"/>
-              </a:rPr>
-              <a:t>13 / 18</a:t>
+                  <a:srgbClr val="555C66"/>
+                </a:solidFill>
+                <a:latin typeface="Calibri"/>
+              </a:rPr>
+              <a:t>13 / 19</a:t>
             </a:r>
           </a:p>
         </p:txBody>
@@ -5707,7 +6099,7 @@
             <a:avLst/>
           </a:prstGeom>
           <a:solidFill>
-            <a:srgbClr val="F5F1E8"/>
+            <a:srgbClr val="F7F3EB"/>
           </a:solidFill>
           <a:ln>
             <a:noFill/>
@@ -5744,13 +6136,13 @@
         <p:spPr>
           <a:xfrm>
             <a:off x="0" y="0"/>
-            <a:ext cx="320040" cy="6858000"/>
-          </a:xfrm>
-          <a:prstGeom prst="rect">
-            <a:avLst/>
-          </a:prstGeom>
-          <a:solidFill>
-            <a:srgbClr val="0B3D2E"/>
+            <a:ext cx="292608" cy="6858000"/>
+          </a:xfrm>
+          <a:prstGeom prst="rect">
+            <a:avLst/>
+          </a:prstGeom>
+          <a:solidFill>
+            <a:srgbClr val="1B3A57"/>
           </a:solidFill>
           <a:ln>
             <a:noFill/>
@@ -5786,14 +6178,14 @@
         </p:nvSpPr>
         <p:spPr>
           <a:xfrm>
-            <a:off x="320040" y="0"/>
-            <a:ext cx="73152" cy="6858000"/>
-          </a:xfrm>
-          <a:prstGeom prst="rect">
-            <a:avLst/>
-          </a:prstGeom>
-          <a:solidFill>
-            <a:srgbClr val="C9A227"/>
+            <a:off x="292608" y="0"/>
+            <a:ext cx="64008" cy="6858000"/>
+          </a:xfrm>
+          <a:prstGeom prst="rect">
+            <a:avLst/>
+          </a:prstGeom>
+          <a:solidFill>
+            <a:srgbClr val="E07A18"/>
           </a:solidFill>
           <a:ln>
             <a:noFill/>
@@ -5829,7 +6221,7 @@
         </p:nvSpPr>
         <p:spPr>
           <a:xfrm>
-            <a:off x="640080" y="320040"/>
+            <a:off x="594360" y="292608"/>
             <a:ext cx="11155680" cy="822960"/>
           </a:xfrm>
           <a:prstGeom prst="rect">
@@ -5846,7 +6238,7 @@
             <a:r>
               <a:rPr sz="3400" b="1">
                 <a:solidFill>
-                  <a:srgbClr val="0B3D2E"/>
+                  <a:srgbClr val="1B3A57"/>
                 </a:solidFill>
                 <a:latin typeface="Calibri"/>
               </a:rPr>
@@ -5863,14 +6255,14 @@
         </p:nvSpPr>
         <p:spPr>
           <a:xfrm>
-            <a:off x="640080" y="1078992"/>
-            <a:ext cx="1097280" cy="64008"/>
-          </a:xfrm>
-          <a:prstGeom prst="rect">
-            <a:avLst/>
-          </a:prstGeom>
-          <a:solidFill>
-            <a:srgbClr val="C9A227"/>
+            <a:off x="594360" y="1078992"/>
+            <a:ext cx="1280160" cy="64008"/>
+          </a:xfrm>
+          <a:prstGeom prst="rect">
+            <a:avLst/>
+          </a:prstGeom>
+          <a:solidFill>
+            <a:srgbClr val="E07A18"/>
           </a:solidFill>
           <a:ln>
             <a:noFill/>
@@ -5913,7 +6305,7 @@
             <a:avLst/>
           </a:prstGeom>
           <a:solidFill>
-            <a:srgbClr val="0B3D2E"/>
+            <a:srgbClr val="1B3A57"/>
           </a:solidFill>
           <a:ln>
             <a:noFill/>
@@ -5969,7 +6361,7 @@
           </a:solidFill>
           <a:ln w="9525">
             <a:solidFill>
-              <a:srgbClr val="0B3D2E"/>
+              <a:srgbClr val="1B3A57"/>
             </a:solidFill>
           </a:ln>
         </p:spPr>
@@ -5999,7 +6391,7 @@
             <a:r>
               <a:rPr sz="1200">
                 <a:solidFill>
-                  <a:srgbClr val="1F2A24"/>
+                  <a:srgbClr val="1F2533"/>
                 </a:solidFill>
                 <a:latin typeface="Calibri"/>
               </a:rPr>
@@ -6015,7 +6407,7 @@
             <a:r>
               <a:rPr sz="1200">
                 <a:solidFill>
-                  <a:srgbClr val="1F2A24"/>
+                  <a:srgbClr val="1F2533"/>
                 </a:solidFill>
                 <a:latin typeface="Calibri"/>
               </a:rPr>
@@ -6031,7 +6423,7 @@
             <a:r>
               <a:rPr sz="1200">
                 <a:solidFill>
-                  <a:srgbClr val="1F2A24"/>
+                  <a:srgbClr val="1F2533"/>
                 </a:solidFill>
                 <a:latin typeface="Calibri"/>
               </a:rPr>
@@ -6047,7 +6439,7 @@
             <a:r>
               <a:rPr sz="1200">
                 <a:solidFill>
-                  <a:srgbClr val="1F2A24"/>
+                  <a:srgbClr val="1F2533"/>
                 </a:solidFill>
                 <a:latin typeface="Calibri"/>
               </a:rPr>
@@ -6071,7 +6463,7 @@
             <a:avLst/>
           </a:prstGeom>
           <a:solidFill>
-            <a:srgbClr val="C9A227"/>
+            <a:srgbClr val="E07A18"/>
           </a:solidFill>
           <a:ln>
             <a:noFill/>
@@ -6127,7 +6519,7 @@
           </a:solidFill>
           <a:ln w="9525">
             <a:solidFill>
-              <a:srgbClr val="C9A227"/>
+              <a:srgbClr val="E07A18"/>
             </a:solidFill>
           </a:ln>
         </p:spPr>
@@ -6157,7 +6549,7 @@
             <a:r>
               <a:rPr sz="1200">
                 <a:solidFill>
-                  <a:srgbClr val="1F2A24"/>
+                  <a:srgbClr val="1F2533"/>
                 </a:solidFill>
                 <a:latin typeface="Calibri"/>
               </a:rPr>
@@ -6173,7 +6565,7 @@
             <a:r>
               <a:rPr sz="1200">
                 <a:solidFill>
-                  <a:srgbClr val="1F2A24"/>
+                  <a:srgbClr val="1F2533"/>
                 </a:solidFill>
                 <a:latin typeface="Calibri"/>
               </a:rPr>
@@ -6189,7 +6581,7 @@
             <a:r>
               <a:rPr sz="1200">
                 <a:solidFill>
-                  <a:srgbClr val="1F2A24"/>
+                  <a:srgbClr val="1F2533"/>
                 </a:solidFill>
                 <a:latin typeface="Calibri"/>
               </a:rPr>
@@ -6205,7 +6597,7 @@
             <a:r>
               <a:rPr sz="1200">
                 <a:solidFill>
-                  <a:srgbClr val="1F2A24"/>
+                  <a:srgbClr val="1F2533"/>
                 </a:solidFill>
                 <a:latin typeface="Calibri"/>
               </a:rPr>
@@ -6229,7 +6621,7 @@
             <a:avLst/>
           </a:prstGeom>
           <a:solidFill>
-            <a:srgbClr val="0B3D2E"/>
+            <a:srgbClr val="2E86AB"/>
           </a:solidFill>
           <a:ln>
             <a:noFill/>
@@ -6285,7 +6677,7 @@
           </a:solidFill>
           <a:ln w="9525">
             <a:solidFill>
-              <a:srgbClr val="0B3D2E"/>
+              <a:srgbClr val="2E86AB"/>
             </a:solidFill>
           </a:ln>
         </p:spPr>
@@ -6315,7 +6707,7 @@
             <a:r>
               <a:rPr sz="1200">
                 <a:solidFill>
-                  <a:srgbClr val="1F2A24"/>
+                  <a:srgbClr val="1F2533"/>
                 </a:solidFill>
                 <a:latin typeface="Calibri"/>
               </a:rPr>
@@ -6331,7 +6723,7 @@
             <a:r>
               <a:rPr sz="1200">
                 <a:solidFill>
-                  <a:srgbClr val="1F2A24"/>
+                  <a:srgbClr val="1F2533"/>
                 </a:solidFill>
                 <a:latin typeface="Calibri"/>
               </a:rPr>
@@ -6347,7 +6739,7 @@
             <a:r>
               <a:rPr sz="1200">
                 <a:solidFill>
-                  <a:srgbClr val="1F2A24"/>
+                  <a:srgbClr val="1F2533"/>
                 </a:solidFill>
                 <a:latin typeface="Calibri"/>
               </a:rPr>
@@ -6363,11 +6755,11 @@
             <a:r>
               <a:rPr sz="1200">
                 <a:solidFill>
-                  <a:srgbClr val="1F2A24"/>
-                </a:solidFill>
-                <a:latin typeface="Calibri"/>
-              </a:rPr>
-              <a:t>• Modified Ovsynch / Co-Synch / Double-Ovsynch for repeat breeders</a:t>
+                  <a:srgbClr val="1F2533"/>
+                </a:solidFill>
+                <a:latin typeface="Calibri"/>
+              </a:rPr>
+              <a:t>• Modified Ovsynch / Co-Synch / Double-Ovsynch for repeaters</a:t>
             </a:r>
           </a:p>
         </p:txBody>
@@ -6398,7 +6790,7 @@
             <a:r>
               <a:rPr sz="1000">
                 <a:solidFill>
-                  <a:srgbClr val="555555"/>
+                  <a:srgbClr val="555C66"/>
                 </a:solidFill>
                 <a:latin typeface="Calibri"/>
               </a:rPr>
@@ -6433,11 +6825,11 @@
             <a:r>
               <a:rPr sz="1000">
                 <a:solidFill>
-                  <a:srgbClr val="555555"/>
-                </a:solidFill>
-                <a:latin typeface="Calibri"/>
-              </a:rPr>
-              <a:t>14 / 18</a:t>
+                  <a:srgbClr val="555C66"/>
+                </a:solidFill>
+                <a:latin typeface="Calibri"/>
+              </a:rPr>
+              <a:t>14 / 19</a:t>
             </a:r>
           </a:p>
         </p:txBody>
@@ -6475,7 +6867,7 @@
             <a:avLst/>
           </a:prstGeom>
           <a:solidFill>
-            <a:srgbClr val="F5F1E8"/>
+            <a:srgbClr val="F7F3EB"/>
           </a:solidFill>
           <a:ln>
             <a:noFill/>
@@ -6512,13 +6904,13 @@
         <p:spPr>
           <a:xfrm>
             <a:off x="0" y="0"/>
-            <a:ext cx="320040" cy="6858000"/>
-          </a:xfrm>
-          <a:prstGeom prst="rect">
-            <a:avLst/>
-          </a:prstGeom>
-          <a:solidFill>
-            <a:srgbClr val="0B3D2E"/>
+            <a:ext cx="292608" cy="6858000"/>
+          </a:xfrm>
+          <a:prstGeom prst="rect">
+            <a:avLst/>
+          </a:prstGeom>
+          <a:solidFill>
+            <a:srgbClr val="1B3A57"/>
           </a:solidFill>
           <a:ln>
             <a:noFill/>
@@ -6554,14 +6946,14 @@
         </p:nvSpPr>
         <p:spPr>
           <a:xfrm>
-            <a:off x="320040" y="0"/>
-            <a:ext cx="73152" cy="6858000"/>
-          </a:xfrm>
-          <a:prstGeom prst="rect">
-            <a:avLst/>
-          </a:prstGeom>
-          <a:solidFill>
-            <a:srgbClr val="C9A227"/>
+            <a:off x="292608" y="0"/>
+            <a:ext cx="64008" cy="6858000"/>
+          </a:xfrm>
+          <a:prstGeom prst="rect">
+            <a:avLst/>
+          </a:prstGeom>
+          <a:solidFill>
+            <a:srgbClr val="E07A18"/>
           </a:solidFill>
           <a:ln>
             <a:noFill/>
@@ -6597,7 +6989,7 @@
         </p:nvSpPr>
         <p:spPr>
           <a:xfrm>
-            <a:off x="640080" y="320040"/>
+            <a:off x="594360" y="292608"/>
             <a:ext cx="11155680" cy="822960"/>
           </a:xfrm>
           <a:prstGeom prst="rect">
@@ -6614,7 +7006,7 @@
             <a:r>
               <a:rPr sz="3400" b="1">
                 <a:solidFill>
-                  <a:srgbClr val="0B3D2E"/>
+                  <a:srgbClr val="1B3A57"/>
                 </a:solidFill>
                 <a:latin typeface="Calibri"/>
               </a:rPr>
@@ -6631,14 +7023,14 @@
         </p:nvSpPr>
         <p:spPr>
           <a:xfrm>
-            <a:off x="640080" y="1078992"/>
-            <a:ext cx="1097280" cy="64008"/>
-          </a:xfrm>
-          <a:prstGeom prst="rect">
-            <a:avLst/>
-          </a:prstGeom>
-          <a:solidFill>
-            <a:srgbClr val="C9A227"/>
+            <a:off x="594360" y="1078992"/>
+            <a:ext cx="1280160" cy="64008"/>
+          </a:xfrm>
+          <a:prstGeom prst="rect">
+            <a:avLst/>
+          </a:prstGeom>
+          <a:solidFill>
+            <a:srgbClr val="E07A18"/>
           </a:solidFill>
           <a:ln>
             <a:noFill/>
@@ -6674,7 +7066,7 @@
         </p:nvSpPr>
         <p:spPr>
           <a:xfrm>
-            <a:off x="777240" y="1645920"/>
+            <a:off x="777240" y="1691640"/>
             <a:ext cx="10972800" cy="4572000"/>
           </a:xfrm>
           <a:prstGeom prst="rect">
@@ -6694,9 +7086,9 @@
               </a:spcAft>
             </a:pPr>
             <a:r>
-              <a:rPr sz="1600" b="0">
-                <a:solidFill>
-                  <a:srgbClr val="1F2A24"/>
+              <a:rPr sz="1600">
+                <a:solidFill>
+                  <a:srgbClr val="1F2533"/>
                 </a:solidFill>
                 <a:latin typeface="Calibri"/>
               </a:rPr>
@@ -6712,7 +7104,7 @@
             <a:r>
               <a:rPr sz="1400">
                 <a:solidFill>
-                  <a:srgbClr val="1F2A24"/>
+                  <a:srgbClr val="1F2533"/>
                 </a:solidFill>
                 <a:latin typeface="Calibri"/>
               </a:rPr>
@@ -6728,7 +7120,7 @@
             <a:r>
               <a:rPr sz="1400">
                 <a:solidFill>
-                  <a:srgbClr val="1F2A24"/>
+                  <a:srgbClr val="1F2533"/>
                 </a:solidFill>
                 <a:latin typeface="Calibri"/>
               </a:rPr>
@@ -6742,9 +7134,9 @@
               </a:spcAft>
             </a:pPr>
             <a:r>
-              <a:rPr sz="1600" b="0">
-                <a:solidFill>
-                  <a:srgbClr val="1F2A24"/>
+              <a:rPr sz="1600">
+                <a:solidFill>
+                  <a:srgbClr val="1F2533"/>
                 </a:solidFill>
                 <a:latin typeface="Calibri"/>
               </a:rPr>
@@ -6758,9 +7150,9 @@
               </a:spcAft>
             </a:pPr>
             <a:r>
-              <a:rPr sz="1600" b="0">
-                <a:solidFill>
-                  <a:srgbClr val="1F2A24"/>
+              <a:rPr sz="1600">
+                <a:solidFill>
+                  <a:srgbClr val="1F2533"/>
                 </a:solidFill>
                 <a:latin typeface="Calibri"/>
               </a:rPr>
@@ -6774,9 +7166,9 @@
               </a:spcAft>
             </a:pPr>
             <a:r>
-              <a:rPr sz="1600" b="0">
-                <a:solidFill>
-                  <a:srgbClr val="1F2A24"/>
+              <a:rPr sz="1600">
+                <a:solidFill>
+                  <a:srgbClr val="1F2533"/>
                 </a:solidFill>
                 <a:latin typeface="Calibri"/>
               </a:rPr>
@@ -6790,9 +7182,9 @@
               </a:spcAft>
             </a:pPr>
             <a:r>
-              <a:rPr sz="1600" b="0">
-                <a:solidFill>
-                  <a:srgbClr val="1F2A24"/>
+              <a:rPr sz="1600">
+                <a:solidFill>
+                  <a:srgbClr val="1F2533"/>
                 </a:solidFill>
                 <a:latin typeface="Calibri"/>
               </a:rPr>
@@ -6808,7 +7200,7 @@
             <a:r>
               <a:rPr sz="1400">
                 <a:solidFill>
-                  <a:srgbClr val="1F2A24"/>
+                  <a:srgbClr val="1F2533"/>
                 </a:solidFill>
                 <a:latin typeface="Calibri"/>
               </a:rPr>
@@ -6824,7 +7216,7 @@
             <a:r>
               <a:rPr sz="1400">
                 <a:solidFill>
-                  <a:srgbClr val="1F2A24"/>
+                  <a:srgbClr val="1F2533"/>
                 </a:solidFill>
                 <a:latin typeface="Calibri"/>
               </a:rPr>
@@ -6838,9 +7230,9 @@
               </a:spcAft>
             </a:pPr>
             <a:r>
-              <a:rPr sz="1600" b="0">
-                <a:solidFill>
-                  <a:srgbClr val="1F2A24"/>
+              <a:rPr sz="1600">
+                <a:solidFill>
+                  <a:srgbClr val="1F2533"/>
                 </a:solidFill>
                 <a:latin typeface="Calibri"/>
               </a:rPr>
@@ -6875,7 +7267,7 @@
             <a:r>
               <a:rPr sz="1000">
                 <a:solidFill>
-                  <a:srgbClr val="555555"/>
+                  <a:srgbClr val="555C66"/>
                 </a:solidFill>
                 <a:latin typeface="Calibri"/>
               </a:rPr>
@@ -6910,11 +7302,11 @@
             <a:r>
               <a:rPr sz="1000">
                 <a:solidFill>
-                  <a:srgbClr val="555555"/>
-                </a:solidFill>
-                <a:latin typeface="Calibri"/>
-              </a:rPr>
-              <a:t>15 / 18</a:t>
+                  <a:srgbClr val="555C66"/>
+                </a:solidFill>
+                <a:latin typeface="Calibri"/>
+              </a:rPr>
+              <a:t>15 / 19</a:t>
             </a:r>
           </a:p>
         </p:txBody>
@@ -6952,7 +7344,7 @@
             <a:avLst/>
           </a:prstGeom>
           <a:solidFill>
-            <a:srgbClr val="F5F1E8"/>
+            <a:srgbClr val="F7F3EB"/>
           </a:solidFill>
           <a:ln>
             <a:noFill/>
@@ -6989,13 +7381,13 @@
         <p:spPr>
           <a:xfrm>
             <a:off x="0" y="0"/>
-            <a:ext cx="320040" cy="6858000"/>
-          </a:xfrm>
-          <a:prstGeom prst="rect">
-            <a:avLst/>
-          </a:prstGeom>
-          <a:solidFill>
-            <a:srgbClr val="0B3D2E"/>
+            <a:ext cx="292608" cy="6858000"/>
+          </a:xfrm>
+          <a:prstGeom prst="rect">
+            <a:avLst/>
+          </a:prstGeom>
+          <a:solidFill>
+            <a:srgbClr val="1B3A57"/>
           </a:solidFill>
           <a:ln>
             <a:noFill/>
@@ -7031,14 +7423,14 @@
         </p:nvSpPr>
         <p:spPr>
           <a:xfrm>
-            <a:off x="320040" y="0"/>
-            <a:ext cx="73152" cy="6858000"/>
-          </a:xfrm>
-          <a:prstGeom prst="rect">
-            <a:avLst/>
-          </a:prstGeom>
-          <a:solidFill>
-            <a:srgbClr val="C9A227"/>
+            <a:off x="292608" y="0"/>
+            <a:ext cx="64008" cy="6858000"/>
+          </a:xfrm>
+          <a:prstGeom prst="rect">
+            <a:avLst/>
+          </a:prstGeom>
+          <a:solidFill>
+            <a:srgbClr val="E07A18"/>
           </a:solidFill>
           <a:ln>
             <a:noFill/>
@@ -7074,7 +7466,7 @@
         </p:nvSpPr>
         <p:spPr>
           <a:xfrm>
-            <a:off x="640080" y="320040"/>
+            <a:off x="594360" y="292608"/>
             <a:ext cx="11155680" cy="822960"/>
           </a:xfrm>
           <a:prstGeom prst="rect">
@@ -7091,11 +7483,11 @@
             <a:r>
               <a:rPr sz="3400" b="1">
                 <a:solidFill>
-                  <a:srgbClr val="0B3D2E"/>
-                </a:solidFill>
-                <a:latin typeface="Calibri"/>
-              </a:rPr>
-              <a:t>Prevention — Better Than Cure</a:t>
+                  <a:srgbClr val="1B3A57"/>
+                </a:solidFill>
+                <a:latin typeface="Calibri"/>
+              </a:rPr>
+              <a:t>Buffalo-Specific Repeat Breeding</a:t>
             </a:r>
           </a:p>
         </p:txBody>
@@ -7108,14 +7500,14 @@
         </p:nvSpPr>
         <p:spPr>
           <a:xfrm>
-            <a:off x="640080" y="1078992"/>
-            <a:ext cx="1097280" cy="64008"/>
-          </a:xfrm>
-          <a:prstGeom prst="rect">
-            <a:avLst/>
-          </a:prstGeom>
-          <a:solidFill>
-            <a:srgbClr val="C9A227"/>
+            <a:off x="594360" y="1078992"/>
+            <a:ext cx="1280160" cy="64008"/>
+          </a:xfrm>
+          <a:prstGeom prst="rect">
+            <a:avLst/>
+          </a:prstGeom>
+          <a:solidFill>
+            <a:srgbClr val="E07A18"/>
           </a:solidFill>
           <a:ln>
             <a:noFill/>
@@ -7145,20 +7537,54 @@
       </p:sp>
       <p:sp>
         <p:nvSpPr>
-          <p:cNvPr id="7" name="Rectangle 6"/>
+          <p:cNvPr id="7" name="TextBox 6"/>
+          <p:cNvSpPr txBox="1"/>
+          <p:nvPr/>
+        </p:nvSpPr>
+        <p:spPr>
+          <a:xfrm>
+            <a:off x="594360" y="1170432"/>
+            <a:ext cx="11155680" cy="365760"/>
+          </a:xfrm>
+          <a:prstGeom prst="rect">
+            <a:avLst/>
+          </a:prstGeom>
+          <a:noFill/>
+        </p:spPr>
+        <p:txBody>
+          <a:bodyPr wrap="none">
+            <a:spAutoFit/>
+          </a:bodyPr>
+          <a:lstStyle/>
+          <a:p>
+            <a:r>
+              <a:rPr sz="1400" i="1">
+                <a:solidFill>
+                  <a:srgbClr val="555C66"/>
+                </a:solidFill>
+                <a:latin typeface="Calibri"/>
+              </a:rPr>
+              <a:t>Why buffaloes pose unique reproductive challenges</a:t>
+            </a:r>
+          </a:p>
+        </p:txBody>
+      </p:sp>
+      <p:sp>
+        <p:nvSpPr>
+          <p:cNvPr id="8" name="Rectangle 7"/>
           <p:cNvSpPr/>
           <p:nvPr/>
         </p:nvSpPr>
         <p:spPr>
           <a:xfrm>
-            <a:off x="777240" y="1783080"/>
-            <a:ext cx="5394960" cy="502920"/>
-          </a:xfrm>
-          <a:prstGeom prst="rect">
-            <a:avLst/>
-          </a:prstGeom>
-          <a:solidFill>
-            <a:srgbClr val="0B3D2E"/>
+            <a:off x="731520" y="1691640"/>
+            <a:ext cx="4206240" cy="2926080"/>
+          </a:xfrm>
+          <a:prstGeom prst="rect">
+            <a:avLst/>
+          </a:prstGeom>
+          <a:solidFill>
+            <a:srgbClr val="1B3A57"/>
           </a:solidFill>
           <a:ln>
             <a:noFill/>
@@ -7179,43 +7605,210 @@
           </a:fontRef>
         </p:style>
         <p:txBody>
-          <a:bodyPr rtlCol="0" anchor="ctr" lIns="137160"/>
-          <a:lstStyle/>
-          <a:p>
-            <a:pPr algn="l"/>
-            <a:r>
-              <a:rPr sz="1500" b="1">
-                <a:solidFill>
-                  <a:srgbClr val="FFFFFF"/>
-                </a:solidFill>
-                <a:latin typeface="Calibri"/>
-              </a:rPr>
-              <a:t>Herd-Level Practices</a:t>
-            </a:r>
-          </a:p>
-        </p:txBody>
-      </p:sp>
-      <p:sp>
-        <p:nvSpPr>
-          <p:cNvPr id="8" name="Rectangle 7"/>
+          <a:bodyPr rtlCol="0" anchor="ctr"/>
+          <a:lstStyle/>
+          <a:p>
+            <a:pPr algn="ctr"/>
+          </a:p>
+        </p:txBody>
+      </p:sp>
+      <p:pic>
+        <p:nvPicPr>
+          <p:cNvPr id="9" name="Picture 8" descr="buffalo_murrah.jpg"/>
+          <p:cNvPicPr>
+            <a:picLocks noChangeAspect="1"/>
+          </p:cNvPicPr>
+          <p:nvPr/>
+        </p:nvPicPr>
+        <p:blipFill>
+          <a:blip r:embed="rId2"/>
+          <a:stretch>
+            <a:fillRect/>
+          </a:stretch>
+        </p:blipFill>
+        <p:spPr>
+          <a:xfrm>
+            <a:off x="777240" y="1737360"/>
+            <a:ext cx="4114800" cy="2834640"/>
+          </a:xfrm>
+          <a:prstGeom prst="rect">
+            <a:avLst/>
+          </a:prstGeom>
+        </p:spPr>
+      </p:pic>
+      <p:sp>
+        <p:nvSpPr>
+          <p:cNvPr id="10" name="TextBox 9"/>
+          <p:cNvSpPr txBox="1"/>
+          <p:nvPr/>
+        </p:nvSpPr>
+        <p:spPr>
+          <a:xfrm>
+            <a:off x="777240" y="4617720"/>
+            <a:ext cx="4114800" cy="274320"/>
+          </a:xfrm>
+          <a:prstGeom prst="rect">
+            <a:avLst/>
+          </a:prstGeom>
+          <a:noFill/>
+        </p:spPr>
+        <p:txBody>
+          <a:bodyPr wrap="none">
+            <a:spAutoFit/>
+          </a:bodyPr>
+          <a:lstStyle/>
+          <a:p>
+            <a:pPr algn="ctr"/>
+            <a:r>
+              <a:rPr sz="1000" i="1">
+                <a:solidFill>
+                  <a:srgbClr val="555C66"/>
+                </a:solidFill>
+                <a:latin typeface="Calibri"/>
+              </a:rPr>
+              <a:t>Murrah buffalo (Bubalus bubalis)</a:t>
+            </a:r>
+          </a:p>
+        </p:txBody>
+      </p:sp>
+      <p:sp>
+        <p:nvSpPr>
+          <p:cNvPr id="11" name="TextBox 10"/>
+          <p:cNvSpPr txBox="1"/>
+          <p:nvPr/>
+        </p:nvSpPr>
+        <p:spPr>
+          <a:xfrm>
+            <a:off x="5120640" y="1737360"/>
+            <a:ext cx="6675120" cy="3200400"/>
+          </a:xfrm>
+          <a:prstGeom prst="rect">
+            <a:avLst/>
+          </a:prstGeom>
+          <a:noFill/>
+        </p:spPr>
+        <p:txBody>
+          <a:bodyPr wrap="square" lIns="0" rIns="0">
+            <a:spAutoFit/>
+          </a:bodyPr>
+          <a:lstStyle/>
+          <a:p>
+            <a:pPr>
+              <a:spcAft>
+                <a:spcPts val="600"/>
+              </a:spcAft>
+            </a:pPr>
+            <a:r>
+              <a:rPr sz="1400">
+                <a:solidFill>
+                  <a:srgbClr val="1F2533"/>
+                </a:solidFill>
+                <a:latin typeface="Calibri"/>
+              </a:rPr>
+              <a:t>•  Silent / sub-oestrus is common — up to 50–60 % of heats are missed without close observation.</a:t>
+            </a:r>
+          </a:p>
+          <a:p>
+            <a:pPr>
+              <a:spcAft>
+                <a:spcPts val="600"/>
+              </a:spcAft>
+            </a:pPr>
+            <a:r>
+              <a:rPr sz="1400">
+                <a:solidFill>
+                  <a:srgbClr val="1F2533"/>
+                </a:solidFill>
+                <a:latin typeface="Calibri"/>
+              </a:rPr>
+              <a:t>•  Late maturity (36–42 months) and longer post-partum anoestrus (90–150 days) than cows.</a:t>
+            </a:r>
+          </a:p>
+          <a:p>
+            <a:pPr>
+              <a:spcAft>
+                <a:spcPts val="600"/>
+              </a:spcAft>
+            </a:pPr>
+            <a:r>
+              <a:rPr sz="1400">
+                <a:solidFill>
+                  <a:srgbClr val="1F2533"/>
+                </a:solidFill>
+                <a:latin typeface="Calibri"/>
+              </a:rPr>
+              <a:t>•  Strongly seasonal breeder — short photoperiod (Oct–Feb) is the peak breeding season.</a:t>
+            </a:r>
+          </a:p>
+          <a:p>
+            <a:pPr>
+              <a:spcAft>
+                <a:spcPts val="600"/>
+              </a:spcAft>
+            </a:pPr>
+            <a:r>
+              <a:rPr sz="1400">
+                <a:solidFill>
+                  <a:srgbClr val="1F2533"/>
+                </a:solidFill>
+                <a:latin typeface="Calibri"/>
+              </a:rPr>
+              <a:t>•  Summer infertility: heat stress depresses LH surge, oocyte quality and embryo survival.</a:t>
+            </a:r>
+          </a:p>
+          <a:p>
+            <a:pPr>
+              <a:spcAft>
+                <a:spcPts val="600"/>
+              </a:spcAft>
+            </a:pPr>
+            <a:r>
+              <a:rPr sz="1400">
+                <a:solidFill>
+                  <a:srgbClr val="1F2533"/>
+                </a:solidFill>
+                <a:latin typeface="Calibri"/>
+              </a:rPr>
+              <a:t>•  Smaller, deeper-seated ovaries with fewer antral follicles than cows.</a:t>
+            </a:r>
+          </a:p>
+          <a:p>
+            <a:pPr>
+              <a:spcAft>
+                <a:spcPts val="600"/>
+              </a:spcAft>
+            </a:pPr>
+            <a:r>
+              <a:rPr sz="1400">
+                <a:solidFill>
+                  <a:srgbClr val="1F2533"/>
+                </a:solidFill>
+                <a:latin typeface="Calibri"/>
+              </a:rPr>
+              <a:t>•  Higher incidence of true anoestrus, ovarian inactivity and anovulatory cysts.</a:t>
+            </a:r>
+          </a:p>
+        </p:txBody>
+      </p:sp>
+      <p:sp>
+        <p:nvSpPr>
+          <p:cNvPr id="12" name="Rectangle 11"/>
           <p:cNvSpPr/>
           <p:nvPr/>
         </p:nvSpPr>
         <p:spPr>
           <a:xfrm>
-            <a:off x="777240" y="2286000"/>
-            <a:ext cx="5394960" cy="1691640"/>
-          </a:xfrm>
-          <a:prstGeom prst="rect">
-            <a:avLst/>
-          </a:prstGeom>
-          <a:solidFill>
-            <a:srgbClr val="FFFFFF"/>
-          </a:solidFill>
-          <a:ln w="9525">
-            <a:solidFill>
-              <a:srgbClr val="0B3D2E"/>
-            </a:solidFill>
+            <a:off x="777240" y="4754880"/>
+            <a:ext cx="3611880" cy="502920"/>
+          </a:xfrm>
+          <a:prstGeom prst="rect">
+            <a:avLst/>
+          </a:prstGeom>
+          <a:solidFill>
+            <a:srgbClr val="1B3A57"/>
+          </a:solidFill>
+          <a:ln>
+            <a:noFill/>
           </a:ln>
         </p:spPr>
         <p:style>
@@ -7233,93 +7826,43 @@
           </a:fontRef>
         </p:style>
         <p:txBody>
-          <a:bodyPr rtlCol="0" anchor="ctr" wrap="square" lIns="137160" rIns="137160" tIns="91440"/>
-          <a:lstStyle/>
-          <a:p>
-            <a:pPr algn="ctr">
-              <a:spcAft>
-                <a:spcPts val="400"/>
-              </a:spcAft>
-            </a:pPr>
-            <a:r>
-              <a:rPr sz="1200">
-                <a:solidFill>
-                  <a:srgbClr val="1F2A24"/>
-                </a:solidFill>
-                <a:latin typeface="Calibri"/>
-              </a:rPr>
-              <a:t>• Routine post-partum examination on Day 30–45</a:t>
-            </a:r>
-          </a:p>
-          <a:p>
-            <a:pPr>
-              <a:spcAft>
-                <a:spcPts val="400"/>
-              </a:spcAft>
-            </a:pPr>
-            <a:r>
-              <a:rPr sz="1200">
-                <a:solidFill>
-                  <a:srgbClr val="1F2A24"/>
-                </a:solidFill>
-                <a:latin typeface="Calibri"/>
-              </a:rPr>
-              <a:t>• Maintain calving interval 12–13 months</a:t>
-            </a:r>
-          </a:p>
-          <a:p>
-            <a:pPr>
-              <a:spcAft>
-                <a:spcPts val="400"/>
-              </a:spcAft>
-            </a:pPr>
-            <a:r>
-              <a:rPr sz="1200">
-                <a:solidFill>
-                  <a:srgbClr val="1F2A24"/>
-                </a:solidFill>
-                <a:latin typeface="Calibri"/>
-              </a:rPr>
-              <a:t>• Vaccinate against Brucella, IBR, BVD, Leptospira</a:t>
-            </a:r>
-          </a:p>
-          <a:p>
-            <a:pPr>
-              <a:spcAft>
-                <a:spcPts val="400"/>
-              </a:spcAft>
-            </a:pPr>
-            <a:r>
-              <a:rPr sz="1200">
-                <a:solidFill>
-                  <a:srgbClr val="1F2A24"/>
-                </a:solidFill>
-                <a:latin typeface="Calibri"/>
-              </a:rPr>
-              <a:t>• Bio-security; quarantine new animals</a:t>
-            </a:r>
-          </a:p>
-        </p:txBody>
-      </p:sp>
-      <p:sp>
-        <p:nvSpPr>
-          <p:cNvPr id="9" name="Rectangle 8"/>
+          <a:bodyPr rtlCol="0" anchor="ctr" lIns="137160"/>
+          <a:lstStyle/>
+          <a:p>
+            <a:pPr algn="l"/>
+            <a:r>
+              <a:rPr sz="1500" b="1">
+                <a:solidFill>
+                  <a:srgbClr val="FFFFFF"/>
+                </a:solidFill>
+                <a:latin typeface="Calibri"/>
+              </a:rPr>
+              <a:t>Heat Detection</a:t>
+            </a:r>
+          </a:p>
+        </p:txBody>
+      </p:sp>
+      <p:sp>
+        <p:nvSpPr>
+          <p:cNvPr id="13" name="Rectangle 12"/>
           <p:cNvSpPr/>
           <p:nvPr/>
         </p:nvSpPr>
         <p:spPr>
           <a:xfrm>
-            <a:off x="6400800" y="1783080"/>
-            <a:ext cx="5394960" cy="502920"/>
-          </a:xfrm>
-          <a:prstGeom prst="rect">
-            <a:avLst/>
-          </a:prstGeom>
-          <a:solidFill>
-            <a:srgbClr val="C9A227"/>
-          </a:solidFill>
-          <a:ln>
-            <a:noFill/>
+            <a:off x="777240" y="5257800"/>
+            <a:ext cx="3611880" cy="1188720"/>
+          </a:xfrm>
+          <a:prstGeom prst="rect">
+            <a:avLst/>
+          </a:prstGeom>
+          <a:solidFill>
+            <a:srgbClr val="FFFFFF"/>
+          </a:solidFill>
+          <a:ln w="9525">
+            <a:solidFill>
+              <a:srgbClr val="1B3A57"/>
+            </a:solidFill>
           </a:ln>
         </p:spPr>
         <p:style>
@@ -7337,43 +7880,77 @@
           </a:fontRef>
         </p:style>
         <p:txBody>
-          <a:bodyPr rtlCol="0" anchor="ctr" lIns="137160"/>
-          <a:lstStyle/>
-          <a:p>
-            <a:pPr algn="l"/>
-            <a:r>
-              <a:rPr sz="1500" b="1">
-                <a:solidFill>
-                  <a:srgbClr val="FFFFFF"/>
-                </a:solidFill>
-                <a:latin typeface="Calibri"/>
-              </a:rPr>
-              <a:t>Cow-Level Practices</a:t>
-            </a:r>
-          </a:p>
-        </p:txBody>
-      </p:sp>
-      <p:sp>
-        <p:nvSpPr>
-          <p:cNvPr id="10" name="Rectangle 9"/>
+          <a:bodyPr rtlCol="0" anchor="ctr" wrap="square" lIns="137160" rIns="137160" tIns="91440"/>
+          <a:lstStyle/>
+          <a:p>
+            <a:pPr algn="ctr">
+              <a:spcAft>
+                <a:spcPts val="400"/>
+              </a:spcAft>
+            </a:pPr>
+            <a:r>
+              <a:rPr sz="1200">
+                <a:solidFill>
+                  <a:srgbClr val="1F2533"/>
+                </a:solidFill>
+                <a:latin typeface="Calibri"/>
+              </a:rPr>
+              <a:t>• Observe 4–5 times/day, esp. early morning &amp; late evening</a:t>
+            </a:r>
+          </a:p>
+          <a:p>
+            <a:pPr>
+              <a:spcAft>
+                <a:spcPts val="400"/>
+              </a:spcAft>
+            </a:pPr>
+            <a:r>
+              <a:rPr sz="1200">
+                <a:solidFill>
+                  <a:srgbClr val="1F2533"/>
+                </a:solidFill>
+                <a:latin typeface="Calibri"/>
+              </a:rPr>
+              <a:t>• Use teaser bull / pedometer / activity meter</a:t>
+            </a:r>
+          </a:p>
+          <a:p>
+            <a:pPr>
+              <a:spcAft>
+                <a:spcPts val="400"/>
+              </a:spcAft>
+            </a:pPr>
+            <a:r>
+              <a:rPr sz="1200">
+                <a:solidFill>
+                  <a:srgbClr val="1F2533"/>
+                </a:solidFill>
+                <a:latin typeface="Calibri"/>
+              </a:rPr>
+              <a:t>• Watch for vulvar oedema, mucus, bellowing</a:t>
+            </a:r>
+          </a:p>
+        </p:txBody>
+      </p:sp>
+      <p:sp>
+        <p:nvSpPr>
+          <p:cNvPr id="14" name="Rectangle 13"/>
           <p:cNvSpPr/>
           <p:nvPr/>
         </p:nvSpPr>
         <p:spPr>
           <a:xfrm>
-            <a:off x="6400800" y="2286000"/>
-            <a:ext cx="5394960" cy="1691640"/>
-          </a:xfrm>
-          <a:prstGeom prst="rect">
-            <a:avLst/>
-          </a:prstGeom>
-          <a:solidFill>
-            <a:srgbClr val="FFFFFF"/>
-          </a:solidFill>
-          <a:ln w="9525">
-            <a:solidFill>
-              <a:srgbClr val="C9A227"/>
-            </a:solidFill>
+            <a:off x="4526280" y="4754880"/>
+            <a:ext cx="3611880" cy="502920"/>
+          </a:xfrm>
+          <a:prstGeom prst="rect">
+            <a:avLst/>
+          </a:prstGeom>
+          <a:solidFill>
+            <a:srgbClr val="E07A18"/>
+          </a:solidFill>
+          <a:ln>
+            <a:noFill/>
           </a:ln>
         </p:spPr>
         <p:style>
@@ -7391,93 +7968,43 @@
           </a:fontRef>
         </p:style>
         <p:txBody>
-          <a:bodyPr rtlCol="0" anchor="ctr" wrap="square" lIns="137160" rIns="137160" tIns="91440"/>
-          <a:lstStyle/>
-          <a:p>
-            <a:pPr algn="ctr">
-              <a:spcAft>
-                <a:spcPts val="400"/>
-              </a:spcAft>
-            </a:pPr>
-            <a:r>
-              <a:rPr sz="1200">
-                <a:solidFill>
-                  <a:srgbClr val="1F2A24"/>
-                </a:solidFill>
-                <a:latin typeface="Calibri"/>
-              </a:rPr>
-              <a:t>• Balanced ration with adequate energy, protein &amp; minerals</a:t>
-            </a:r>
-          </a:p>
-          <a:p>
-            <a:pPr>
-              <a:spcAft>
-                <a:spcPts val="400"/>
-              </a:spcAft>
-            </a:pPr>
-            <a:r>
-              <a:rPr sz="1200">
-                <a:solidFill>
-                  <a:srgbClr val="1F2A24"/>
-                </a:solidFill>
-                <a:latin typeface="Calibri"/>
-              </a:rPr>
-              <a:t>• Body condition scoring at dry-off, calving and AI</a:t>
-            </a:r>
-          </a:p>
-          <a:p>
-            <a:pPr>
-              <a:spcAft>
-                <a:spcPts val="400"/>
-              </a:spcAft>
-            </a:pPr>
-            <a:r>
-              <a:rPr sz="1200">
-                <a:solidFill>
-                  <a:srgbClr val="1F2A24"/>
-                </a:solidFill>
-                <a:latin typeface="Calibri"/>
-              </a:rPr>
-              <a:t>• Heat detection 3× daily / use of pedometers / activity collars</a:t>
-            </a:r>
-          </a:p>
-          <a:p>
-            <a:pPr>
-              <a:spcAft>
-                <a:spcPts val="400"/>
-              </a:spcAft>
-            </a:pPr>
-            <a:r>
-              <a:rPr sz="1200">
-                <a:solidFill>
-                  <a:srgbClr val="1F2A24"/>
-                </a:solidFill>
-                <a:latin typeface="Calibri"/>
-              </a:rPr>
-              <a:t>• AI by trained technicians using fertile, properly thawed semen</a:t>
-            </a:r>
-          </a:p>
-        </p:txBody>
-      </p:sp>
-      <p:sp>
-        <p:nvSpPr>
-          <p:cNvPr id="11" name="Rectangle 10"/>
+          <a:bodyPr rtlCol="0" anchor="ctr" lIns="137160"/>
+          <a:lstStyle/>
+          <a:p>
+            <a:pPr algn="l"/>
+            <a:r>
+              <a:rPr sz="1500" b="1">
+                <a:solidFill>
+                  <a:srgbClr val="FFFFFF"/>
+                </a:solidFill>
+                <a:latin typeface="Calibri"/>
+              </a:rPr>
+              <a:t>Hormonal / Synchrony</a:t>
+            </a:r>
+          </a:p>
+        </p:txBody>
+      </p:sp>
+      <p:sp>
+        <p:nvSpPr>
+          <p:cNvPr id="15" name="Rectangle 14"/>
           <p:cNvSpPr/>
           <p:nvPr/>
         </p:nvSpPr>
         <p:spPr>
           <a:xfrm>
-            <a:off x="777240" y="4114800"/>
-            <a:ext cx="5394960" cy="502920"/>
-          </a:xfrm>
-          <a:prstGeom prst="rect">
-            <a:avLst/>
-          </a:prstGeom>
-          <a:solidFill>
-            <a:srgbClr val="0B3D2E"/>
-          </a:solidFill>
-          <a:ln>
-            <a:noFill/>
+            <a:off x="4526280" y="5257800"/>
+            <a:ext cx="3611880" cy="1188720"/>
+          </a:xfrm>
+          <a:prstGeom prst="rect">
+            <a:avLst/>
+          </a:prstGeom>
+          <a:solidFill>
+            <a:srgbClr val="FFFFFF"/>
+          </a:solidFill>
+          <a:ln w="9525">
+            <a:solidFill>
+              <a:srgbClr val="E07A18"/>
+            </a:solidFill>
           </a:ln>
         </p:spPr>
         <p:style>
@@ -7495,43 +8022,77 @@
           </a:fontRef>
         </p:style>
         <p:txBody>
-          <a:bodyPr rtlCol="0" anchor="ctr" lIns="137160"/>
-          <a:lstStyle/>
-          <a:p>
-            <a:pPr algn="l"/>
-            <a:r>
-              <a:rPr sz="1500" b="1">
-                <a:solidFill>
-                  <a:srgbClr val="FFFFFF"/>
-                </a:solidFill>
-                <a:latin typeface="Calibri"/>
-              </a:rPr>
-              <a:t>Environment</a:t>
-            </a:r>
-          </a:p>
-        </p:txBody>
-      </p:sp>
-      <p:sp>
-        <p:nvSpPr>
-          <p:cNvPr id="12" name="Rectangle 11"/>
+          <a:bodyPr rtlCol="0" anchor="ctr" wrap="square" lIns="137160" rIns="137160" tIns="91440"/>
+          <a:lstStyle/>
+          <a:p>
+            <a:pPr algn="ctr">
+              <a:spcAft>
+                <a:spcPts val="400"/>
+              </a:spcAft>
+            </a:pPr>
+            <a:r>
+              <a:rPr sz="1200">
+                <a:solidFill>
+                  <a:srgbClr val="1F2533"/>
+                </a:solidFill>
+                <a:latin typeface="Calibri"/>
+              </a:rPr>
+              <a:t>• Ovsynch / Heatsynch / CIDR-based protocols work well</a:t>
+            </a:r>
+          </a:p>
+          <a:p>
+            <a:pPr>
+              <a:spcAft>
+                <a:spcPts val="400"/>
+              </a:spcAft>
+            </a:pPr>
+            <a:r>
+              <a:rPr sz="1200">
+                <a:solidFill>
+                  <a:srgbClr val="1F2533"/>
+                </a:solidFill>
+                <a:latin typeface="Calibri"/>
+              </a:rPr>
+              <a:t>• Double-Ovsynch &amp; Pre-synch improve summer conception</a:t>
+            </a:r>
+          </a:p>
+          <a:p>
+            <a:pPr>
+              <a:spcAft>
+                <a:spcPts val="400"/>
+              </a:spcAft>
+            </a:pPr>
+            <a:r>
+              <a:rPr sz="1200">
+                <a:solidFill>
+                  <a:srgbClr val="1F2533"/>
+                </a:solidFill>
+                <a:latin typeface="Calibri"/>
+              </a:rPr>
+              <a:t>• GnRH at AI improves ovulation in late-cycling buffaloes</a:t>
+            </a:r>
+          </a:p>
+        </p:txBody>
+      </p:sp>
+      <p:sp>
+        <p:nvSpPr>
+          <p:cNvPr id="16" name="Rectangle 15"/>
           <p:cNvSpPr/>
           <p:nvPr/>
         </p:nvSpPr>
         <p:spPr>
           <a:xfrm>
-            <a:off x="777240" y="4617720"/>
-            <a:ext cx="5394960" cy="1691640"/>
-          </a:xfrm>
-          <a:prstGeom prst="rect">
-            <a:avLst/>
-          </a:prstGeom>
-          <a:solidFill>
-            <a:srgbClr val="FFFFFF"/>
-          </a:solidFill>
-          <a:ln w="9525">
-            <a:solidFill>
-              <a:srgbClr val="0B3D2E"/>
-            </a:solidFill>
+            <a:off x="8275320" y="4754880"/>
+            <a:ext cx="3520440" cy="502920"/>
+          </a:xfrm>
+          <a:prstGeom prst="rect">
+            <a:avLst/>
+          </a:prstGeom>
+          <a:solidFill>
+            <a:srgbClr val="2E86AB"/>
+          </a:solidFill>
+          <a:ln>
+            <a:noFill/>
           </a:ln>
         </p:spPr>
         <p:style>
@@ -7549,93 +8110,43 @@
           </a:fontRef>
         </p:style>
         <p:txBody>
-          <a:bodyPr rtlCol="0" anchor="ctr" wrap="square" lIns="137160" rIns="137160" tIns="91440"/>
-          <a:lstStyle/>
-          <a:p>
-            <a:pPr algn="ctr">
-              <a:spcAft>
-                <a:spcPts val="400"/>
-              </a:spcAft>
-            </a:pPr>
-            <a:r>
-              <a:rPr sz="1200">
-                <a:solidFill>
-                  <a:srgbClr val="1F2A24"/>
-                </a:solidFill>
-                <a:latin typeface="Calibri"/>
-              </a:rPr>
-              <a:t>• Provide shade, fans, sprinklers in summer</a:t>
-            </a:r>
-          </a:p>
-          <a:p>
-            <a:pPr>
-              <a:spcAft>
-                <a:spcPts val="400"/>
-              </a:spcAft>
-            </a:pPr>
-            <a:r>
-              <a:rPr sz="1200">
-                <a:solidFill>
-                  <a:srgbClr val="1F2A24"/>
-                </a:solidFill>
-                <a:latin typeface="Calibri"/>
-              </a:rPr>
-              <a:t>• Comfortable, non-slippery flooring</a:t>
-            </a:r>
-          </a:p>
-          <a:p>
-            <a:pPr>
-              <a:spcAft>
-                <a:spcPts val="400"/>
-              </a:spcAft>
-            </a:pPr>
-            <a:r>
-              <a:rPr sz="1200">
-                <a:solidFill>
-                  <a:srgbClr val="1F2A24"/>
-                </a:solidFill>
-                <a:latin typeface="Calibri"/>
-              </a:rPr>
-              <a:t>• Adequate water and clean housing</a:t>
-            </a:r>
-          </a:p>
-          <a:p>
-            <a:pPr>
-              <a:spcAft>
-                <a:spcPts val="400"/>
-              </a:spcAft>
-            </a:pPr>
-            <a:r>
-              <a:rPr sz="1200">
-                <a:solidFill>
-                  <a:srgbClr val="1F2A24"/>
-                </a:solidFill>
-                <a:latin typeface="Calibri"/>
-              </a:rPr>
-              <a:t>• Reduce overcrowding &amp; social stress</a:t>
-            </a:r>
-          </a:p>
-        </p:txBody>
-      </p:sp>
-      <p:sp>
-        <p:nvSpPr>
-          <p:cNvPr id="13" name="Rectangle 12"/>
+          <a:bodyPr rtlCol="0" anchor="ctr" lIns="137160"/>
+          <a:lstStyle/>
+          <a:p>
+            <a:pPr algn="l"/>
+            <a:r>
+              <a:rPr sz="1500" b="1">
+                <a:solidFill>
+                  <a:srgbClr val="FFFFFF"/>
+                </a:solidFill>
+                <a:latin typeface="Calibri"/>
+              </a:rPr>
+              <a:t>Environment &amp; Nutrition</a:t>
+            </a:r>
+          </a:p>
+        </p:txBody>
+      </p:sp>
+      <p:sp>
+        <p:nvSpPr>
+          <p:cNvPr id="17" name="Rectangle 16"/>
           <p:cNvSpPr/>
           <p:nvPr/>
         </p:nvSpPr>
         <p:spPr>
           <a:xfrm>
-            <a:off x="6400800" y="4114800"/>
-            <a:ext cx="5394960" cy="502920"/>
-          </a:xfrm>
-          <a:prstGeom prst="rect">
-            <a:avLst/>
-          </a:prstGeom>
-          <a:solidFill>
-            <a:srgbClr val="C9A227"/>
-          </a:solidFill>
-          <a:ln>
-            <a:noFill/>
+            <a:off x="8275320" y="5257800"/>
+            <a:ext cx="3520440" cy="1188720"/>
+          </a:xfrm>
+          <a:prstGeom prst="rect">
+            <a:avLst/>
+          </a:prstGeom>
+          <a:solidFill>
+            <a:srgbClr val="FFFFFF"/>
+          </a:solidFill>
+          <a:ln w="9525">
+            <a:solidFill>
+              <a:srgbClr val="2E86AB"/>
+            </a:solidFill>
           </a:ln>
         </p:spPr>
         <p:style>
@@ -7653,60 +8164,6 @@
           </a:fontRef>
         </p:style>
         <p:txBody>
-          <a:bodyPr rtlCol="0" anchor="ctr" lIns="137160"/>
-          <a:lstStyle/>
-          <a:p>
-            <a:pPr algn="l"/>
-            <a:r>
-              <a:rPr sz="1500" b="1">
-                <a:solidFill>
-                  <a:srgbClr val="FFFFFF"/>
-                </a:solidFill>
-                <a:latin typeface="Calibri"/>
-              </a:rPr>
-              <a:t>Records &amp; Decisions</a:t>
-            </a:r>
-          </a:p>
-        </p:txBody>
-      </p:sp>
-      <p:sp>
-        <p:nvSpPr>
-          <p:cNvPr id="14" name="Rectangle 13"/>
-          <p:cNvSpPr/>
-          <p:nvPr/>
-        </p:nvSpPr>
-        <p:spPr>
-          <a:xfrm>
-            <a:off x="6400800" y="4617720"/>
-            <a:ext cx="5394960" cy="1691640"/>
-          </a:xfrm>
-          <a:prstGeom prst="rect">
-            <a:avLst/>
-          </a:prstGeom>
-          <a:solidFill>
-            <a:srgbClr val="FFFFFF"/>
-          </a:solidFill>
-          <a:ln w="9525">
-            <a:solidFill>
-              <a:srgbClr val="C9A227"/>
-            </a:solidFill>
-          </a:ln>
-        </p:spPr>
-        <p:style>
-          <a:lnRef idx="1">
-            <a:schemeClr val="accent1"/>
-          </a:lnRef>
-          <a:fillRef idx="3">
-            <a:schemeClr val="accent1"/>
-          </a:fillRef>
-          <a:effectRef idx="2">
-            <a:schemeClr val="accent1"/>
-          </a:effectRef>
-          <a:fontRef idx="minor">
-            <a:schemeClr val="lt1"/>
-          </a:fontRef>
-        </p:style>
-        <p:txBody>
           <a:bodyPr rtlCol="0" anchor="ctr" wrap="square" lIns="137160" rIns="137160" tIns="91440"/>
           <a:lstStyle/>
           <a:p>
@@ -7718,11 +8175,11 @@
             <a:r>
               <a:rPr sz="1200">
                 <a:solidFill>
-                  <a:srgbClr val="1F2A24"/>
-                </a:solidFill>
-                <a:latin typeface="Calibri"/>
-              </a:rPr>
-              <a:t>• Maintain individual breeding records / software</a:t>
+                  <a:srgbClr val="1F2533"/>
+                </a:solidFill>
+                <a:latin typeface="Calibri"/>
+              </a:rPr>
+              <a:t>• Wallowing tank / showers in summer (&gt;32 °C)</a:t>
             </a:r>
           </a:p>
           <a:p>
@@ -7734,11 +8191,11 @@
             <a:r>
               <a:rPr sz="1200">
                 <a:solidFill>
-                  <a:srgbClr val="1F2A24"/>
-                </a:solidFill>
-                <a:latin typeface="Calibri"/>
-              </a:rPr>
-              <a:t>• Identify chronic repeaters early</a:t>
+                  <a:srgbClr val="1F2533"/>
+                </a:solidFill>
+                <a:latin typeface="Calibri"/>
+              </a:rPr>
+              <a:t>• Shade, fans, fly control</a:t>
             </a:r>
           </a:p>
           <a:p>
@@ -7750,34 +8207,18 @@
             <a:r>
               <a:rPr sz="1200">
                 <a:solidFill>
-                  <a:srgbClr val="1F2A24"/>
-                </a:solidFill>
-                <a:latin typeface="Calibri"/>
-              </a:rPr>
-              <a:t>• Selective culling of non-responders after 5–6 services</a:t>
-            </a:r>
-          </a:p>
-          <a:p>
-            <a:pPr>
-              <a:spcAft>
-                <a:spcPts val="400"/>
-              </a:spcAft>
-            </a:pPr>
-            <a:r>
-              <a:rPr sz="1200">
-                <a:solidFill>
-                  <a:srgbClr val="1F2A24"/>
-                </a:solidFill>
-                <a:latin typeface="Calibri"/>
-              </a:rPr>
-              <a:t>• Periodic herd fertility audit</a:t>
-            </a:r>
-          </a:p>
-        </p:txBody>
-      </p:sp>
-      <p:sp>
-        <p:nvSpPr>
-          <p:cNvPr id="15" name="TextBox 14"/>
+                  <a:srgbClr val="1F2533"/>
+                </a:solidFill>
+                <a:latin typeface="Calibri"/>
+              </a:rPr>
+              <a:t>• Bypass fat &amp; mineral supplementation</a:t>
+            </a:r>
+          </a:p>
+        </p:txBody>
+      </p:sp>
+      <p:sp>
+        <p:nvSpPr>
+          <p:cNvPr id="18" name="TextBox 17"/>
           <p:cNvSpPr txBox="1"/>
           <p:nvPr/>
         </p:nvSpPr>
@@ -7801,7 +8242,7 @@
             <a:r>
               <a:rPr sz="1000">
                 <a:solidFill>
-                  <a:srgbClr val="555555"/>
+                  <a:srgbClr val="555C66"/>
                 </a:solidFill>
                 <a:latin typeface="Calibri"/>
               </a:rPr>
@@ -7812,7 +8253,7 @@
       </p:sp>
       <p:sp>
         <p:nvSpPr>
-          <p:cNvPr id="16" name="TextBox 15"/>
+          <p:cNvPr id="19" name="TextBox 18"/>
           <p:cNvSpPr txBox="1"/>
           <p:nvPr/>
         </p:nvSpPr>
@@ -7836,11 +8277,11 @@
             <a:r>
               <a:rPr sz="1000">
                 <a:solidFill>
-                  <a:srgbClr val="555555"/>
-                </a:solidFill>
-                <a:latin typeface="Calibri"/>
-              </a:rPr>
-              <a:t>16 / 18</a:t>
+                  <a:srgbClr val="555C66"/>
+                </a:solidFill>
+                <a:latin typeface="Calibri"/>
+              </a:rPr>
+              <a:t>16 / 19</a:t>
             </a:r>
           </a:p>
         </p:txBody>
@@ -7878,7 +8319,7 @@
             <a:avLst/>
           </a:prstGeom>
           <a:solidFill>
-            <a:srgbClr val="F5F1E8"/>
+            <a:srgbClr val="F7F3EB"/>
           </a:solidFill>
           <a:ln>
             <a:noFill/>
@@ -7915,13 +8356,13 @@
         <p:spPr>
           <a:xfrm>
             <a:off x="0" y="0"/>
-            <a:ext cx="320040" cy="6858000"/>
-          </a:xfrm>
-          <a:prstGeom prst="rect">
-            <a:avLst/>
-          </a:prstGeom>
-          <a:solidFill>
-            <a:srgbClr val="0B3D2E"/>
+            <a:ext cx="292608" cy="6858000"/>
+          </a:xfrm>
+          <a:prstGeom prst="rect">
+            <a:avLst/>
+          </a:prstGeom>
+          <a:solidFill>
+            <a:srgbClr val="1B3A57"/>
           </a:solidFill>
           <a:ln>
             <a:noFill/>
@@ -7957,14 +8398,14 @@
         </p:nvSpPr>
         <p:spPr>
           <a:xfrm>
-            <a:off x="320040" y="0"/>
-            <a:ext cx="73152" cy="6858000"/>
-          </a:xfrm>
-          <a:prstGeom prst="rect">
-            <a:avLst/>
-          </a:prstGeom>
-          <a:solidFill>
-            <a:srgbClr val="C9A227"/>
+            <a:off x="292608" y="0"/>
+            <a:ext cx="64008" cy="6858000"/>
+          </a:xfrm>
+          <a:prstGeom prst="rect">
+            <a:avLst/>
+          </a:prstGeom>
+          <a:solidFill>
+            <a:srgbClr val="E07A18"/>
           </a:solidFill>
           <a:ln>
             <a:noFill/>
@@ -8000,7 +8441,7 @@
         </p:nvSpPr>
         <p:spPr>
           <a:xfrm>
-            <a:off x="640080" y="320040"/>
+            <a:off x="594360" y="292608"/>
             <a:ext cx="11155680" cy="822960"/>
           </a:xfrm>
           <a:prstGeom prst="rect">
@@ -8017,11 +8458,11 @@
             <a:r>
               <a:rPr sz="3400" b="1">
                 <a:solidFill>
-                  <a:srgbClr val="0B3D2E"/>
-                </a:solidFill>
-                <a:latin typeface="Calibri"/>
-              </a:rPr>
-              <a:t>Recent Advances</a:t>
+                  <a:srgbClr val="1B3A57"/>
+                </a:solidFill>
+                <a:latin typeface="Calibri"/>
+              </a:rPr>
+              <a:t>Prevention — Better Than Cure</a:t>
             </a:r>
           </a:p>
         </p:txBody>
@@ -8034,14 +8475,14 @@
         </p:nvSpPr>
         <p:spPr>
           <a:xfrm>
-            <a:off x="640080" y="1078992"/>
-            <a:ext cx="1097280" cy="64008"/>
-          </a:xfrm>
-          <a:prstGeom prst="rect">
-            <a:avLst/>
-          </a:prstGeom>
-          <a:solidFill>
-            <a:srgbClr val="C9A227"/>
+            <a:off x="594360" y="1078992"/>
+            <a:ext cx="1280160" cy="64008"/>
+          </a:xfrm>
+          <a:prstGeom prst="rect">
+            <a:avLst/>
+          </a:prstGeom>
+          <a:solidFill>
+            <a:srgbClr val="E07A18"/>
           </a:solidFill>
           <a:ln>
             <a:noFill/>
@@ -8071,158 +8512,639 @@
       </p:sp>
       <p:sp>
         <p:nvSpPr>
-          <p:cNvPr id="7" name="TextBox 6"/>
-          <p:cNvSpPr txBox="1"/>
-          <p:nvPr/>
-        </p:nvSpPr>
-        <p:spPr>
-          <a:xfrm>
-            <a:off x="777240" y="1645920"/>
-            <a:ext cx="10972800" cy="4572000"/>
-          </a:xfrm>
-          <a:prstGeom prst="rect">
-            <a:avLst/>
-          </a:prstGeom>
-          <a:noFill/>
-        </p:spPr>
-        <p:txBody>
-          <a:bodyPr wrap="square" lIns="0" rIns="0">
-            <a:spAutoFit/>
-          </a:bodyPr>
-          <a:lstStyle/>
+          <p:cNvPr id="7" name="Rectangle 6"/>
+          <p:cNvSpPr/>
+          <p:nvPr/>
+        </p:nvSpPr>
+        <p:spPr>
+          <a:xfrm>
+            <a:off x="777240" y="1783080"/>
+            <a:ext cx="5394960" cy="502920"/>
+          </a:xfrm>
+          <a:prstGeom prst="rect">
+            <a:avLst/>
+          </a:prstGeom>
+          <a:solidFill>
+            <a:srgbClr val="1B3A57"/>
+          </a:solidFill>
+          <a:ln>
+            <a:noFill/>
+          </a:ln>
+        </p:spPr>
+        <p:style>
+          <a:lnRef idx="1">
+            <a:schemeClr val="accent1"/>
+          </a:lnRef>
+          <a:fillRef idx="3">
+            <a:schemeClr val="accent1"/>
+          </a:fillRef>
+          <a:effectRef idx="2">
+            <a:schemeClr val="accent1"/>
+          </a:effectRef>
+          <a:fontRef idx="minor">
+            <a:schemeClr val="lt1"/>
+          </a:fontRef>
+        </p:style>
+        <p:txBody>
+          <a:bodyPr rtlCol="0" anchor="ctr" lIns="137160"/>
+          <a:lstStyle/>
+          <a:p>
+            <a:pPr algn="l"/>
+            <a:r>
+              <a:rPr sz="1500" b="1">
+                <a:solidFill>
+                  <a:srgbClr val="FFFFFF"/>
+                </a:solidFill>
+                <a:latin typeface="Calibri"/>
+              </a:rPr>
+              <a:t>Herd-Level Practices</a:t>
+            </a:r>
+          </a:p>
+        </p:txBody>
+      </p:sp>
+      <p:sp>
+        <p:nvSpPr>
+          <p:cNvPr id="8" name="Rectangle 7"/>
+          <p:cNvSpPr/>
+          <p:nvPr/>
+        </p:nvSpPr>
+        <p:spPr>
+          <a:xfrm>
+            <a:off x="777240" y="2286000"/>
+            <a:ext cx="5394960" cy="1691640"/>
+          </a:xfrm>
+          <a:prstGeom prst="rect">
+            <a:avLst/>
+          </a:prstGeom>
+          <a:solidFill>
+            <a:srgbClr val="FFFFFF"/>
+          </a:solidFill>
+          <a:ln w="9525">
+            <a:solidFill>
+              <a:srgbClr val="1B3A57"/>
+            </a:solidFill>
+          </a:ln>
+        </p:spPr>
+        <p:style>
+          <a:lnRef idx="1">
+            <a:schemeClr val="accent1"/>
+          </a:lnRef>
+          <a:fillRef idx="3">
+            <a:schemeClr val="accent1"/>
+          </a:fillRef>
+          <a:effectRef idx="2">
+            <a:schemeClr val="accent1"/>
+          </a:effectRef>
+          <a:fontRef idx="minor">
+            <a:schemeClr val="lt1"/>
+          </a:fontRef>
+        </p:style>
+        <p:txBody>
+          <a:bodyPr rtlCol="0" anchor="ctr" wrap="square" lIns="137160" rIns="137160" tIns="91440"/>
+          <a:lstStyle/>
+          <a:p>
+            <a:pPr algn="ctr">
+              <a:spcAft>
+                <a:spcPts val="400"/>
+              </a:spcAft>
+            </a:pPr>
+            <a:r>
+              <a:rPr sz="1200">
+                <a:solidFill>
+                  <a:srgbClr val="1F2533"/>
+                </a:solidFill>
+                <a:latin typeface="Calibri"/>
+              </a:rPr>
+              <a:t>• Routine post-partum examination on Day 30–45</a:t>
+            </a:r>
+          </a:p>
           <a:p>
             <a:pPr>
               <a:spcAft>
-                <a:spcPts val="600"/>
-              </a:spcAft>
-            </a:pPr>
-            <a:r>
-              <a:rPr sz="1700" b="0">
-                <a:solidFill>
-                  <a:srgbClr val="1F2A24"/>
-                </a:solidFill>
-                <a:latin typeface="Calibri"/>
-              </a:rPr>
-              <a:t>•  Doppler ultrasonography of CL — early detection of luteal insufficiency.</a:t>
+                <a:spcPts val="400"/>
+              </a:spcAft>
+            </a:pPr>
+            <a:r>
+              <a:rPr sz="1200">
+                <a:solidFill>
+                  <a:srgbClr val="1F2533"/>
+                </a:solidFill>
+                <a:latin typeface="Calibri"/>
+              </a:rPr>
+              <a:t>• Maintain calving interval 12–13 months</a:t>
             </a:r>
           </a:p>
           <a:p>
             <a:pPr>
               <a:spcAft>
-                <a:spcPts val="600"/>
-              </a:spcAft>
-            </a:pPr>
-            <a:r>
-              <a:rPr sz="1700" b="0">
-                <a:solidFill>
-                  <a:srgbClr val="1F2A24"/>
-                </a:solidFill>
-                <a:latin typeface="Calibri"/>
-              </a:rPr>
-              <a:t>•  Embryo transfer (ET) in chronic repeat breeders bypasses fertilization and early embryo problems.</a:t>
+                <a:spcPts val="400"/>
+              </a:spcAft>
+            </a:pPr>
+            <a:r>
+              <a:rPr sz="1200">
+                <a:solidFill>
+                  <a:srgbClr val="1F2533"/>
+                </a:solidFill>
+                <a:latin typeface="Calibri"/>
+              </a:rPr>
+              <a:t>• Vaccinate against Brucella, IBR, BVD, Leptospira</a:t>
             </a:r>
           </a:p>
           <a:p>
             <a:pPr>
               <a:spcAft>
-                <a:spcPts val="600"/>
-              </a:spcAft>
-            </a:pPr>
-            <a:r>
-              <a:rPr sz="1700" b="0">
-                <a:solidFill>
-                  <a:srgbClr val="1F2A24"/>
-                </a:solidFill>
-                <a:latin typeface="Calibri"/>
-              </a:rPr>
-              <a:t>•  In-vitro fertilization (IVF / OPU-IVP) for valuable but persistent repeaters.</a:t>
+                <a:spcPts val="400"/>
+              </a:spcAft>
+            </a:pPr>
+            <a:r>
+              <a:rPr sz="1200">
+                <a:solidFill>
+                  <a:srgbClr val="1F2533"/>
+                </a:solidFill>
+                <a:latin typeface="Calibri"/>
+              </a:rPr>
+              <a:t>• Bio-security; quarantine new animals</a:t>
+            </a:r>
+          </a:p>
+        </p:txBody>
+      </p:sp>
+      <p:sp>
+        <p:nvSpPr>
+          <p:cNvPr id="9" name="Rectangle 8"/>
+          <p:cNvSpPr/>
+          <p:nvPr/>
+        </p:nvSpPr>
+        <p:spPr>
+          <a:xfrm>
+            <a:off x="6400800" y="1783080"/>
+            <a:ext cx="5394960" cy="502920"/>
+          </a:xfrm>
+          <a:prstGeom prst="rect">
+            <a:avLst/>
+          </a:prstGeom>
+          <a:solidFill>
+            <a:srgbClr val="E07A18"/>
+          </a:solidFill>
+          <a:ln>
+            <a:noFill/>
+          </a:ln>
+        </p:spPr>
+        <p:style>
+          <a:lnRef idx="1">
+            <a:schemeClr val="accent1"/>
+          </a:lnRef>
+          <a:fillRef idx="3">
+            <a:schemeClr val="accent1"/>
+          </a:fillRef>
+          <a:effectRef idx="2">
+            <a:schemeClr val="accent1"/>
+          </a:effectRef>
+          <a:fontRef idx="minor">
+            <a:schemeClr val="lt1"/>
+          </a:fontRef>
+        </p:style>
+        <p:txBody>
+          <a:bodyPr rtlCol="0" anchor="ctr" lIns="137160"/>
+          <a:lstStyle/>
+          <a:p>
+            <a:pPr algn="l"/>
+            <a:r>
+              <a:rPr sz="1500" b="1">
+                <a:solidFill>
+                  <a:srgbClr val="FFFFFF"/>
+                </a:solidFill>
+                <a:latin typeface="Calibri"/>
+              </a:rPr>
+              <a:t>Cow-Level Practices</a:t>
+            </a:r>
+          </a:p>
+        </p:txBody>
+      </p:sp>
+      <p:sp>
+        <p:nvSpPr>
+          <p:cNvPr id="10" name="Rectangle 9"/>
+          <p:cNvSpPr/>
+          <p:nvPr/>
+        </p:nvSpPr>
+        <p:spPr>
+          <a:xfrm>
+            <a:off x="6400800" y="2286000"/>
+            <a:ext cx="5394960" cy="1691640"/>
+          </a:xfrm>
+          <a:prstGeom prst="rect">
+            <a:avLst/>
+          </a:prstGeom>
+          <a:solidFill>
+            <a:srgbClr val="FFFFFF"/>
+          </a:solidFill>
+          <a:ln w="9525">
+            <a:solidFill>
+              <a:srgbClr val="E07A18"/>
+            </a:solidFill>
+          </a:ln>
+        </p:spPr>
+        <p:style>
+          <a:lnRef idx="1">
+            <a:schemeClr val="accent1"/>
+          </a:lnRef>
+          <a:fillRef idx="3">
+            <a:schemeClr val="accent1"/>
+          </a:fillRef>
+          <a:effectRef idx="2">
+            <a:schemeClr val="accent1"/>
+          </a:effectRef>
+          <a:fontRef idx="minor">
+            <a:schemeClr val="lt1"/>
+          </a:fontRef>
+        </p:style>
+        <p:txBody>
+          <a:bodyPr rtlCol="0" anchor="ctr" wrap="square" lIns="137160" rIns="137160" tIns="91440"/>
+          <a:lstStyle/>
+          <a:p>
+            <a:pPr algn="ctr">
+              <a:spcAft>
+                <a:spcPts val="400"/>
+              </a:spcAft>
+            </a:pPr>
+            <a:r>
+              <a:rPr sz="1200">
+                <a:solidFill>
+                  <a:srgbClr val="1F2533"/>
+                </a:solidFill>
+                <a:latin typeface="Calibri"/>
+              </a:rPr>
+              <a:t>• Balanced ration with adequate energy, protein &amp; minerals</a:t>
             </a:r>
           </a:p>
           <a:p>
             <a:pPr>
               <a:spcAft>
-                <a:spcPts val="600"/>
-              </a:spcAft>
-            </a:pPr>
-            <a:r>
-              <a:rPr sz="1700" b="0">
-                <a:solidFill>
-                  <a:srgbClr val="1F2A24"/>
-                </a:solidFill>
-                <a:latin typeface="Calibri"/>
-              </a:rPr>
-              <a:t>•  Sexed semen with optimised AI timing for high-genetic-merit cows.</a:t>
+                <a:spcPts val="400"/>
+              </a:spcAft>
+            </a:pPr>
+            <a:r>
+              <a:rPr sz="1200">
+                <a:solidFill>
+                  <a:srgbClr val="1F2533"/>
+                </a:solidFill>
+                <a:latin typeface="Calibri"/>
+              </a:rPr>
+              <a:t>• Body condition scoring at dry-off, calving and AI</a:t>
             </a:r>
           </a:p>
           <a:p>
             <a:pPr>
               <a:spcAft>
-                <a:spcPts val="600"/>
-              </a:spcAft>
-            </a:pPr>
-            <a:r>
-              <a:rPr sz="1700" b="0">
-                <a:solidFill>
-                  <a:srgbClr val="1F2A24"/>
-                </a:solidFill>
-                <a:latin typeface="Calibri"/>
-              </a:rPr>
-              <a:t>•  Genomic selection — identifying cows with genetic predisposition to early embryonic death.</a:t>
+                <a:spcPts val="400"/>
+              </a:spcAft>
+            </a:pPr>
+            <a:r>
+              <a:rPr sz="1200">
+                <a:solidFill>
+                  <a:srgbClr val="1F2533"/>
+                </a:solidFill>
+                <a:latin typeface="Calibri"/>
+              </a:rPr>
+              <a:t>• Heat detection 3× daily / use of pedometers / activity collars</a:t>
             </a:r>
           </a:p>
           <a:p>
             <a:pPr>
               <a:spcAft>
-                <a:spcPts val="600"/>
-              </a:spcAft>
-            </a:pPr>
-            <a:r>
-              <a:rPr sz="1700" b="0">
-                <a:solidFill>
-                  <a:srgbClr val="1F2A24"/>
-                </a:solidFill>
-                <a:latin typeface="Calibri"/>
-              </a:rPr>
-              <a:t>•  Use of activity-monitoring collars &amp; AI-based heat detection systems.</a:t>
+                <a:spcPts val="400"/>
+              </a:spcAft>
+            </a:pPr>
+            <a:r>
+              <a:rPr sz="1200">
+                <a:solidFill>
+                  <a:srgbClr val="1F2533"/>
+                </a:solidFill>
+                <a:latin typeface="Calibri"/>
+              </a:rPr>
+              <a:t>• AI by trained technicians using fertile, properly thawed semen</a:t>
+            </a:r>
+          </a:p>
+        </p:txBody>
+      </p:sp>
+      <p:sp>
+        <p:nvSpPr>
+          <p:cNvPr id="11" name="Rectangle 10"/>
+          <p:cNvSpPr/>
+          <p:nvPr/>
+        </p:nvSpPr>
+        <p:spPr>
+          <a:xfrm>
+            <a:off x="777240" y="4114800"/>
+            <a:ext cx="5394960" cy="502920"/>
+          </a:xfrm>
+          <a:prstGeom prst="rect">
+            <a:avLst/>
+          </a:prstGeom>
+          <a:solidFill>
+            <a:srgbClr val="2E86AB"/>
+          </a:solidFill>
+          <a:ln>
+            <a:noFill/>
+          </a:ln>
+        </p:spPr>
+        <p:style>
+          <a:lnRef idx="1">
+            <a:schemeClr val="accent1"/>
+          </a:lnRef>
+          <a:fillRef idx="3">
+            <a:schemeClr val="accent1"/>
+          </a:fillRef>
+          <a:effectRef idx="2">
+            <a:schemeClr val="accent1"/>
+          </a:effectRef>
+          <a:fontRef idx="minor">
+            <a:schemeClr val="lt1"/>
+          </a:fontRef>
+        </p:style>
+        <p:txBody>
+          <a:bodyPr rtlCol="0" anchor="ctr" lIns="137160"/>
+          <a:lstStyle/>
+          <a:p>
+            <a:pPr algn="l"/>
+            <a:r>
+              <a:rPr sz="1500" b="1">
+                <a:solidFill>
+                  <a:srgbClr val="FFFFFF"/>
+                </a:solidFill>
+                <a:latin typeface="Calibri"/>
+              </a:rPr>
+              <a:t>Environment</a:t>
+            </a:r>
+          </a:p>
+        </p:txBody>
+      </p:sp>
+      <p:sp>
+        <p:nvSpPr>
+          <p:cNvPr id="12" name="Rectangle 11"/>
+          <p:cNvSpPr/>
+          <p:nvPr/>
+        </p:nvSpPr>
+        <p:spPr>
+          <a:xfrm>
+            <a:off x="777240" y="4617720"/>
+            <a:ext cx="5394960" cy="1691640"/>
+          </a:xfrm>
+          <a:prstGeom prst="rect">
+            <a:avLst/>
+          </a:prstGeom>
+          <a:solidFill>
+            <a:srgbClr val="FFFFFF"/>
+          </a:solidFill>
+          <a:ln w="9525">
+            <a:solidFill>
+              <a:srgbClr val="2E86AB"/>
+            </a:solidFill>
+          </a:ln>
+        </p:spPr>
+        <p:style>
+          <a:lnRef idx="1">
+            <a:schemeClr val="accent1"/>
+          </a:lnRef>
+          <a:fillRef idx="3">
+            <a:schemeClr val="accent1"/>
+          </a:fillRef>
+          <a:effectRef idx="2">
+            <a:schemeClr val="accent1"/>
+          </a:effectRef>
+          <a:fontRef idx="minor">
+            <a:schemeClr val="lt1"/>
+          </a:fontRef>
+        </p:style>
+        <p:txBody>
+          <a:bodyPr rtlCol="0" anchor="ctr" wrap="square" lIns="137160" rIns="137160" tIns="91440"/>
+          <a:lstStyle/>
+          <a:p>
+            <a:pPr algn="ctr">
+              <a:spcAft>
+                <a:spcPts val="400"/>
+              </a:spcAft>
+            </a:pPr>
+            <a:r>
+              <a:rPr sz="1200">
+                <a:solidFill>
+                  <a:srgbClr val="1F2533"/>
+                </a:solidFill>
+                <a:latin typeface="Calibri"/>
+              </a:rPr>
+              <a:t>• Provide shade, fans, sprinklers in summer</a:t>
             </a:r>
           </a:p>
           <a:p>
             <a:pPr>
               <a:spcAft>
-                <a:spcPts val="600"/>
-              </a:spcAft>
-            </a:pPr>
-            <a:r>
-              <a:rPr sz="1700" b="0">
-                <a:solidFill>
-                  <a:srgbClr val="1F2A24"/>
-                </a:solidFill>
-                <a:latin typeface="Calibri"/>
-              </a:rPr>
-              <a:t>•  Anti-oxidant therapy (Vitamin E, Selenium, Astaxanthin) to improve oocyte and embryo quality.</a:t>
+                <a:spcPts val="400"/>
+              </a:spcAft>
+            </a:pPr>
+            <a:r>
+              <a:rPr sz="1200">
+                <a:solidFill>
+                  <a:srgbClr val="1F2533"/>
+                </a:solidFill>
+                <a:latin typeface="Calibri"/>
+              </a:rPr>
+              <a:t>• Comfortable, non-slippery flooring</a:t>
             </a:r>
           </a:p>
           <a:p>
             <a:pPr>
               <a:spcAft>
-                <a:spcPts val="600"/>
-              </a:spcAft>
-            </a:pPr>
-            <a:r>
-              <a:rPr sz="1700" b="0">
-                <a:solidFill>
-                  <a:srgbClr val="1F2A24"/>
-                </a:solidFill>
-                <a:latin typeface="Calibri"/>
-              </a:rPr>
-              <a:t>•  Targeted reproductive ultrasonography &amp; uterine biopsy for refractory cases.</a:t>
-            </a:r>
-          </a:p>
-        </p:txBody>
-      </p:sp>
-      <p:sp>
-        <p:nvSpPr>
-          <p:cNvPr id="8" name="TextBox 7"/>
+                <a:spcPts val="400"/>
+              </a:spcAft>
+            </a:pPr>
+            <a:r>
+              <a:rPr sz="1200">
+                <a:solidFill>
+                  <a:srgbClr val="1F2533"/>
+                </a:solidFill>
+                <a:latin typeface="Calibri"/>
+              </a:rPr>
+              <a:t>• Adequate water and clean housing</a:t>
+            </a:r>
+          </a:p>
+          <a:p>
+            <a:pPr>
+              <a:spcAft>
+                <a:spcPts val="400"/>
+              </a:spcAft>
+            </a:pPr>
+            <a:r>
+              <a:rPr sz="1200">
+                <a:solidFill>
+                  <a:srgbClr val="1F2533"/>
+                </a:solidFill>
+                <a:latin typeface="Calibri"/>
+              </a:rPr>
+              <a:t>• Reduce overcrowding &amp; social stress</a:t>
+            </a:r>
+          </a:p>
+        </p:txBody>
+      </p:sp>
+      <p:sp>
+        <p:nvSpPr>
+          <p:cNvPr id="13" name="Rectangle 12"/>
+          <p:cNvSpPr/>
+          <p:nvPr/>
+        </p:nvSpPr>
+        <p:spPr>
+          <a:xfrm>
+            <a:off x="6400800" y="4114800"/>
+            <a:ext cx="5394960" cy="502920"/>
+          </a:xfrm>
+          <a:prstGeom prst="rect">
+            <a:avLst/>
+          </a:prstGeom>
+          <a:solidFill>
+            <a:srgbClr val="1B3A57"/>
+          </a:solidFill>
+          <a:ln>
+            <a:noFill/>
+          </a:ln>
+        </p:spPr>
+        <p:style>
+          <a:lnRef idx="1">
+            <a:schemeClr val="accent1"/>
+          </a:lnRef>
+          <a:fillRef idx="3">
+            <a:schemeClr val="accent1"/>
+          </a:fillRef>
+          <a:effectRef idx="2">
+            <a:schemeClr val="accent1"/>
+          </a:effectRef>
+          <a:fontRef idx="minor">
+            <a:schemeClr val="lt1"/>
+          </a:fontRef>
+        </p:style>
+        <p:txBody>
+          <a:bodyPr rtlCol="0" anchor="ctr" lIns="137160"/>
+          <a:lstStyle/>
+          <a:p>
+            <a:pPr algn="l"/>
+            <a:r>
+              <a:rPr sz="1500" b="1">
+                <a:solidFill>
+                  <a:srgbClr val="FFFFFF"/>
+                </a:solidFill>
+                <a:latin typeface="Calibri"/>
+              </a:rPr>
+              <a:t>Records &amp; Decisions</a:t>
+            </a:r>
+          </a:p>
+        </p:txBody>
+      </p:sp>
+      <p:sp>
+        <p:nvSpPr>
+          <p:cNvPr id="14" name="Rectangle 13"/>
+          <p:cNvSpPr/>
+          <p:nvPr/>
+        </p:nvSpPr>
+        <p:spPr>
+          <a:xfrm>
+            <a:off x="6400800" y="4617720"/>
+            <a:ext cx="5394960" cy="1691640"/>
+          </a:xfrm>
+          <a:prstGeom prst="rect">
+            <a:avLst/>
+          </a:prstGeom>
+          <a:solidFill>
+            <a:srgbClr val="FFFFFF"/>
+          </a:solidFill>
+          <a:ln w="9525">
+            <a:solidFill>
+              <a:srgbClr val="1B3A57"/>
+            </a:solidFill>
+          </a:ln>
+        </p:spPr>
+        <p:style>
+          <a:lnRef idx="1">
+            <a:schemeClr val="accent1"/>
+          </a:lnRef>
+          <a:fillRef idx="3">
+            <a:schemeClr val="accent1"/>
+          </a:fillRef>
+          <a:effectRef idx="2">
+            <a:schemeClr val="accent1"/>
+          </a:effectRef>
+          <a:fontRef idx="minor">
+            <a:schemeClr val="lt1"/>
+          </a:fontRef>
+        </p:style>
+        <p:txBody>
+          <a:bodyPr rtlCol="0" anchor="ctr" wrap="square" lIns="137160" rIns="137160" tIns="91440"/>
+          <a:lstStyle/>
+          <a:p>
+            <a:pPr algn="ctr">
+              <a:spcAft>
+                <a:spcPts val="400"/>
+              </a:spcAft>
+            </a:pPr>
+            <a:r>
+              <a:rPr sz="1200">
+                <a:solidFill>
+                  <a:srgbClr val="1F2533"/>
+                </a:solidFill>
+                <a:latin typeface="Calibri"/>
+              </a:rPr>
+              <a:t>• Maintain individual breeding records / software</a:t>
+            </a:r>
+          </a:p>
+          <a:p>
+            <a:pPr>
+              <a:spcAft>
+                <a:spcPts val="400"/>
+              </a:spcAft>
+            </a:pPr>
+            <a:r>
+              <a:rPr sz="1200">
+                <a:solidFill>
+                  <a:srgbClr val="1F2533"/>
+                </a:solidFill>
+                <a:latin typeface="Calibri"/>
+              </a:rPr>
+              <a:t>• Identify chronic repeaters early</a:t>
+            </a:r>
+          </a:p>
+          <a:p>
+            <a:pPr>
+              <a:spcAft>
+                <a:spcPts val="400"/>
+              </a:spcAft>
+            </a:pPr>
+            <a:r>
+              <a:rPr sz="1200">
+                <a:solidFill>
+                  <a:srgbClr val="1F2533"/>
+                </a:solidFill>
+                <a:latin typeface="Calibri"/>
+              </a:rPr>
+              <a:t>• Selective culling of non-responders after 5–6 services</a:t>
+            </a:r>
+          </a:p>
+          <a:p>
+            <a:pPr>
+              <a:spcAft>
+                <a:spcPts val="400"/>
+              </a:spcAft>
+            </a:pPr>
+            <a:r>
+              <a:rPr sz="1200">
+                <a:solidFill>
+                  <a:srgbClr val="1F2533"/>
+                </a:solidFill>
+                <a:latin typeface="Calibri"/>
+              </a:rPr>
+              <a:t>• Periodic herd fertility audit</a:t>
+            </a:r>
+          </a:p>
+        </p:txBody>
+      </p:sp>
+      <p:sp>
+        <p:nvSpPr>
+          <p:cNvPr id="15" name="TextBox 14"/>
           <p:cNvSpPr txBox="1"/>
           <p:nvPr/>
         </p:nvSpPr>
@@ -8246,7 +9168,7 @@
             <a:r>
               <a:rPr sz="1000">
                 <a:solidFill>
-                  <a:srgbClr val="555555"/>
+                  <a:srgbClr val="555C66"/>
                 </a:solidFill>
                 <a:latin typeface="Calibri"/>
               </a:rPr>
@@ -8257,7 +9179,7 @@
       </p:sp>
       <p:sp>
         <p:nvSpPr>
-          <p:cNvPr id="9" name="TextBox 8"/>
+          <p:cNvPr id="16" name="TextBox 15"/>
           <p:cNvSpPr txBox="1"/>
           <p:nvPr/>
         </p:nvSpPr>
@@ -8281,11 +9203,11 @@
             <a:r>
               <a:rPr sz="1000">
                 <a:solidFill>
-                  <a:srgbClr val="555555"/>
-                </a:solidFill>
-                <a:latin typeface="Calibri"/>
-              </a:rPr>
-              <a:t>17 / 18</a:t>
+                  <a:srgbClr val="555C66"/>
+                </a:solidFill>
+                <a:latin typeface="Calibri"/>
+              </a:rPr>
+              <a:t>17 / 19</a:t>
             </a:r>
           </a:p>
         </p:txBody>
@@ -8323,7 +9245,7 @@
             <a:avLst/>
           </a:prstGeom>
           <a:solidFill>
-            <a:srgbClr val="F5F1E8"/>
+            <a:srgbClr val="F7F3EB"/>
           </a:solidFill>
           <a:ln>
             <a:noFill/>
@@ -8360,13 +9282,13 @@
         <p:spPr>
           <a:xfrm>
             <a:off x="0" y="0"/>
-            <a:ext cx="320040" cy="6858000"/>
-          </a:xfrm>
-          <a:prstGeom prst="rect">
-            <a:avLst/>
-          </a:prstGeom>
-          <a:solidFill>
-            <a:srgbClr val="0B3D2E"/>
+            <a:ext cx="292608" cy="6858000"/>
+          </a:xfrm>
+          <a:prstGeom prst="rect">
+            <a:avLst/>
+          </a:prstGeom>
+          <a:solidFill>
+            <a:srgbClr val="1B3A57"/>
           </a:solidFill>
           <a:ln>
             <a:noFill/>
@@ -8402,14 +9324,14 @@
         </p:nvSpPr>
         <p:spPr>
           <a:xfrm>
-            <a:off x="320040" y="0"/>
-            <a:ext cx="73152" cy="6858000"/>
-          </a:xfrm>
-          <a:prstGeom prst="rect">
-            <a:avLst/>
-          </a:prstGeom>
-          <a:solidFill>
-            <a:srgbClr val="C9A227"/>
+            <a:off x="292608" y="0"/>
+            <a:ext cx="64008" cy="6858000"/>
+          </a:xfrm>
+          <a:prstGeom prst="rect">
+            <a:avLst/>
+          </a:prstGeom>
+          <a:solidFill>
+            <a:srgbClr val="E07A18"/>
           </a:solidFill>
           <a:ln>
             <a:noFill/>
@@ -8445,7 +9367,7 @@
         </p:nvSpPr>
         <p:spPr>
           <a:xfrm>
-            <a:off x="640080" y="320040"/>
+            <a:off x="594360" y="292608"/>
             <a:ext cx="11155680" cy="822960"/>
           </a:xfrm>
           <a:prstGeom prst="rect">
@@ -8462,11 +9384,11 @@
             <a:r>
               <a:rPr sz="3400" b="1">
                 <a:solidFill>
-                  <a:srgbClr val="0B3D2E"/>
-                </a:solidFill>
-                <a:latin typeface="Calibri"/>
-              </a:rPr>
-              <a:t>Conclusion &amp; References</a:t>
+                  <a:srgbClr val="1B3A57"/>
+                </a:solidFill>
+                <a:latin typeface="Calibri"/>
+              </a:rPr>
+              <a:t>Recent Advances</a:t>
             </a:r>
           </a:p>
         </p:txBody>
@@ -8479,14 +9401,14 @@
         </p:nvSpPr>
         <p:spPr>
           <a:xfrm>
-            <a:off x="640080" y="1078992"/>
-            <a:ext cx="1097280" cy="64008"/>
-          </a:xfrm>
-          <a:prstGeom prst="rect">
-            <a:avLst/>
-          </a:prstGeom>
-          <a:solidFill>
-            <a:srgbClr val="C9A227"/>
+            <a:off x="594360" y="1078992"/>
+            <a:ext cx="1280160" cy="64008"/>
+          </a:xfrm>
+          <a:prstGeom prst="rect">
+            <a:avLst/>
+          </a:prstGeom>
+          <a:solidFill>
+            <a:srgbClr val="E07A18"/>
           </a:solidFill>
           <a:ln>
             <a:noFill/>
@@ -8516,25 +9438,262 @@
       </p:sp>
       <p:sp>
         <p:nvSpPr>
-          <p:cNvPr id="7" name="Rounded Rectangle 6"/>
+          <p:cNvPr id="7" name="TextBox 6"/>
+          <p:cNvSpPr txBox="1"/>
+          <p:nvPr/>
+        </p:nvSpPr>
+        <p:spPr>
+          <a:xfrm>
+            <a:off x="777240" y="1691640"/>
+            <a:ext cx="10972800" cy="4572000"/>
+          </a:xfrm>
+          <a:prstGeom prst="rect">
+            <a:avLst/>
+          </a:prstGeom>
+          <a:noFill/>
+        </p:spPr>
+        <p:txBody>
+          <a:bodyPr wrap="square" lIns="0" rIns="0">
+            <a:spAutoFit/>
+          </a:bodyPr>
+          <a:lstStyle/>
+          <a:p>
+            <a:pPr>
+              <a:spcAft>
+                <a:spcPts val="600"/>
+              </a:spcAft>
+            </a:pPr>
+            <a:r>
+              <a:rPr sz="1700">
+                <a:solidFill>
+                  <a:srgbClr val="1F2533"/>
+                </a:solidFill>
+                <a:latin typeface="Calibri"/>
+              </a:rPr>
+              <a:t>•  Doppler ultrasonography of CL — early detection of luteal insufficiency.</a:t>
+            </a:r>
+          </a:p>
+          <a:p>
+            <a:pPr>
+              <a:spcAft>
+                <a:spcPts val="600"/>
+              </a:spcAft>
+            </a:pPr>
+            <a:r>
+              <a:rPr sz="1700">
+                <a:solidFill>
+                  <a:srgbClr val="1F2533"/>
+                </a:solidFill>
+                <a:latin typeface="Calibri"/>
+              </a:rPr>
+              <a:t>•  Embryo transfer (ET) in chronic repeat breeders bypasses fertilization and early embryo problems.</a:t>
+            </a:r>
+          </a:p>
+          <a:p>
+            <a:pPr>
+              <a:spcAft>
+                <a:spcPts val="600"/>
+              </a:spcAft>
+            </a:pPr>
+            <a:r>
+              <a:rPr sz="1700">
+                <a:solidFill>
+                  <a:srgbClr val="1F2533"/>
+                </a:solidFill>
+                <a:latin typeface="Calibri"/>
+              </a:rPr>
+              <a:t>•  In-vitro fertilization (IVF / OPU-IVP) for valuable but persistent repeaters.</a:t>
+            </a:r>
+          </a:p>
+          <a:p>
+            <a:pPr>
+              <a:spcAft>
+                <a:spcPts val="600"/>
+              </a:spcAft>
+            </a:pPr>
+            <a:r>
+              <a:rPr sz="1700">
+                <a:solidFill>
+                  <a:srgbClr val="1F2533"/>
+                </a:solidFill>
+                <a:latin typeface="Calibri"/>
+              </a:rPr>
+              <a:t>•  Sexed semen with optimised AI timing for high-genetic-merit cows.</a:t>
+            </a:r>
+          </a:p>
+          <a:p>
+            <a:pPr>
+              <a:spcAft>
+                <a:spcPts val="600"/>
+              </a:spcAft>
+            </a:pPr>
+            <a:r>
+              <a:rPr sz="1700">
+                <a:solidFill>
+                  <a:srgbClr val="1F2533"/>
+                </a:solidFill>
+                <a:latin typeface="Calibri"/>
+              </a:rPr>
+              <a:t>•  Genomic selection — identifying cows with genetic predisposition to early embryonic death.</a:t>
+            </a:r>
+          </a:p>
+          <a:p>
+            <a:pPr>
+              <a:spcAft>
+                <a:spcPts val="600"/>
+              </a:spcAft>
+            </a:pPr>
+            <a:r>
+              <a:rPr sz="1700">
+                <a:solidFill>
+                  <a:srgbClr val="1F2533"/>
+                </a:solidFill>
+                <a:latin typeface="Calibri"/>
+              </a:rPr>
+              <a:t>•  Use of activity-monitoring collars &amp; AI-based heat detection systems.</a:t>
+            </a:r>
+          </a:p>
+          <a:p>
+            <a:pPr>
+              <a:spcAft>
+                <a:spcPts val="600"/>
+              </a:spcAft>
+            </a:pPr>
+            <a:r>
+              <a:rPr sz="1700">
+                <a:solidFill>
+                  <a:srgbClr val="1F2533"/>
+                </a:solidFill>
+                <a:latin typeface="Calibri"/>
+              </a:rPr>
+              <a:t>•  Anti-oxidant therapy (Vitamin E, Selenium, Astaxanthin) to improve oocyte and embryo quality.</a:t>
+            </a:r>
+          </a:p>
+          <a:p>
+            <a:pPr>
+              <a:spcAft>
+                <a:spcPts val="600"/>
+              </a:spcAft>
+            </a:pPr>
+            <a:r>
+              <a:rPr sz="1700">
+                <a:solidFill>
+                  <a:srgbClr val="1F2533"/>
+                </a:solidFill>
+                <a:latin typeface="Calibri"/>
+              </a:rPr>
+              <a:t>•  Targeted reproductive ultrasonography &amp; uterine biopsy for refractory cases.</a:t>
+            </a:r>
+          </a:p>
+        </p:txBody>
+      </p:sp>
+      <p:sp>
+        <p:nvSpPr>
+          <p:cNvPr id="8" name="TextBox 7"/>
+          <p:cNvSpPr txBox="1"/>
+          <p:nvPr/>
+        </p:nvSpPr>
+        <p:spPr>
+          <a:xfrm>
+            <a:off x="548640" y="6446520"/>
+            <a:ext cx="10972800" cy="274320"/>
+          </a:xfrm>
+          <a:prstGeom prst="rect">
+            <a:avLst/>
+          </a:prstGeom>
+          <a:noFill/>
+        </p:spPr>
+        <p:txBody>
+          <a:bodyPr wrap="none" lIns="0" rIns="0">
+            <a:spAutoFit/>
+          </a:bodyPr>
+          <a:lstStyle/>
+          <a:p>
+            <a:pPr algn="l"/>
+            <a:r>
+              <a:rPr sz="1000">
+                <a:solidFill>
+                  <a:srgbClr val="555C66"/>
+                </a:solidFill>
+                <a:latin typeface="Calibri"/>
+              </a:rPr>
+              <a:t>Repeat Breeding in Cattle</a:t>
+            </a:r>
+          </a:p>
+        </p:txBody>
+      </p:sp>
+      <p:sp>
+        <p:nvSpPr>
+          <p:cNvPr id="9" name="TextBox 8"/>
+          <p:cNvSpPr txBox="1"/>
+          <p:nvPr/>
+        </p:nvSpPr>
+        <p:spPr>
+          <a:xfrm>
+            <a:off x="10698480" y="6446520"/>
+            <a:ext cx="1188720" cy="274320"/>
+          </a:xfrm>
+          <a:prstGeom prst="rect">
+            <a:avLst/>
+          </a:prstGeom>
+          <a:noFill/>
+        </p:spPr>
+        <p:txBody>
+          <a:bodyPr wrap="none">
+            <a:spAutoFit/>
+          </a:bodyPr>
+          <a:lstStyle/>
+          <a:p>
+            <a:pPr algn="r"/>
+            <a:r>
+              <a:rPr sz="1000">
+                <a:solidFill>
+                  <a:srgbClr val="555C66"/>
+                </a:solidFill>
+                <a:latin typeface="Calibri"/>
+              </a:rPr>
+              <a:t>18 / 19</a:t>
+            </a:r>
+          </a:p>
+        </p:txBody>
+      </p:sp>
+    </p:spTree>
+  </p:cSld>
+  <p:clrMapOvr>
+    <a:masterClrMapping/>
+  </p:clrMapOvr>
+</p:sld>
+</file>
+
+<file path=ppt/slides/slide19.xml><?xml version="1.0" encoding="utf-8"?>
+<p:sld xmlns:a="http://schemas.openxmlformats.org/drawingml/2006/main" xmlns:p="http://schemas.openxmlformats.org/presentationml/2006/main" xmlns:r="http://schemas.openxmlformats.org/officeDocument/2006/relationships">
+  <p:cSld>
+    <p:spTree>
+      <p:nvGrpSpPr>
+        <p:cNvPr id="1" name=""/>
+        <p:cNvGrpSpPr/>
+        <p:nvPr/>
+      </p:nvGrpSpPr>
+      <p:grpSpPr/>
+      <p:sp>
+        <p:nvSpPr>
+          <p:cNvPr id="2" name="Rectangle 1"/>
           <p:cNvSpPr/>
           <p:nvPr/>
         </p:nvSpPr>
         <p:spPr>
           <a:xfrm>
-            <a:off x="777240" y="1691640"/>
-            <a:ext cx="10607040" cy="2011680"/>
-          </a:xfrm>
-          <a:prstGeom prst="roundRect">
-            <a:avLst/>
-          </a:prstGeom>
-          <a:solidFill>
-            <a:srgbClr val="FFFFFF"/>
-          </a:solidFill>
-          <a:ln w="25400">
-            <a:solidFill>
-              <a:srgbClr val="C9A227"/>
-            </a:solidFill>
+            <a:off x="0" y="0"/>
+            <a:ext cx="12191695" cy="6858000"/>
+          </a:xfrm>
+          <a:prstGeom prst="rect">
+            <a:avLst/>
+          </a:prstGeom>
+          <a:solidFill>
+            <a:srgbClr val="F7F3EB"/>
+          </a:solidFill>
+          <a:ln>
+            <a:noFill/>
           </a:ln>
         </p:spPr>
         <p:style>
@@ -8552,232 +9711,29 @@
           </a:fontRef>
         </p:style>
         <p:txBody>
-          <a:bodyPr rtlCol="0" anchor="ctr" wrap="square" lIns="228600" rIns="228600" tIns="137160"/>
+          <a:bodyPr rtlCol="0" anchor="ctr"/>
           <a:lstStyle/>
           <a:p>
             <a:pPr algn="ctr"/>
-            <a:r>
-              <a:rPr sz="1800" b="1">
-                <a:solidFill>
-                  <a:srgbClr val="0B3D2E"/>
-                </a:solidFill>
-                <a:latin typeface="Calibri"/>
-              </a:rPr>
-              <a:t>Conclusion</a:t>
-            </a:r>
-          </a:p>
-          <a:p>
-            <a:pPr>
-              <a:spcAft>
-                <a:spcPts val="200"/>
-              </a:spcAft>
-            </a:pPr>
-            <a:r>
-              <a:rPr sz="1300">
-                <a:solidFill>
-                  <a:srgbClr val="1F2A24"/>
-                </a:solidFill>
-                <a:latin typeface="Calibri"/>
-              </a:rPr>
-              <a:t>• Repeat breeding is a multifactorial syndrome — a symptom rather than a disease.</a:t>
-            </a:r>
-          </a:p>
-          <a:p>
-            <a:pPr>
-              <a:spcAft>
-                <a:spcPts val="200"/>
-              </a:spcAft>
-            </a:pPr>
-            <a:r>
-              <a:rPr sz="1300">
-                <a:solidFill>
-                  <a:srgbClr val="1F2A24"/>
-                </a:solidFill>
-                <a:latin typeface="Calibri"/>
-              </a:rPr>
-              <a:t>• Successful management requires accurate diagnosis, correction of nutrition, infection and hormonal imbalance, plus excellent AI practices.</a:t>
-            </a:r>
-          </a:p>
-          <a:p>
-            <a:pPr>
-              <a:spcAft>
-                <a:spcPts val="200"/>
-              </a:spcAft>
-            </a:pPr>
-            <a:r>
-              <a:rPr sz="1300">
-                <a:solidFill>
-                  <a:srgbClr val="1F2A24"/>
-                </a:solidFill>
-                <a:latin typeface="Calibri"/>
-              </a:rPr>
-              <a:t>• Prevention — through good husbandry, heat detection and herd health programs — is far more economical than treatment.</a:t>
-            </a:r>
-          </a:p>
-          <a:p>
-            <a:pPr>
-              <a:spcAft>
-                <a:spcPts val="200"/>
-              </a:spcAft>
-            </a:pPr>
-            <a:r>
-              <a:rPr sz="1300">
-                <a:solidFill>
-                  <a:srgbClr val="1F2A24"/>
-                </a:solidFill>
-                <a:latin typeface="Calibri"/>
-              </a:rPr>
-              <a:t>• Early identification and timely intervention can return most repeat breeders to productive reproduction.</a:t>
-            </a:r>
-          </a:p>
-        </p:txBody>
-      </p:sp>
-      <p:sp>
-        <p:nvSpPr>
-          <p:cNvPr id="8" name="TextBox 7"/>
-          <p:cNvSpPr txBox="1"/>
-          <p:nvPr/>
-        </p:nvSpPr>
-        <p:spPr>
-          <a:xfrm>
-            <a:off x="777240" y="3840480"/>
-            <a:ext cx="10607040" cy="2468880"/>
-          </a:xfrm>
-          <a:prstGeom prst="rect">
-            <a:avLst/>
-          </a:prstGeom>
-          <a:noFill/>
-        </p:spPr>
-        <p:txBody>
-          <a:bodyPr wrap="square">
-            <a:spAutoFit/>
-          </a:bodyPr>
-          <a:lstStyle/>
-          <a:p>
-            <a:r>
-              <a:rPr sz="1800" b="1">
-                <a:solidFill>
-                  <a:srgbClr val="0B3D2E"/>
-                </a:solidFill>
-                <a:latin typeface="Calibri"/>
-              </a:rPr>
-              <a:t>References (selected)</a:t>
-            </a:r>
-          </a:p>
-          <a:p>
-            <a:pPr>
-              <a:spcAft>
-                <a:spcPts val="200"/>
-              </a:spcAft>
-            </a:pPr>
-            <a:r>
-              <a:rPr sz="1200">
-                <a:solidFill>
-                  <a:srgbClr val="1F2A24"/>
-                </a:solidFill>
-                <a:latin typeface="Calibri"/>
-              </a:rPr>
-              <a:t>• Roberts, S.J. — Veterinary Obstetrics &amp; Genital Diseases (Theriogenology), 3rd Ed.</a:t>
-            </a:r>
-          </a:p>
-          <a:p>
-            <a:pPr>
-              <a:spcAft>
-                <a:spcPts val="200"/>
-              </a:spcAft>
-            </a:pPr>
-            <a:r>
-              <a:rPr sz="1200">
-                <a:solidFill>
-                  <a:srgbClr val="1F2A24"/>
-                </a:solidFill>
-                <a:latin typeface="Calibri"/>
-              </a:rPr>
-              <a:t>• Arthur, Noakes, Pearson &amp; Parkinson — Veterinary Reproduction &amp; Obstetrics, 11th Ed.</a:t>
-            </a:r>
-          </a:p>
-          <a:p>
-            <a:pPr>
-              <a:spcAft>
-                <a:spcPts val="200"/>
-              </a:spcAft>
-            </a:pPr>
-            <a:r>
-              <a:rPr sz="1200">
-                <a:solidFill>
-                  <a:srgbClr val="1F2A24"/>
-                </a:solidFill>
-                <a:latin typeface="Calibri"/>
-              </a:rPr>
-              <a:t>• Hafez E.S.E. &amp; Hafez B. — Reproduction in Farm Animals, 7th Ed.</a:t>
-            </a:r>
-          </a:p>
-          <a:p>
-            <a:pPr>
-              <a:spcAft>
-                <a:spcPts val="200"/>
-              </a:spcAft>
-            </a:pPr>
-            <a:r>
-              <a:rPr sz="1200">
-                <a:solidFill>
-                  <a:srgbClr val="1F2A24"/>
-                </a:solidFill>
-                <a:latin typeface="Calibri"/>
-              </a:rPr>
-              <a:t>• Peters A.R. &amp; Ball P.J.H. — Reproduction in Cattle, 3rd Ed.</a:t>
-            </a:r>
-          </a:p>
-          <a:p>
-            <a:pPr>
-              <a:spcAft>
-                <a:spcPts val="200"/>
-              </a:spcAft>
-            </a:pPr>
-            <a:r>
-              <a:rPr sz="1200">
-                <a:solidFill>
-                  <a:srgbClr val="1F2A24"/>
-                </a:solidFill>
-                <a:latin typeface="Calibri"/>
-              </a:rPr>
-              <a:t>• Bartlett P.C. et al. — Repeat breeder syndrome in dairy cattle, JDS.</a:t>
-            </a:r>
-          </a:p>
-          <a:p>
-            <a:pPr>
-              <a:spcAft>
-                <a:spcPts val="200"/>
-              </a:spcAft>
-            </a:pPr>
-            <a:r>
-              <a:rPr sz="1200">
-                <a:solidFill>
-                  <a:srgbClr val="1F2A24"/>
-                </a:solidFill>
-                <a:latin typeface="Calibri"/>
-              </a:rPr>
-              <a:t>• Gustafsson H. &amp; Emanuelson U. — Characterisation of the repeat breeding syndrome in Swedish dairy cattle, Acta Vet. Scand.</a:t>
-            </a:r>
-          </a:p>
-        </p:txBody>
-      </p:sp>
-      <p:sp>
-        <p:nvSpPr>
-          <p:cNvPr id="9" name="Rectangle 8"/>
+          </a:p>
+        </p:txBody>
+      </p:sp>
+      <p:sp>
+        <p:nvSpPr>
+          <p:cNvPr id="3" name="Rectangle 2"/>
           <p:cNvSpPr/>
           <p:nvPr/>
         </p:nvSpPr>
         <p:spPr>
           <a:xfrm>
-            <a:off x="4297680" y="6126480"/>
-            <a:ext cx="3657600" cy="457200"/>
-          </a:xfrm>
-          <a:prstGeom prst="rect">
-            <a:avLst/>
-          </a:prstGeom>
-          <a:solidFill>
-            <a:srgbClr val="C9A227"/>
+            <a:off x="0" y="0"/>
+            <a:ext cx="292608" cy="6858000"/>
+          </a:xfrm>
+          <a:prstGeom prst="rect">
+            <a:avLst/>
+          </a:prstGeom>
+          <a:solidFill>
+            <a:srgbClr val="1B3A57"/>
           </a:solidFill>
           <a:ln>
             <a:noFill/>
@@ -8802,10 +9758,471 @@
           <a:lstStyle/>
           <a:p>
             <a:pPr algn="ctr"/>
+          </a:p>
+        </p:txBody>
+      </p:sp>
+      <p:sp>
+        <p:nvSpPr>
+          <p:cNvPr id="4" name="Rectangle 3"/>
+          <p:cNvSpPr/>
+          <p:nvPr/>
+        </p:nvSpPr>
+        <p:spPr>
+          <a:xfrm>
+            <a:off x="292608" y="0"/>
+            <a:ext cx="64008" cy="6858000"/>
+          </a:xfrm>
+          <a:prstGeom prst="rect">
+            <a:avLst/>
+          </a:prstGeom>
+          <a:solidFill>
+            <a:srgbClr val="E07A18"/>
+          </a:solidFill>
+          <a:ln>
+            <a:noFill/>
+          </a:ln>
+        </p:spPr>
+        <p:style>
+          <a:lnRef idx="1">
+            <a:schemeClr val="accent1"/>
+          </a:lnRef>
+          <a:fillRef idx="3">
+            <a:schemeClr val="accent1"/>
+          </a:fillRef>
+          <a:effectRef idx="2">
+            <a:schemeClr val="accent1"/>
+          </a:effectRef>
+          <a:fontRef idx="minor">
+            <a:schemeClr val="lt1"/>
+          </a:fontRef>
+        </p:style>
+        <p:txBody>
+          <a:bodyPr rtlCol="0" anchor="ctr"/>
+          <a:lstStyle/>
+          <a:p>
+            <a:pPr algn="ctr"/>
+          </a:p>
+        </p:txBody>
+      </p:sp>
+      <p:sp>
+        <p:nvSpPr>
+          <p:cNvPr id="5" name="TextBox 4"/>
+          <p:cNvSpPr txBox="1"/>
+          <p:nvPr/>
+        </p:nvSpPr>
+        <p:spPr>
+          <a:xfrm>
+            <a:off x="594360" y="292608"/>
+            <a:ext cx="11155680" cy="822960"/>
+          </a:xfrm>
+          <a:prstGeom prst="rect">
+            <a:avLst/>
+          </a:prstGeom>
+          <a:noFill/>
+        </p:spPr>
+        <p:txBody>
+          <a:bodyPr wrap="none" lIns="0" rIns="0">
+            <a:spAutoFit/>
+          </a:bodyPr>
+          <a:lstStyle/>
+          <a:p>
+            <a:r>
+              <a:rPr sz="3400" b="1">
+                <a:solidFill>
+                  <a:srgbClr val="1B3A57"/>
+                </a:solidFill>
+                <a:latin typeface="Calibri"/>
+              </a:rPr>
+              <a:t>Conclusion &amp; References</a:t>
+            </a:r>
+          </a:p>
+        </p:txBody>
+      </p:sp>
+      <p:sp>
+        <p:nvSpPr>
+          <p:cNvPr id="6" name="Rectangle 5"/>
+          <p:cNvSpPr/>
+          <p:nvPr/>
+        </p:nvSpPr>
+        <p:spPr>
+          <a:xfrm>
+            <a:off x="594360" y="1078992"/>
+            <a:ext cx="1280160" cy="64008"/>
+          </a:xfrm>
+          <a:prstGeom prst="rect">
+            <a:avLst/>
+          </a:prstGeom>
+          <a:solidFill>
+            <a:srgbClr val="E07A18"/>
+          </a:solidFill>
+          <a:ln>
+            <a:noFill/>
+          </a:ln>
+        </p:spPr>
+        <p:style>
+          <a:lnRef idx="1">
+            <a:schemeClr val="accent1"/>
+          </a:lnRef>
+          <a:fillRef idx="3">
+            <a:schemeClr val="accent1"/>
+          </a:fillRef>
+          <a:effectRef idx="2">
+            <a:schemeClr val="accent1"/>
+          </a:effectRef>
+          <a:fontRef idx="minor">
+            <a:schemeClr val="lt1"/>
+          </a:fontRef>
+        </p:style>
+        <p:txBody>
+          <a:bodyPr rtlCol="0" anchor="ctr"/>
+          <a:lstStyle/>
+          <a:p>
+            <a:pPr algn="ctr"/>
+          </a:p>
+        </p:txBody>
+      </p:sp>
+      <p:sp>
+        <p:nvSpPr>
+          <p:cNvPr id="7" name="Rounded Rectangle 6"/>
+          <p:cNvSpPr/>
+          <p:nvPr/>
+        </p:nvSpPr>
+        <p:spPr>
+          <a:xfrm>
+            <a:off x="777240" y="1691640"/>
+            <a:ext cx="10607040" cy="2011680"/>
+          </a:xfrm>
+          <a:prstGeom prst="roundRect">
+            <a:avLst/>
+          </a:prstGeom>
+          <a:solidFill>
+            <a:srgbClr val="FFFFFF"/>
+          </a:solidFill>
+          <a:ln w="25400">
+            <a:solidFill>
+              <a:srgbClr val="E07A18"/>
+            </a:solidFill>
+          </a:ln>
+        </p:spPr>
+        <p:style>
+          <a:lnRef idx="1">
+            <a:schemeClr val="accent1"/>
+          </a:lnRef>
+          <a:fillRef idx="3">
+            <a:schemeClr val="accent1"/>
+          </a:fillRef>
+          <a:effectRef idx="2">
+            <a:schemeClr val="accent1"/>
+          </a:effectRef>
+          <a:fontRef idx="minor">
+            <a:schemeClr val="lt1"/>
+          </a:fontRef>
+        </p:style>
+        <p:txBody>
+          <a:bodyPr rtlCol="0" anchor="ctr" wrap="square" lIns="228600" rIns="228600" tIns="137160"/>
+          <a:lstStyle/>
+          <a:p>
+            <a:pPr algn="ctr"/>
             <a:r>
               <a:rPr sz="1800" b="1">
                 <a:solidFill>
-                  <a:srgbClr val="0B3D2E"/>
+                  <a:srgbClr val="1B3A57"/>
+                </a:solidFill>
+                <a:latin typeface="Calibri"/>
+              </a:rPr>
+              <a:t>Conclusion</a:t>
+            </a:r>
+          </a:p>
+          <a:p>
+            <a:pPr>
+              <a:spcAft>
+                <a:spcPts val="200"/>
+              </a:spcAft>
+            </a:pPr>
+            <a:r>
+              <a:rPr sz="1300">
+                <a:solidFill>
+                  <a:srgbClr val="1F2533"/>
+                </a:solidFill>
+                <a:latin typeface="Calibri"/>
+              </a:rPr>
+              <a:t>• Repeat breeding is a multifactorial syndrome — a symptom rather than a disease.</a:t>
+            </a:r>
+          </a:p>
+          <a:p>
+            <a:pPr>
+              <a:spcAft>
+                <a:spcPts val="200"/>
+              </a:spcAft>
+            </a:pPr>
+            <a:r>
+              <a:rPr sz="1300">
+                <a:solidFill>
+                  <a:srgbClr val="1F2533"/>
+                </a:solidFill>
+                <a:latin typeface="Calibri"/>
+              </a:rPr>
+              <a:t>• Successful management requires accurate diagnosis, correction of nutrition, infection and hormonal imbalance, plus excellent AI practices.</a:t>
+            </a:r>
+          </a:p>
+          <a:p>
+            <a:pPr>
+              <a:spcAft>
+                <a:spcPts val="200"/>
+              </a:spcAft>
+            </a:pPr>
+            <a:r>
+              <a:rPr sz="1300">
+                <a:solidFill>
+                  <a:srgbClr val="1F2533"/>
+                </a:solidFill>
+                <a:latin typeface="Calibri"/>
+              </a:rPr>
+              <a:t>• Buffaloes need extra attention to silent oestrus, seasonality and summer heat-stress mitigation.</a:t>
+            </a:r>
+          </a:p>
+          <a:p>
+            <a:pPr>
+              <a:spcAft>
+                <a:spcPts val="200"/>
+              </a:spcAft>
+            </a:pPr>
+            <a:r>
+              <a:rPr sz="1300">
+                <a:solidFill>
+                  <a:srgbClr val="1F2533"/>
+                </a:solidFill>
+                <a:latin typeface="Calibri"/>
+              </a:rPr>
+              <a:t>• Prevention — through good husbandry, heat detection and herd health programs — is far more economical than treatment.</a:t>
+            </a:r>
+          </a:p>
+        </p:txBody>
+      </p:sp>
+      <p:sp>
+        <p:nvSpPr>
+          <p:cNvPr id="8" name="TextBox 7"/>
+          <p:cNvSpPr txBox="1"/>
+          <p:nvPr/>
+        </p:nvSpPr>
+        <p:spPr>
+          <a:xfrm>
+            <a:off x="777240" y="3840480"/>
+            <a:ext cx="10607040" cy="2468880"/>
+          </a:xfrm>
+          <a:prstGeom prst="rect">
+            <a:avLst/>
+          </a:prstGeom>
+          <a:noFill/>
+        </p:spPr>
+        <p:txBody>
+          <a:bodyPr wrap="square">
+            <a:spAutoFit/>
+          </a:bodyPr>
+          <a:lstStyle/>
+          <a:p>
+            <a:r>
+              <a:rPr sz="1800" b="1">
+                <a:solidFill>
+                  <a:srgbClr val="1B3A57"/>
+                </a:solidFill>
+                <a:latin typeface="Calibri"/>
+              </a:rPr>
+              <a:t>References (selected)</a:t>
+            </a:r>
+          </a:p>
+          <a:p>
+            <a:pPr>
+              <a:spcAft>
+                <a:spcPts val="200"/>
+              </a:spcAft>
+            </a:pPr>
+            <a:r>
+              <a:rPr sz="1200">
+                <a:solidFill>
+                  <a:srgbClr val="1F2533"/>
+                </a:solidFill>
+                <a:latin typeface="Calibri"/>
+              </a:rPr>
+              <a:t>• Roberts, S.J. — Veterinary Obstetrics &amp; Genital Diseases (Theriogenology), 3rd Ed.</a:t>
+            </a:r>
+          </a:p>
+          <a:p>
+            <a:pPr>
+              <a:spcAft>
+                <a:spcPts val="200"/>
+              </a:spcAft>
+            </a:pPr>
+            <a:r>
+              <a:rPr sz="1200">
+                <a:solidFill>
+                  <a:srgbClr val="1F2533"/>
+                </a:solidFill>
+                <a:latin typeface="Calibri"/>
+              </a:rPr>
+              <a:t>• Arthur, Noakes, Pearson &amp; Parkinson — Veterinary Reproduction &amp; Obstetrics, 11th Ed.</a:t>
+            </a:r>
+          </a:p>
+          <a:p>
+            <a:pPr>
+              <a:spcAft>
+                <a:spcPts val="200"/>
+              </a:spcAft>
+            </a:pPr>
+            <a:r>
+              <a:rPr sz="1200">
+                <a:solidFill>
+                  <a:srgbClr val="1F2533"/>
+                </a:solidFill>
+                <a:latin typeface="Calibri"/>
+              </a:rPr>
+              <a:t>• Hafez E.S.E. &amp; Hafez B. — Reproduction in Farm Animals, 7th Ed.</a:t>
+            </a:r>
+          </a:p>
+          <a:p>
+            <a:pPr>
+              <a:spcAft>
+                <a:spcPts val="200"/>
+              </a:spcAft>
+            </a:pPr>
+            <a:r>
+              <a:rPr sz="1200">
+                <a:solidFill>
+                  <a:srgbClr val="1F2533"/>
+                </a:solidFill>
+                <a:latin typeface="Calibri"/>
+              </a:rPr>
+              <a:t>• Peters A.R. &amp; Ball P.J.H. — Reproduction in Cattle, 3rd Ed.</a:t>
+            </a:r>
+          </a:p>
+          <a:p>
+            <a:pPr>
+              <a:spcAft>
+                <a:spcPts val="200"/>
+              </a:spcAft>
+            </a:pPr>
+            <a:r>
+              <a:rPr sz="1200">
+                <a:solidFill>
+                  <a:srgbClr val="1F2533"/>
+                </a:solidFill>
+                <a:latin typeface="Calibri"/>
+              </a:rPr>
+              <a:t>• Bartlett P.C. et al. — Repeat breeder syndrome in dairy cattle, JDS.</a:t>
+            </a:r>
+          </a:p>
+          <a:p>
+            <a:pPr>
+              <a:spcAft>
+                <a:spcPts val="200"/>
+              </a:spcAft>
+            </a:pPr>
+            <a:r>
+              <a:rPr sz="1200">
+                <a:solidFill>
+                  <a:srgbClr val="1F2533"/>
+                </a:solidFill>
+                <a:latin typeface="Calibri"/>
+              </a:rPr>
+              <a:t>• Gustafsson H. &amp; Emanuelson U. — Characterisation of the repeat breeding syndrome in Swedish dairy cattle, Acta Vet. Scand.</a:t>
+            </a:r>
+          </a:p>
+          <a:p>
+            <a:pPr>
+              <a:spcAft>
+                <a:spcPts val="200"/>
+              </a:spcAft>
+            </a:pPr>
+            <a:r>
+              <a:rPr sz="1200">
+                <a:solidFill>
+                  <a:srgbClr val="1F2533"/>
+                </a:solidFill>
+                <a:latin typeface="Calibri"/>
+              </a:rPr>
+              <a:t>• Perera B.M.A.O. — Reproductive cycles of buffalo, Anim. Reprod. Sci.</a:t>
+            </a:r>
+          </a:p>
+        </p:txBody>
+      </p:sp>
+      <p:sp>
+        <p:nvSpPr>
+          <p:cNvPr id="9" name="TextBox 8"/>
+          <p:cNvSpPr txBox="1"/>
+          <p:nvPr/>
+        </p:nvSpPr>
+        <p:spPr>
+          <a:xfrm>
+            <a:off x="777240" y="6217920"/>
+            <a:ext cx="10607040" cy="274320"/>
+          </a:xfrm>
+          <a:prstGeom prst="rect">
+            <a:avLst/>
+          </a:prstGeom>
+          <a:noFill/>
+        </p:spPr>
+        <p:txBody>
+          <a:bodyPr wrap="none">
+            <a:spAutoFit/>
+          </a:bodyPr>
+          <a:lstStyle/>
+          <a:p>
+            <a:r>
+              <a:rPr sz="900" i="1">
+                <a:solidFill>
+                  <a:srgbClr val="555C66"/>
+                </a:solidFill>
+                <a:latin typeface="Calibri"/>
+              </a:rPr>
+              <a:t>Image credits: photographs of cows and buffaloes are from Wikimedia Commons (CC BY-SA / public domain).</a:t>
+            </a:r>
+          </a:p>
+        </p:txBody>
+      </p:sp>
+      <p:sp>
+        <p:nvSpPr>
+          <p:cNvPr id="10" name="Rectangle 9"/>
+          <p:cNvSpPr/>
+          <p:nvPr/>
+        </p:nvSpPr>
+        <p:spPr>
+          <a:xfrm>
+            <a:off x="4297680" y="6446520"/>
+            <a:ext cx="3657600" cy="365760"/>
+          </a:xfrm>
+          <a:prstGeom prst="rect">
+            <a:avLst/>
+          </a:prstGeom>
+          <a:solidFill>
+            <a:srgbClr val="E07A18"/>
+          </a:solidFill>
+          <a:ln>
+            <a:noFill/>
+          </a:ln>
+        </p:spPr>
+        <p:style>
+          <a:lnRef idx="1">
+            <a:schemeClr val="accent1"/>
+          </a:lnRef>
+          <a:fillRef idx="3">
+            <a:schemeClr val="accent1"/>
+          </a:fillRef>
+          <a:effectRef idx="2">
+            <a:schemeClr val="accent1"/>
+          </a:effectRef>
+          <a:fontRef idx="minor">
+            <a:schemeClr val="lt1"/>
+          </a:fontRef>
+        </p:style>
+        <p:txBody>
+          <a:bodyPr rtlCol="0" anchor="ctr" tIns="18288" bIns="18288"/>
+          <a:lstStyle/>
+          <a:p>
+            <a:pPr algn="ctr"/>
+            <a:r>
+              <a:rPr sz="1600" b="1">
+                <a:solidFill>
+                  <a:srgbClr val="FFFFFF"/>
                 </a:solidFill>
                 <a:latin typeface="Calibri"/>
               </a:rPr>
@@ -8847,7 +10264,7 @@
             <a:avLst/>
           </a:prstGeom>
           <a:solidFill>
-            <a:srgbClr val="F5F1E8"/>
+            <a:srgbClr val="F7F3EB"/>
           </a:solidFill>
           <a:ln>
             <a:noFill/>
@@ -8884,13 +10301,13 @@
         <p:spPr>
           <a:xfrm>
             <a:off x="0" y="0"/>
-            <a:ext cx="320040" cy="6858000"/>
-          </a:xfrm>
-          <a:prstGeom prst="rect">
-            <a:avLst/>
-          </a:prstGeom>
-          <a:solidFill>
-            <a:srgbClr val="0B3D2E"/>
+            <a:ext cx="292608" cy="6858000"/>
+          </a:xfrm>
+          <a:prstGeom prst="rect">
+            <a:avLst/>
+          </a:prstGeom>
+          <a:solidFill>
+            <a:srgbClr val="1B3A57"/>
           </a:solidFill>
           <a:ln>
             <a:noFill/>
@@ -8926,14 +10343,14 @@
         </p:nvSpPr>
         <p:spPr>
           <a:xfrm>
-            <a:off x="320040" y="0"/>
-            <a:ext cx="73152" cy="6858000"/>
-          </a:xfrm>
-          <a:prstGeom prst="rect">
-            <a:avLst/>
-          </a:prstGeom>
-          <a:solidFill>
-            <a:srgbClr val="C9A227"/>
+            <a:off x="292608" y="0"/>
+            <a:ext cx="64008" cy="6858000"/>
+          </a:xfrm>
+          <a:prstGeom prst="rect">
+            <a:avLst/>
+          </a:prstGeom>
+          <a:solidFill>
+            <a:srgbClr val="E07A18"/>
           </a:solidFill>
           <a:ln>
             <a:noFill/>
@@ -8969,7 +10386,7 @@
         </p:nvSpPr>
         <p:spPr>
           <a:xfrm>
-            <a:off x="640080" y="320040"/>
+            <a:off x="594360" y="292608"/>
             <a:ext cx="11155680" cy="822960"/>
           </a:xfrm>
           <a:prstGeom prst="rect">
@@ -8986,7 +10403,7 @@
             <a:r>
               <a:rPr sz="3400" b="1">
                 <a:solidFill>
-                  <a:srgbClr val="0B3D2E"/>
+                  <a:srgbClr val="1B3A57"/>
                 </a:solidFill>
                 <a:latin typeface="Calibri"/>
               </a:rPr>
@@ -9003,14 +10420,14 @@
         </p:nvSpPr>
         <p:spPr>
           <a:xfrm>
-            <a:off x="640080" y="1078992"/>
-            <a:ext cx="1097280" cy="64008"/>
-          </a:xfrm>
-          <a:prstGeom prst="rect">
-            <a:avLst/>
-          </a:prstGeom>
-          <a:solidFill>
-            <a:srgbClr val="C9A227"/>
+            <a:off x="594360" y="1078992"/>
+            <a:ext cx="1280160" cy="64008"/>
+          </a:xfrm>
+          <a:prstGeom prst="rect">
+            <a:avLst/>
+          </a:prstGeom>
+          <a:solidFill>
+            <a:srgbClr val="E07A18"/>
           </a:solidFill>
           <a:ln>
             <a:noFill/>
@@ -9046,14 +10463,14 @@
         </p:nvSpPr>
         <p:spPr>
           <a:xfrm>
-            <a:off x="777240" y="1783080"/>
+            <a:off x="777240" y="1801368"/>
             <a:ext cx="164592" cy="164592"/>
           </a:xfrm>
           <a:prstGeom prst="ellipse">
             <a:avLst/>
           </a:prstGeom>
           <a:solidFill>
-            <a:srgbClr val="C9A227"/>
+            <a:srgbClr val="E07A18"/>
           </a:solidFill>
           <a:ln>
             <a:noFill/>
@@ -9106,7 +10523,7 @@
             <a:r>
               <a:rPr sz="1800">
                 <a:solidFill>
-                  <a:srgbClr val="1F2A24"/>
+                  <a:srgbClr val="1F2533"/>
                 </a:solidFill>
                 <a:latin typeface="Calibri"/>
               </a:rPr>
@@ -9123,14 +10540,14 @@
         </p:nvSpPr>
         <p:spPr>
           <a:xfrm>
-            <a:off x="777240" y="2331720"/>
+            <a:off x="777240" y="2441448"/>
             <a:ext cx="164592" cy="164592"/>
           </a:xfrm>
           <a:prstGeom prst="ellipse">
             <a:avLst/>
           </a:prstGeom>
           <a:solidFill>
-            <a:srgbClr val="C9A227"/>
+            <a:srgbClr val="E07A18"/>
           </a:solidFill>
           <a:ln>
             <a:noFill/>
@@ -9166,7 +10583,7 @@
         </p:nvSpPr>
         <p:spPr>
           <a:xfrm>
-            <a:off x="1097280" y="2240280"/>
+            <a:off x="1097280" y="2331720"/>
             <a:ext cx="5029200" cy="457200"/>
           </a:xfrm>
           <a:prstGeom prst="rect">
@@ -9183,7 +10600,7 @@
             <a:r>
               <a:rPr sz="1800">
                 <a:solidFill>
-                  <a:srgbClr val="1F2A24"/>
+                  <a:srgbClr val="1F2533"/>
                 </a:solidFill>
                 <a:latin typeface="Calibri"/>
               </a:rPr>
@@ -9200,14 +10617,14 @@
         </p:nvSpPr>
         <p:spPr>
           <a:xfrm>
-            <a:off x="777240" y="2880360"/>
+            <a:off x="777240" y="3081528"/>
             <a:ext cx="164592" cy="164592"/>
           </a:xfrm>
           <a:prstGeom prst="ellipse">
             <a:avLst/>
           </a:prstGeom>
           <a:solidFill>
-            <a:srgbClr val="C9A227"/>
+            <a:srgbClr val="E07A18"/>
           </a:solidFill>
           <a:ln>
             <a:noFill/>
@@ -9243,7 +10660,7 @@
         </p:nvSpPr>
         <p:spPr>
           <a:xfrm>
-            <a:off x="1097280" y="2788920"/>
+            <a:off x="1097280" y="2971800"/>
             <a:ext cx="5029200" cy="457200"/>
           </a:xfrm>
           <a:prstGeom prst="rect">
@@ -9260,7 +10677,7 @@
             <a:r>
               <a:rPr sz="1800">
                 <a:solidFill>
-                  <a:srgbClr val="1F2A24"/>
+                  <a:srgbClr val="1F2533"/>
                 </a:solidFill>
                 <a:latin typeface="Calibri"/>
               </a:rPr>
@@ -9277,14 +10694,14 @@
         </p:nvSpPr>
         <p:spPr>
           <a:xfrm>
-            <a:off x="777240" y="3429000"/>
+            <a:off x="777240" y="3721607"/>
             <a:ext cx="164592" cy="164592"/>
           </a:xfrm>
           <a:prstGeom prst="ellipse">
             <a:avLst/>
           </a:prstGeom>
           <a:solidFill>
-            <a:srgbClr val="C9A227"/>
+            <a:srgbClr val="E07A18"/>
           </a:solidFill>
           <a:ln>
             <a:noFill/>
@@ -9320,7 +10737,7 @@
         </p:nvSpPr>
         <p:spPr>
           <a:xfrm>
-            <a:off x="1097280" y="3337560"/>
+            <a:off x="1097280" y="3611879"/>
             <a:ext cx="5029200" cy="457200"/>
           </a:xfrm>
           <a:prstGeom prst="rect">
@@ -9337,7 +10754,7 @@
             <a:r>
               <a:rPr sz="1800">
                 <a:solidFill>
-                  <a:srgbClr val="1F2A24"/>
+                  <a:srgbClr val="1F2533"/>
                 </a:solidFill>
                 <a:latin typeface="Calibri"/>
               </a:rPr>
@@ -9354,14 +10771,14 @@
         </p:nvSpPr>
         <p:spPr>
           <a:xfrm>
-            <a:off x="777240" y="3977640"/>
+            <a:off x="777240" y="4361688"/>
             <a:ext cx="164592" cy="164592"/>
           </a:xfrm>
           <a:prstGeom prst="ellipse">
             <a:avLst/>
           </a:prstGeom>
           <a:solidFill>
-            <a:srgbClr val="C9A227"/>
+            <a:srgbClr val="E07A18"/>
           </a:solidFill>
           <a:ln>
             <a:noFill/>
@@ -9397,7 +10814,7 @@
         </p:nvSpPr>
         <p:spPr>
           <a:xfrm>
-            <a:off x="1097280" y="3886200"/>
+            <a:off x="1097280" y="4251960"/>
             <a:ext cx="5029200" cy="457200"/>
           </a:xfrm>
           <a:prstGeom prst="rect">
@@ -9414,7 +10831,7 @@
             <a:r>
               <a:rPr sz="1800">
                 <a:solidFill>
-                  <a:srgbClr val="1F2A24"/>
+                  <a:srgbClr val="1F2533"/>
                 </a:solidFill>
                 <a:latin typeface="Calibri"/>
               </a:rPr>
@@ -9431,14 +10848,14 @@
         </p:nvSpPr>
         <p:spPr>
           <a:xfrm>
-            <a:off x="6263640" y="1783080"/>
+            <a:off x="777240" y="5001768"/>
             <a:ext cx="164592" cy="164592"/>
           </a:xfrm>
           <a:prstGeom prst="ellipse">
             <a:avLst/>
           </a:prstGeom>
           <a:solidFill>
-            <a:srgbClr val="C9A227"/>
+            <a:srgbClr val="E07A18"/>
           </a:solidFill>
           <a:ln>
             <a:noFill/>
@@ -9474,7 +10891,7 @@
         </p:nvSpPr>
         <p:spPr>
           <a:xfrm>
-            <a:off x="6583680" y="1691640"/>
+            <a:off x="1097280" y="4892040"/>
             <a:ext cx="5029200" cy="457200"/>
           </a:xfrm>
           <a:prstGeom prst="rect">
@@ -9491,7 +10908,7 @@
             <a:r>
               <a:rPr sz="1800">
                 <a:solidFill>
-                  <a:srgbClr val="1F2A24"/>
+                  <a:srgbClr val="1F2533"/>
                 </a:solidFill>
                 <a:latin typeface="Calibri"/>
               </a:rPr>
@@ -9508,14 +10925,14 @@
         </p:nvSpPr>
         <p:spPr>
           <a:xfrm>
-            <a:off x="6263640" y="2331720"/>
+            <a:off x="6263640" y="1801368"/>
             <a:ext cx="164592" cy="164592"/>
           </a:xfrm>
           <a:prstGeom prst="ellipse">
             <a:avLst/>
           </a:prstGeom>
           <a:solidFill>
-            <a:srgbClr val="C9A227"/>
+            <a:srgbClr val="E07A18"/>
           </a:solidFill>
           <a:ln>
             <a:noFill/>
@@ -9551,7 +10968,7 @@
         </p:nvSpPr>
         <p:spPr>
           <a:xfrm>
-            <a:off x="6583680" y="2240280"/>
+            <a:off x="6583680" y="1691640"/>
             <a:ext cx="5029200" cy="457200"/>
           </a:xfrm>
           <a:prstGeom prst="rect">
@@ -9568,7 +10985,7 @@
             <a:r>
               <a:rPr sz="1800">
                 <a:solidFill>
-                  <a:srgbClr val="1F2A24"/>
+                  <a:srgbClr val="1F2533"/>
                 </a:solidFill>
                 <a:latin typeface="Calibri"/>
               </a:rPr>
@@ -9585,14 +11002,14 @@
         </p:nvSpPr>
         <p:spPr>
           <a:xfrm>
-            <a:off x="6263640" y="2880360"/>
+            <a:off x="6263640" y="2441448"/>
             <a:ext cx="164592" cy="164592"/>
           </a:xfrm>
           <a:prstGeom prst="ellipse">
             <a:avLst/>
           </a:prstGeom>
           <a:solidFill>
-            <a:srgbClr val="C9A227"/>
+            <a:srgbClr val="E07A18"/>
           </a:solidFill>
           <a:ln>
             <a:noFill/>
@@ -9628,7 +11045,7 @@
         </p:nvSpPr>
         <p:spPr>
           <a:xfrm>
-            <a:off x="6583680" y="2788920"/>
+            <a:off x="6583680" y="2331720"/>
             <a:ext cx="5029200" cy="457200"/>
           </a:xfrm>
           <a:prstGeom prst="rect">
@@ -9645,11 +11062,11 @@
             <a:r>
               <a:rPr sz="1800">
                 <a:solidFill>
-                  <a:srgbClr val="1F2A24"/>
-                </a:solidFill>
-                <a:latin typeface="Calibri"/>
-              </a:rPr>
-              <a:t>8.  Prevention Strategies</a:t>
+                  <a:srgbClr val="1F2533"/>
+                </a:solidFill>
+                <a:latin typeface="Calibri"/>
+              </a:rPr>
+              <a:t>8.  Buffalo-Specific Repeat Breeding</a:t>
             </a:r>
           </a:p>
         </p:txBody>
@@ -9662,14 +11079,14 @@
         </p:nvSpPr>
         <p:spPr>
           <a:xfrm>
-            <a:off x="6263640" y="3429000"/>
+            <a:off x="6263640" y="3081528"/>
             <a:ext cx="164592" cy="164592"/>
           </a:xfrm>
           <a:prstGeom prst="ellipse">
             <a:avLst/>
           </a:prstGeom>
           <a:solidFill>
-            <a:srgbClr val="C9A227"/>
+            <a:srgbClr val="E07A18"/>
           </a:solidFill>
           <a:ln>
             <a:noFill/>
@@ -9705,7 +11122,7 @@
         </p:nvSpPr>
         <p:spPr>
           <a:xfrm>
-            <a:off x="6583680" y="3337560"/>
+            <a:off x="6583680" y="2971800"/>
             <a:ext cx="5029200" cy="457200"/>
           </a:xfrm>
           <a:prstGeom prst="rect">
@@ -9722,11 +11139,11 @@
             <a:r>
               <a:rPr sz="1800">
                 <a:solidFill>
-                  <a:srgbClr val="1F2A24"/>
-                </a:solidFill>
-                <a:latin typeface="Calibri"/>
-              </a:rPr>
-              <a:t>9.  Recent Advances</a:t>
+                  <a:srgbClr val="1F2533"/>
+                </a:solidFill>
+                <a:latin typeface="Calibri"/>
+              </a:rPr>
+              <a:t>9.  Prevention Strategies</a:t>
             </a:r>
           </a:p>
         </p:txBody>
@@ -9739,14 +11156,14 @@
         </p:nvSpPr>
         <p:spPr>
           <a:xfrm>
-            <a:off x="6263640" y="3977640"/>
+            <a:off x="6263640" y="3721607"/>
             <a:ext cx="164592" cy="164592"/>
           </a:xfrm>
           <a:prstGeom prst="ellipse">
             <a:avLst/>
           </a:prstGeom>
           <a:solidFill>
-            <a:srgbClr val="C9A227"/>
+            <a:srgbClr val="E07A18"/>
           </a:solidFill>
           <a:ln>
             <a:noFill/>
@@ -9782,7 +11199,7 @@
         </p:nvSpPr>
         <p:spPr>
           <a:xfrm>
-            <a:off x="6583680" y="3886200"/>
+            <a:off x="6583680" y="3611879"/>
             <a:ext cx="5029200" cy="457200"/>
           </a:xfrm>
           <a:prstGeom prst="rect">
@@ -9799,18 +11216,95 @@
             <a:r>
               <a:rPr sz="1800">
                 <a:solidFill>
-                  <a:srgbClr val="1F2A24"/>
-                </a:solidFill>
-                <a:latin typeface="Calibri"/>
-              </a:rPr>
-              <a:t>10. Conclusion &amp; References</a:t>
-            </a:r>
-          </a:p>
-        </p:txBody>
-      </p:sp>
-      <p:sp>
-        <p:nvSpPr>
-          <p:cNvPr id="27" name="TextBox 26"/>
+                  <a:srgbClr val="1F2533"/>
+                </a:solidFill>
+                <a:latin typeface="Calibri"/>
+              </a:rPr>
+              <a:t>10. Recent Advances</a:t>
+            </a:r>
+          </a:p>
+        </p:txBody>
+      </p:sp>
+      <p:sp>
+        <p:nvSpPr>
+          <p:cNvPr id="27" name="Oval 26"/>
+          <p:cNvSpPr/>
+          <p:nvPr/>
+        </p:nvSpPr>
+        <p:spPr>
+          <a:xfrm>
+            <a:off x="6263640" y="4361688"/>
+            <a:ext cx="164592" cy="164592"/>
+          </a:xfrm>
+          <a:prstGeom prst="ellipse">
+            <a:avLst/>
+          </a:prstGeom>
+          <a:solidFill>
+            <a:srgbClr val="E07A18"/>
+          </a:solidFill>
+          <a:ln>
+            <a:noFill/>
+          </a:ln>
+        </p:spPr>
+        <p:style>
+          <a:lnRef idx="1">
+            <a:schemeClr val="accent1"/>
+          </a:lnRef>
+          <a:fillRef idx="3">
+            <a:schemeClr val="accent1"/>
+          </a:fillRef>
+          <a:effectRef idx="2">
+            <a:schemeClr val="accent1"/>
+          </a:effectRef>
+          <a:fontRef idx="minor">
+            <a:schemeClr val="lt1"/>
+          </a:fontRef>
+        </p:style>
+        <p:txBody>
+          <a:bodyPr rtlCol="0" anchor="ctr"/>
+          <a:lstStyle/>
+          <a:p>
+            <a:pPr algn="ctr"/>
+          </a:p>
+        </p:txBody>
+      </p:sp>
+      <p:sp>
+        <p:nvSpPr>
+          <p:cNvPr id="28" name="TextBox 27"/>
+          <p:cNvSpPr txBox="1"/>
+          <p:nvPr/>
+        </p:nvSpPr>
+        <p:spPr>
+          <a:xfrm>
+            <a:off x="6583680" y="4251960"/>
+            <a:ext cx="5029200" cy="457200"/>
+          </a:xfrm>
+          <a:prstGeom prst="rect">
+            <a:avLst/>
+          </a:prstGeom>
+          <a:noFill/>
+        </p:spPr>
+        <p:txBody>
+          <a:bodyPr wrap="none">
+            <a:spAutoFit/>
+          </a:bodyPr>
+          <a:lstStyle/>
+          <a:p>
+            <a:r>
+              <a:rPr sz="1800">
+                <a:solidFill>
+                  <a:srgbClr val="1F2533"/>
+                </a:solidFill>
+                <a:latin typeface="Calibri"/>
+              </a:rPr>
+              <a:t>11. Conclusion &amp; References</a:t>
+            </a:r>
+          </a:p>
+        </p:txBody>
+      </p:sp>
+      <p:sp>
+        <p:nvSpPr>
+          <p:cNvPr id="29" name="TextBox 28"/>
           <p:cNvSpPr txBox="1"/>
           <p:nvPr/>
         </p:nvSpPr>
@@ -9834,7 +11328,7 @@
             <a:r>
               <a:rPr sz="1000">
                 <a:solidFill>
-                  <a:srgbClr val="555555"/>
+                  <a:srgbClr val="555C66"/>
                 </a:solidFill>
                 <a:latin typeface="Calibri"/>
               </a:rPr>
@@ -9845,7 +11339,7 @@
       </p:sp>
       <p:sp>
         <p:nvSpPr>
-          <p:cNvPr id="28" name="TextBox 27"/>
+          <p:cNvPr id="30" name="TextBox 29"/>
           <p:cNvSpPr txBox="1"/>
           <p:nvPr/>
         </p:nvSpPr>
@@ -9869,11 +11363,11 @@
             <a:r>
               <a:rPr sz="1000">
                 <a:solidFill>
-                  <a:srgbClr val="555555"/>
-                </a:solidFill>
-                <a:latin typeface="Calibri"/>
-              </a:rPr>
-              <a:t>2 / 18</a:t>
+                  <a:srgbClr val="555C66"/>
+                </a:solidFill>
+                <a:latin typeface="Calibri"/>
+              </a:rPr>
+              <a:t>2 / 19</a:t>
             </a:r>
           </a:p>
         </p:txBody>
@@ -9911,7 +11405,7 @@
             <a:avLst/>
           </a:prstGeom>
           <a:solidFill>
-            <a:srgbClr val="F5F1E8"/>
+            <a:srgbClr val="F7F3EB"/>
           </a:solidFill>
           <a:ln>
             <a:noFill/>
@@ -9948,13 +11442,13 @@
         <p:spPr>
           <a:xfrm>
             <a:off x="0" y="0"/>
-            <a:ext cx="320040" cy="6858000"/>
-          </a:xfrm>
-          <a:prstGeom prst="rect">
-            <a:avLst/>
-          </a:prstGeom>
-          <a:solidFill>
-            <a:srgbClr val="0B3D2E"/>
+            <a:ext cx="292608" cy="6858000"/>
+          </a:xfrm>
+          <a:prstGeom prst="rect">
+            <a:avLst/>
+          </a:prstGeom>
+          <a:solidFill>
+            <a:srgbClr val="1B3A57"/>
           </a:solidFill>
           <a:ln>
             <a:noFill/>
@@ -9990,14 +11484,14 @@
         </p:nvSpPr>
         <p:spPr>
           <a:xfrm>
-            <a:off x="320040" y="0"/>
-            <a:ext cx="73152" cy="6858000"/>
-          </a:xfrm>
-          <a:prstGeom prst="rect">
-            <a:avLst/>
-          </a:prstGeom>
-          <a:solidFill>
-            <a:srgbClr val="C9A227"/>
+            <a:off x="292608" y="0"/>
+            <a:ext cx="64008" cy="6858000"/>
+          </a:xfrm>
+          <a:prstGeom prst="rect">
+            <a:avLst/>
+          </a:prstGeom>
+          <a:solidFill>
+            <a:srgbClr val="E07A18"/>
           </a:solidFill>
           <a:ln>
             <a:noFill/>
@@ -10033,7 +11527,7 @@
         </p:nvSpPr>
         <p:spPr>
           <a:xfrm>
-            <a:off x="640080" y="320040"/>
+            <a:off x="594360" y="292608"/>
             <a:ext cx="11155680" cy="822960"/>
           </a:xfrm>
           <a:prstGeom prst="rect">
@@ -10050,7 +11544,7 @@
             <a:r>
               <a:rPr sz="3400" b="1">
                 <a:solidFill>
-                  <a:srgbClr val="0B3D2E"/>
+                  <a:srgbClr val="1B3A57"/>
                 </a:solidFill>
                 <a:latin typeface="Calibri"/>
               </a:rPr>
@@ -10067,14 +11561,14 @@
         </p:nvSpPr>
         <p:spPr>
           <a:xfrm>
-            <a:off x="640080" y="1078992"/>
-            <a:ext cx="1097280" cy="64008"/>
-          </a:xfrm>
-          <a:prstGeom prst="rect">
-            <a:avLst/>
-          </a:prstGeom>
-          <a:solidFill>
-            <a:srgbClr val="C9A227"/>
+            <a:off x="594360" y="1078992"/>
+            <a:ext cx="1280160" cy="64008"/>
+          </a:xfrm>
+          <a:prstGeom prst="rect">
+            <a:avLst/>
+          </a:prstGeom>
+          <a:solidFill>
+            <a:srgbClr val="E07A18"/>
           </a:solidFill>
           <a:ln>
             <a:noFill/>
@@ -10110,7 +11604,7 @@
         </p:nvSpPr>
         <p:spPr>
           <a:xfrm>
-            <a:off x="640080" y="1170432"/>
+            <a:off x="594360" y="1170432"/>
             <a:ext cx="11155680" cy="365760"/>
           </a:xfrm>
           <a:prstGeom prst="rect">
@@ -10127,7 +11621,7 @@
             <a:r>
               <a:rPr sz="1400" i="1">
                 <a:solidFill>
-                  <a:srgbClr val="555555"/>
+                  <a:srgbClr val="555C66"/>
                 </a:solidFill>
                 <a:latin typeface="Calibri"/>
               </a:rPr>
@@ -10144,8 +11638,8 @@
         </p:nvSpPr>
         <p:spPr>
           <a:xfrm>
-            <a:off x="777240" y="1645920"/>
-            <a:ext cx="10972800" cy="4572000"/>
+            <a:off x="777240" y="1691640"/>
+            <a:ext cx="7315200" cy="4572000"/>
           </a:xfrm>
           <a:prstGeom prst="rect">
             <a:avLst/>
@@ -10164,9 +11658,9 @@
               </a:spcAft>
             </a:pPr>
             <a:r>
-              <a:rPr sz="1800" b="0">
-                <a:solidFill>
-                  <a:srgbClr val="1F2A24"/>
+              <a:rPr sz="1600">
+                <a:solidFill>
+                  <a:srgbClr val="1F2533"/>
                 </a:solidFill>
                 <a:latin typeface="Calibri"/>
               </a:rPr>
@@ -10180,9 +11674,9 @@
               </a:spcAft>
             </a:pPr>
             <a:r>
-              <a:rPr sz="1800" b="0">
-                <a:solidFill>
-                  <a:srgbClr val="1F2A24"/>
+              <a:rPr sz="1600">
+                <a:solidFill>
+                  <a:srgbClr val="1F2533"/>
                 </a:solidFill>
                 <a:latin typeface="Calibri"/>
               </a:rPr>
@@ -10196,9 +11690,9 @@
               </a:spcAft>
             </a:pPr>
             <a:r>
-              <a:rPr sz="1800" b="0">
-                <a:solidFill>
-                  <a:srgbClr val="1F2A24"/>
+              <a:rPr sz="1600">
+                <a:solidFill>
+                  <a:srgbClr val="1F2533"/>
                 </a:solidFill>
                 <a:latin typeface="Calibri"/>
               </a:rPr>
@@ -10212,9 +11706,9 @@
               </a:spcAft>
             </a:pPr>
             <a:r>
-              <a:rPr sz="1800" b="0">
-                <a:solidFill>
-                  <a:srgbClr val="1F2A24"/>
+              <a:rPr sz="1600">
+                <a:solidFill>
+                  <a:srgbClr val="1F2533"/>
                 </a:solidFill>
                 <a:latin typeface="Calibri"/>
               </a:rPr>
@@ -10228,9 +11722,9 @@
               </a:spcAft>
             </a:pPr>
             <a:r>
-              <a:rPr sz="1800" b="0">
-                <a:solidFill>
-                  <a:srgbClr val="1F2A24"/>
+              <a:rPr sz="1600">
+                <a:solidFill>
+                  <a:srgbClr val="1F2533"/>
                 </a:solidFill>
                 <a:latin typeface="Calibri"/>
               </a:rPr>
@@ -10241,7 +11735,211 @@
       </p:sp>
       <p:sp>
         <p:nvSpPr>
-          <p:cNvPr id="9" name="TextBox 8"/>
+          <p:cNvPr id="9" name="Rectangle 8"/>
+          <p:cNvSpPr/>
+          <p:nvPr/>
+        </p:nvSpPr>
+        <p:spPr>
+          <a:xfrm>
+            <a:off x="8275320" y="1737360"/>
+            <a:ext cx="3474720" cy="2633472"/>
+          </a:xfrm>
+          <a:prstGeom prst="rect">
+            <a:avLst/>
+          </a:prstGeom>
+          <a:solidFill>
+            <a:srgbClr val="1B3A57"/>
+          </a:solidFill>
+          <a:ln>
+            <a:noFill/>
+          </a:ln>
+        </p:spPr>
+        <p:style>
+          <a:lnRef idx="1">
+            <a:schemeClr val="accent1"/>
+          </a:lnRef>
+          <a:fillRef idx="3">
+            <a:schemeClr val="accent1"/>
+          </a:fillRef>
+          <a:effectRef idx="2">
+            <a:schemeClr val="accent1"/>
+          </a:effectRef>
+          <a:fontRef idx="minor">
+            <a:schemeClr val="lt1"/>
+          </a:fontRef>
+        </p:style>
+        <p:txBody>
+          <a:bodyPr rtlCol="0" anchor="ctr"/>
+          <a:lstStyle/>
+          <a:p>
+            <a:pPr algn="ctr"/>
+          </a:p>
+        </p:txBody>
+      </p:sp>
+      <p:pic>
+        <p:nvPicPr>
+          <p:cNvPr id="10" name="Picture 9" descr="cow_dairy.jpg"/>
+          <p:cNvPicPr>
+            <a:picLocks noChangeAspect="1"/>
+          </p:cNvPicPr>
+          <p:nvPr/>
+        </p:nvPicPr>
+        <p:blipFill>
+          <a:blip r:embed="rId2"/>
+          <a:stretch>
+            <a:fillRect/>
+          </a:stretch>
+        </p:blipFill>
+        <p:spPr>
+          <a:xfrm>
+            <a:off x="8321040" y="1783080"/>
+            <a:ext cx="3383280" cy="2542032"/>
+          </a:xfrm>
+          <a:prstGeom prst="rect">
+            <a:avLst/>
+          </a:prstGeom>
+        </p:spPr>
+      </p:pic>
+      <p:sp>
+        <p:nvSpPr>
+          <p:cNvPr id="11" name="TextBox 10"/>
+          <p:cNvSpPr txBox="1"/>
+          <p:nvPr/>
+        </p:nvSpPr>
+        <p:spPr>
+          <a:xfrm>
+            <a:off x="8321040" y="4370832"/>
+            <a:ext cx="3383280" cy="274320"/>
+          </a:xfrm>
+          <a:prstGeom prst="rect">
+            <a:avLst/>
+          </a:prstGeom>
+          <a:noFill/>
+        </p:spPr>
+        <p:txBody>
+          <a:bodyPr wrap="none">
+            <a:spAutoFit/>
+          </a:bodyPr>
+          <a:lstStyle/>
+          <a:p>
+            <a:pPr algn="ctr"/>
+            <a:r>
+              <a:rPr sz="1000" i="1">
+                <a:solidFill>
+                  <a:srgbClr val="555C66"/>
+                </a:solidFill>
+                <a:latin typeface="Calibri"/>
+              </a:rPr>
+              <a:t>Holstein dairy cow on pasture</a:t>
+            </a:r>
+          </a:p>
+        </p:txBody>
+      </p:sp>
+      <p:sp>
+        <p:nvSpPr>
+          <p:cNvPr id="12" name="Rectangle 11"/>
+          <p:cNvSpPr/>
+          <p:nvPr/>
+        </p:nvSpPr>
+        <p:spPr>
+          <a:xfrm>
+            <a:off x="8275320" y="4526280"/>
+            <a:ext cx="3474720" cy="1783080"/>
+          </a:xfrm>
+          <a:prstGeom prst="rect">
+            <a:avLst/>
+          </a:prstGeom>
+          <a:solidFill>
+            <a:srgbClr val="1B3A57"/>
+          </a:solidFill>
+          <a:ln>
+            <a:noFill/>
+          </a:ln>
+        </p:spPr>
+        <p:style>
+          <a:lnRef idx="1">
+            <a:schemeClr val="accent1"/>
+          </a:lnRef>
+          <a:fillRef idx="3">
+            <a:schemeClr val="accent1"/>
+          </a:fillRef>
+          <a:effectRef idx="2">
+            <a:schemeClr val="accent1"/>
+          </a:effectRef>
+          <a:fontRef idx="minor">
+            <a:schemeClr val="lt1"/>
+          </a:fontRef>
+        </p:style>
+        <p:txBody>
+          <a:bodyPr rtlCol="0" anchor="ctr"/>
+          <a:lstStyle/>
+          <a:p>
+            <a:pPr algn="ctr"/>
+          </a:p>
+        </p:txBody>
+      </p:sp>
+      <p:pic>
+        <p:nvPicPr>
+          <p:cNvPr id="13" name="Picture 12" descr="sahiwal.jpg"/>
+          <p:cNvPicPr>
+            <a:picLocks noChangeAspect="1"/>
+          </p:cNvPicPr>
+          <p:nvPr/>
+        </p:nvPicPr>
+        <p:blipFill>
+          <a:blip r:embed="rId3"/>
+          <a:stretch>
+            <a:fillRect/>
+          </a:stretch>
+        </p:blipFill>
+        <p:spPr>
+          <a:xfrm>
+            <a:off x="8321040" y="4572000"/>
+            <a:ext cx="3383280" cy="1691640"/>
+          </a:xfrm>
+          <a:prstGeom prst="rect">
+            <a:avLst/>
+          </a:prstGeom>
+        </p:spPr>
+      </p:pic>
+      <p:sp>
+        <p:nvSpPr>
+          <p:cNvPr id="14" name="TextBox 13"/>
+          <p:cNvSpPr txBox="1"/>
+          <p:nvPr/>
+        </p:nvSpPr>
+        <p:spPr>
+          <a:xfrm>
+            <a:off x="8321040" y="6309360"/>
+            <a:ext cx="3383280" cy="274320"/>
+          </a:xfrm>
+          <a:prstGeom prst="rect">
+            <a:avLst/>
+          </a:prstGeom>
+          <a:noFill/>
+        </p:spPr>
+        <p:txBody>
+          <a:bodyPr wrap="none">
+            <a:spAutoFit/>
+          </a:bodyPr>
+          <a:lstStyle/>
+          <a:p>
+            <a:pPr algn="ctr"/>
+            <a:r>
+              <a:rPr sz="1000" i="1">
+                <a:solidFill>
+                  <a:srgbClr val="555C66"/>
+                </a:solidFill>
+                <a:latin typeface="Calibri"/>
+              </a:rPr>
+              <a:t>Sahiwal — indigenous Indian dairy breed</a:t>
+            </a:r>
+          </a:p>
+        </p:txBody>
+      </p:sp>
+      <p:sp>
+        <p:nvSpPr>
+          <p:cNvPr id="15" name="TextBox 14"/>
           <p:cNvSpPr txBox="1"/>
           <p:nvPr/>
         </p:nvSpPr>
@@ -10265,7 +11963,7 @@
             <a:r>
               <a:rPr sz="1000">
                 <a:solidFill>
-                  <a:srgbClr val="555555"/>
+                  <a:srgbClr val="555C66"/>
                 </a:solidFill>
                 <a:latin typeface="Calibri"/>
               </a:rPr>
@@ -10276,7 +11974,7 @@
       </p:sp>
       <p:sp>
         <p:nvSpPr>
-          <p:cNvPr id="10" name="TextBox 9"/>
+          <p:cNvPr id="16" name="TextBox 15"/>
           <p:cNvSpPr txBox="1"/>
           <p:nvPr/>
         </p:nvSpPr>
@@ -10300,11 +11998,11 @@
             <a:r>
               <a:rPr sz="1000">
                 <a:solidFill>
-                  <a:srgbClr val="555555"/>
-                </a:solidFill>
-                <a:latin typeface="Calibri"/>
-              </a:rPr>
-              <a:t>3 / 18</a:t>
+                  <a:srgbClr val="555C66"/>
+                </a:solidFill>
+                <a:latin typeface="Calibri"/>
+              </a:rPr>
+              <a:t>3 / 19</a:t>
             </a:r>
           </a:p>
         </p:txBody>
@@ -10342,7 +12040,7 @@
             <a:avLst/>
           </a:prstGeom>
           <a:solidFill>
-            <a:srgbClr val="F5F1E8"/>
+            <a:srgbClr val="F7F3EB"/>
           </a:solidFill>
           <a:ln>
             <a:noFill/>
@@ -10379,13 +12077,13 @@
         <p:spPr>
           <a:xfrm>
             <a:off x="0" y="0"/>
-            <a:ext cx="320040" cy="6858000"/>
-          </a:xfrm>
-          <a:prstGeom prst="rect">
-            <a:avLst/>
-          </a:prstGeom>
-          <a:solidFill>
-            <a:srgbClr val="0B3D2E"/>
+            <a:ext cx="292608" cy="6858000"/>
+          </a:xfrm>
+          <a:prstGeom prst="rect">
+            <a:avLst/>
+          </a:prstGeom>
+          <a:solidFill>
+            <a:srgbClr val="1B3A57"/>
           </a:solidFill>
           <a:ln>
             <a:noFill/>
@@ -10421,14 +12119,14 @@
         </p:nvSpPr>
         <p:spPr>
           <a:xfrm>
-            <a:off x="320040" y="0"/>
-            <a:ext cx="73152" cy="6858000"/>
-          </a:xfrm>
-          <a:prstGeom prst="rect">
-            <a:avLst/>
-          </a:prstGeom>
-          <a:solidFill>
-            <a:srgbClr val="C9A227"/>
+            <a:off x="292608" y="0"/>
+            <a:ext cx="64008" cy="6858000"/>
+          </a:xfrm>
+          <a:prstGeom prst="rect">
+            <a:avLst/>
+          </a:prstGeom>
+          <a:solidFill>
+            <a:srgbClr val="E07A18"/>
           </a:solidFill>
           <a:ln>
             <a:noFill/>
@@ -10464,7 +12162,7 @@
         </p:nvSpPr>
         <p:spPr>
           <a:xfrm>
-            <a:off x="640080" y="320040"/>
+            <a:off x="594360" y="292608"/>
             <a:ext cx="11155680" cy="822960"/>
           </a:xfrm>
           <a:prstGeom prst="rect">
@@ -10481,7 +12179,7 @@
             <a:r>
               <a:rPr sz="3400" b="1">
                 <a:solidFill>
-                  <a:srgbClr val="0B3D2E"/>
+                  <a:srgbClr val="1B3A57"/>
                 </a:solidFill>
                 <a:latin typeface="Calibri"/>
               </a:rPr>
@@ -10498,14 +12196,14 @@
         </p:nvSpPr>
         <p:spPr>
           <a:xfrm>
-            <a:off x="640080" y="1078992"/>
-            <a:ext cx="1097280" cy="64008"/>
-          </a:xfrm>
-          <a:prstGeom prst="rect">
-            <a:avLst/>
-          </a:prstGeom>
-          <a:solidFill>
-            <a:srgbClr val="C9A227"/>
+            <a:off x="594360" y="1078992"/>
+            <a:ext cx="1280160" cy="64008"/>
+          </a:xfrm>
+          <a:prstGeom prst="rect">
+            <a:avLst/>
+          </a:prstGeom>
+          <a:solidFill>
+            <a:srgbClr val="E07A18"/>
           </a:solidFill>
           <a:ln>
             <a:noFill/>
@@ -10542,7 +12240,7 @@
         <p:spPr>
           <a:xfrm>
             <a:off x="777240" y="1691640"/>
-            <a:ext cx="10607040" cy="1554480"/>
+            <a:ext cx="10607040" cy="1645920"/>
           </a:xfrm>
           <a:prstGeom prst="roundRect">
             <a:avLst/>
@@ -10552,7 +12250,7 @@
           </a:solidFill>
           <a:ln w="25400">
             <a:solidFill>
-              <a:srgbClr val="C9A227"/>
+              <a:srgbClr val="E07A18"/>
             </a:solidFill>
           </a:ln>
         </p:spPr>
@@ -10578,7 +12276,7 @@
             <a:r>
               <a:rPr sz="1700" i="1">
                 <a:solidFill>
-                  <a:srgbClr val="1F2A24"/>
+                  <a:srgbClr val="1F2533"/>
                 </a:solidFill>
                 <a:latin typeface="Calibri"/>
               </a:rPr>
@@ -10595,7 +12293,7 @@
         </p:nvSpPr>
         <p:spPr>
           <a:xfrm>
-            <a:off x="777240" y="3474720"/>
+            <a:off x="777240" y="3611880"/>
             <a:ext cx="10972800" cy="4572000"/>
           </a:xfrm>
           <a:prstGeom prst="rect">
@@ -10615,9 +12313,9 @@
               </a:spcAft>
             </a:pPr>
             <a:r>
-              <a:rPr sz="1700" b="0">
-                <a:solidFill>
-                  <a:srgbClr val="1F2A24"/>
+              <a:rPr sz="1700">
+                <a:solidFill>
+                  <a:srgbClr val="1F2533"/>
                 </a:solidFill>
                 <a:latin typeface="Calibri"/>
               </a:rPr>
@@ -10631,9 +12329,9 @@
               </a:spcAft>
             </a:pPr>
             <a:r>
-              <a:rPr sz="1700" b="0">
-                <a:solidFill>
-                  <a:srgbClr val="1F2A24"/>
+              <a:rPr sz="1700">
+                <a:solidFill>
+                  <a:srgbClr val="1F2533"/>
                 </a:solidFill>
                 <a:latin typeface="Calibri"/>
               </a:rPr>
@@ -10647,9 +12345,9 @@
               </a:spcAft>
             </a:pPr>
             <a:r>
-              <a:rPr sz="1700" b="0">
-                <a:solidFill>
-                  <a:srgbClr val="1F2A24"/>
+              <a:rPr sz="1700">
+                <a:solidFill>
+                  <a:srgbClr val="1F2533"/>
                 </a:solidFill>
                 <a:latin typeface="Calibri"/>
               </a:rPr>
@@ -10663,13 +12361,13 @@
               </a:spcAft>
             </a:pPr>
             <a:r>
-              <a:rPr sz="1700" b="0">
-                <a:solidFill>
-                  <a:srgbClr val="1F2A24"/>
-                </a:solidFill>
-                <a:latin typeface="Calibri"/>
-              </a:rPr>
-              <a:t>•  Differentiate from: Anoestrus, sub-oestrus, true infertility and sterility.</a:t>
+              <a:rPr sz="1700">
+                <a:solidFill>
+                  <a:srgbClr val="1F2533"/>
+                </a:solidFill>
+                <a:latin typeface="Calibri"/>
+              </a:rPr>
+              <a:t>•  Differentiate from anoestrus, sub-oestrus, true infertility and sterility.</a:t>
             </a:r>
           </a:p>
         </p:txBody>
@@ -10700,7 +12398,7 @@
             <a:r>
               <a:rPr sz="1000">
                 <a:solidFill>
-                  <a:srgbClr val="555555"/>
+                  <a:srgbClr val="555C66"/>
                 </a:solidFill>
                 <a:latin typeface="Calibri"/>
               </a:rPr>
@@ -10735,11 +12433,11 @@
             <a:r>
               <a:rPr sz="1000">
                 <a:solidFill>
-                  <a:srgbClr val="555555"/>
-                </a:solidFill>
-                <a:latin typeface="Calibri"/>
-              </a:rPr>
-              <a:t>4 / 18</a:t>
+                  <a:srgbClr val="555C66"/>
+                </a:solidFill>
+                <a:latin typeface="Calibri"/>
+              </a:rPr>
+              <a:t>4 / 19</a:t>
             </a:r>
           </a:p>
         </p:txBody>
@@ -10777,7 +12475,7 @@
             <a:avLst/>
           </a:prstGeom>
           <a:solidFill>
-            <a:srgbClr val="F5F1E8"/>
+            <a:srgbClr val="F7F3EB"/>
           </a:solidFill>
           <a:ln>
             <a:noFill/>
@@ -10814,13 +12512,13 @@
         <p:spPr>
           <a:xfrm>
             <a:off x="0" y="0"/>
-            <a:ext cx="320040" cy="6858000"/>
-          </a:xfrm>
-          <a:prstGeom prst="rect">
-            <a:avLst/>
-          </a:prstGeom>
-          <a:solidFill>
-            <a:srgbClr val="0B3D2E"/>
+            <a:ext cx="292608" cy="6858000"/>
+          </a:xfrm>
+          <a:prstGeom prst="rect">
+            <a:avLst/>
+          </a:prstGeom>
+          <a:solidFill>
+            <a:srgbClr val="1B3A57"/>
           </a:solidFill>
           <a:ln>
             <a:noFill/>
@@ -10856,14 +12554,14 @@
         </p:nvSpPr>
         <p:spPr>
           <a:xfrm>
-            <a:off x="320040" y="0"/>
-            <a:ext cx="73152" cy="6858000"/>
-          </a:xfrm>
-          <a:prstGeom prst="rect">
-            <a:avLst/>
-          </a:prstGeom>
-          <a:solidFill>
-            <a:srgbClr val="C9A227"/>
+            <a:off x="292608" y="0"/>
+            <a:ext cx="64008" cy="6858000"/>
+          </a:xfrm>
+          <a:prstGeom prst="rect">
+            <a:avLst/>
+          </a:prstGeom>
+          <a:solidFill>
+            <a:srgbClr val="E07A18"/>
           </a:solidFill>
           <a:ln>
             <a:noFill/>
@@ -10899,7 +12597,7 @@
         </p:nvSpPr>
         <p:spPr>
           <a:xfrm>
-            <a:off x="640080" y="320040"/>
+            <a:off x="594360" y="292608"/>
             <a:ext cx="11155680" cy="822960"/>
           </a:xfrm>
           <a:prstGeom prst="rect">
@@ -10916,7 +12614,7 @@
             <a:r>
               <a:rPr sz="3400" b="1">
                 <a:solidFill>
-                  <a:srgbClr val="0B3D2E"/>
+                  <a:srgbClr val="1B3A57"/>
                 </a:solidFill>
                 <a:latin typeface="Calibri"/>
               </a:rPr>
@@ -10933,14 +12631,14 @@
         </p:nvSpPr>
         <p:spPr>
           <a:xfrm>
-            <a:off x="640080" y="1078992"/>
-            <a:ext cx="1097280" cy="64008"/>
-          </a:xfrm>
-          <a:prstGeom prst="rect">
-            <a:avLst/>
-          </a:prstGeom>
-          <a:solidFill>
-            <a:srgbClr val="C9A227"/>
+            <a:off x="594360" y="1078992"/>
+            <a:ext cx="1280160" cy="64008"/>
+          </a:xfrm>
+          <a:prstGeom prst="rect">
+            <a:avLst/>
+          </a:prstGeom>
+          <a:solidFill>
+            <a:srgbClr val="E07A18"/>
           </a:solidFill>
           <a:ln>
             <a:noFill/>
@@ -10996,9 +12694,9 @@
               </a:spcAft>
             </a:pPr>
             <a:r>
-              <a:rPr sz="1700" b="0">
-                <a:solidFill>
-                  <a:srgbClr val="1F2A24"/>
+              <a:rPr sz="1700">
+                <a:solidFill>
+                  <a:srgbClr val="1F2533"/>
                 </a:solidFill>
                 <a:latin typeface="Calibri"/>
               </a:rPr>
@@ -11012,9 +12710,9 @@
               </a:spcAft>
             </a:pPr>
             <a:r>
-              <a:rPr sz="1700" b="0">
-                <a:solidFill>
-                  <a:srgbClr val="1F2A24"/>
+              <a:rPr sz="1700">
+                <a:solidFill>
+                  <a:srgbClr val="1F2533"/>
                 </a:solidFill>
                 <a:latin typeface="Calibri"/>
               </a:rPr>
@@ -11028,9 +12726,9 @@
               </a:spcAft>
             </a:pPr>
             <a:r>
-              <a:rPr sz="1700" b="0">
-                <a:solidFill>
-                  <a:srgbClr val="1F2A24"/>
+              <a:rPr sz="1700">
+                <a:solidFill>
+                  <a:srgbClr val="1F2533"/>
                 </a:solidFill>
                 <a:latin typeface="Calibri"/>
               </a:rPr>
@@ -11054,7 +12752,7 @@
             <a:avLst/>
           </a:prstGeom>
           <a:solidFill>
-            <a:srgbClr val="0B3D2E"/>
+            <a:srgbClr val="1B3A57"/>
           </a:solidFill>
           <a:ln>
             <a:noFill/>
@@ -11110,7 +12808,7 @@
           </a:solidFill>
           <a:ln w="9525">
             <a:solidFill>
-              <a:srgbClr val="0B3D2E"/>
+              <a:srgbClr val="1B3A57"/>
             </a:solidFill>
           </a:ln>
         </p:spPr>
@@ -11140,7 +12838,7 @@
             <a:r>
               <a:rPr sz="1200">
                 <a:solidFill>
-                  <a:srgbClr val="1F2A24"/>
+                  <a:srgbClr val="1F2533"/>
                 </a:solidFill>
                 <a:latin typeface="Calibri"/>
               </a:rPr>
@@ -11156,7 +12854,7 @@
             <a:r>
               <a:rPr sz="1200">
                 <a:solidFill>
-                  <a:srgbClr val="1F2A24"/>
+                  <a:srgbClr val="1F2533"/>
                 </a:solidFill>
                 <a:latin typeface="Calibri"/>
               </a:rPr>
@@ -11172,7 +12870,7 @@
             <a:r>
               <a:rPr sz="1200">
                 <a:solidFill>
-                  <a:srgbClr val="1F2A24"/>
+                  <a:srgbClr val="1F2533"/>
                 </a:solidFill>
                 <a:latin typeface="Calibri"/>
               </a:rPr>
@@ -11188,7 +12886,7 @@
             <a:r>
               <a:rPr sz="1200">
                 <a:solidFill>
-                  <a:srgbClr val="1F2A24"/>
+                  <a:srgbClr val="1F2533"/>
                 </a:solidFill>
                 <a:latin typeface="Calibri"/>
               </a:rPr>
@@ -11212,7 +12910,7 @@
             <a:avLst/>
           </a:prstGeom>
           <a:solidFill>
-            <a:srgbClr val="C9A227"/>
+            <a:srgbClr val="E07A18"/>
           </a:solidFill>
           <a:ln>
             <a:noFill/>
@@ -11268,7 +12966,7 @@
           </a:solidFill>
           <a:ln w="9525">
             <a:solidFill>
-              <a:srgbClr val="C9A227"/>
+              <a:srgbClr val="E07A18"/>
             </a:solidFill>
           </a:ln>
         </p:spPr>
@@ -11298,7 +12996,7 @@
             <a:r>
               <a:rPr sz="1200">
                 <a:solidFill>
-                  <a:srgbClr val="1F2A24"/>
+                  <a:srgbClr val="1F2533"/>
                 </a:solidFill>
                 <a:latin typeface="Calibri"/>
               </a:rPr>
@@ -11314,7 +13012,7 @@
             <a:r>
               <a:rPr sz="1200">
                 <a:solidFill>
-                  <a:srgbClr val="1F2A24"/>
+                  <a:srgbClr val="1F2533"/>
                 </a:solidFill>
                 <a:latin typeface="Calibri"/>
               </a:rPr>
@@ -11330,7 +13028,7 @@
             <a:r>
               <a:rPr sz="1200">
                 <a:solidFill>
-                  <a:srgbClr val="1F2A24"/>
+                  <a:srgbClr val="1F2533"/>
                 </a:solidFill>
                 <a:latin typeface="Calibri"/>
               </a:rPr>
@@ -11346,7 +13044,7 @@
             <a:r>
               <a:rPr sz="1200">
                 <a:solidFill>
-                  <a:srgbClr val="1F2A24"/>
+                  <a:srgbClr val="1F2533"/>
                 </a:solidFill>
                 <a:latin typeface="Calibri"/>
               </a:rPr>
@@ -11370,7 +13068,7 @@
             <a:avLst/>
           </a:prstGeom>
           <a:solidFill>
-            <a:srgbClr val="0B3D2E"/>
+            <a:srgbClr val="2E86AB"/>
           </a:solidFill>
           <a:ln>
             <a:noFill/>
@@ -11426,7 +13124,7 @@
           </a:solidFill>
           <a:ln w="9525">
             <a:solidFill>
-              <a:srgbClr val="0B3D2E"/>
+              <a:srgbClr val="2E86AB"/>
             </a:solidFill>
           </a:ln>
         </p:spPr>
@@ -11456,7 +13154,7 @@
             <a:r>
               <a:rPr sz="1200">
                 <a:solidFill>
-                  <a:srgbClr val="1F2A24"/>
+                  <a:srgbClr val="1F2533"/>
                 </a:solidFill>
                 <a:latin typeface="Calibri"/>
               </a:rPr>
@@ -11472,7 +13170,7 @@
             <a:r>
               <a:rPr sz="1200">
                 <a:solidFill>
-                  <a:srgbClr val="1F2A24"/>
+                  <a:srgbClr val="1F2533"/>
                 </a:solidFill>
                 <a:latin typeface="Calibri"/>
               </a:rPr>
@@ -11488,7 +13186,7 @@
             <a:r>
               <a:rPr sz="1200">
                 <a:solidFill>
-                  <a:srgbClr val="1F2A24"/>
+                  <a:srgbClr val="1F2533"/>
                 </a:solidFill>
                 <a:latin typeface="Calibri"/>
               </a:rPr>
@@ -11523,7 +13221,7 @@
             <a:r>
               <a:rPr sz="1000">
                 <a:solidFill>
-                  <a:srgbClr val="555555"/>
+                  <a:srgbClr val="555C66"/>
                 </a:solidFill>
                 <a:latin typeface="Calibri"/>
               </a:rPr>
@@ -11558,11 +13256,11 @@
             <a:r>
               <a:rPr sz="1000">
                 <a:solidFill>
-                  <a:srgbClr val="555555"/>
-                </a:solidFill>
-                <a:latin typeface="Calibri"/>
-              </a:rPr>
-              <a:t>5 / 18</a:t>
+                  <a:srgbClr val="555C66"/>
+                </a:solidFill>
+                <a:latin typeface="Calibri"/>
+              </a:rPr>
+              <a:t>5 / 19</a:t>
             </a:r>
           </a:p>
         </p:txBody>
@@ -11600,7 +13298,7 @@
             <a:avLst/>
           </a:prstGeom>
           <a:solidFill>
-            <a:srgbClr val="F5F1E8"/>
+            <a:srgbClr val="F7F3EB"/>
           </a:solidFill>
           <a:ln>
             <a:noFill/>
@@ -11637,13 +13335,13 @@
         <p:spPr>
           <a:xfrm>
             <a:off x="0" y="0"/>
-            <a:ext cx="320040" cy="6858000"/>
-          </a:xfrm>
-          <a:prstGeom prst="rect">
-            <a:avLst/>
-          </a:prstGeom>
-          <a:solidFill>
-            <a:srgbClr val="0B3D2E"/>
+            <a:ext cx="292608" cy="6858000"/>
+          </a:xfrm>
+          <a:prstGeom prst="rect">
+            <a:avLst/>
+          </a:prstGeom>
+          <a:solidFill>
+            <a:srgbClr val="1B3A57"/>
           </a:solidFill>
           <a:ln>
             <a:noFill/>
@@ -11679,14 +13377,14 @@
         </p:nvSpPr>
         <p:spPr>
           <a:xfrm>
-            <a:off x="320040" y="0"/>
-            <a:ext cx="73152" cy="6858000"/>
-          </a:xfrm>
-          <a:prstGeom prst="rect">
-            <a:avLst/>
-          </a:prstGeom>
-          <a:solidFill>
-            <a:srgbClr val="C9A227"/>
+            <a:off x="292608" y="0"/>
+            <a:ext cx="64008" cy="6858000"/>
+          </a:xfrm>
+          <a:prstGeom prst="rect">
+            <a:avLst/>
+          </a:prstGeom>
+          <a:solidFill>
+            <a:srgbClr val="E07A18"/>
           </a:solidFill>
           <a:ln>
             <a:noFill/>
@@ -11722,7 +13420,7 @@
         </p:nvSpPr>
         <p:spPr>
           <a:xfrm>
-            <a:off x="640080" y="320040"/>
+            <a:off x="594360" y="292608"/>
             <a:ext cx="11155680" cy="822960"/>
           </a:xfrm>
           <a:prstGeom prst="rect">
@@ -11739,7 +13437,7 @@
             <a:r>
               <a:rPr sz="3400" b="1">
                 <a:solidFill>
-                  <a:srgbClr val="0B3D2E"/>
+                  <a:srgbClr val="1B3A57"/>
                 </a:solidFill>
                 <a:latin typeface="Calibri"/>
               </a:rPr>
@@ -11756,14 +13454,14 @@
         </p:nvSpPr>
         <p:spPr>
           <a:xfrm>
-            <a:off x="640080" y="1078992"/>
-            <a:ext cx="1097280" cy="64008"/>
-          </a:xfrm>
-          <a:prstGeom prst="rect">
-            <a:avLst/>
-          </a:prstGeom>
-          <a:solidFill>
-            <a:srgbClr val="C9A227"/>
+            <a:off x="594360" y="1078992"/>
+            <a:ext cx="1280160" cy="64008"/>
+          </a:xfrm>
+          <a:prstGeom prst="rect">
+            <a:avLst/>
+          </a:prstGeom>
+          <a:solidFill>
+            <a:srgbClr val="E07A18"/>
           </a:solidFill>
           <a:ln>
             <a:noFill/>
@@ -11799,7 +13497,7 @@
         </p:nvSpPr>
         <p:spPr>
           <a:xfrm>
-            <a:off x="640080" y="1170432"/>
+            <a:off x="594360" y="1170432"/>
             <a:ext cx="11155680" cy="365760"/>
           </a:xfrm>
           <a:prstGeom prst="rect">
@@ -11816,7 +13514,7 @@
             <a:r>
               <a:rPr sz="1400" i="1">
                 <a:solidFill>
-                  <a:srgbClr val="555555"/>
+                  <a:srgbClr val="555C66"/>
                 </a:solidFill>
                 <a:latin typeface="Calibri"/>
               </a:rPr>
@@ -11840,7 +13538,7 @@
             <a:avLst/>
           </a:prstGeom>
           <a:solidFill>
-            <a:srgbClr val="0B3D2E"/>
+            <a:srgbClr val="1B3A57"/>
           </a:solidFill>
           <a:ln>
             <a:noFill/>
@@ -11896,7 +13594,7 @@
           </a:solidFill>
           <a:ln w="9525">
             <a:solidFill>
-              <a:srgbClr val="0B3D2E"/>
+              <a:srgbClr val="1B3A57"/>
             </a:solidFill>
           </a:ln>
         </p:spPr>
@@ -11926,7 +13624,7 @@
             <a:r>
               <a:rPr sz="1200">
                 <a:solidFill>
-                  <a:srgbClr val="1F2A24"/>
+                  <a:srgbClr val="1F2533"/>
                 </a:solidFill>
                 <a:latin typeface="Calibri"/>
               </a:rPr>
@@ -11942,7 +13640,7 @@
             <a:r>
               <a:rPr sz="1200">
                 <a:solidFill>
-                  <a:srgbClr val="1F2A24"/>
+                  <a:srgbClr val="1F2533"/>
                 </a:solidFill>
                 <a:latin typeface="Calibri"/>
               </a:rPr>
@@ -11958,7 +13656,7 @@
             <a:r>
               <a:rPr sz="1200">
                 <a:solidFill>
-                  <a:srgbClr val="1F2A24"/>
+                  <a:srgbClr val="1F2533"/>
                 </a:solidFill>
                 <a:latin typeface="Calibri"/>
               </a:rPr>
@@ -11974,7 +13672,7 @@
             <a:r>
               <a:rPr sz="1200">
                 <a:solidFill>
-                  <a:srgbClr val="1F2A24"/>
+                  <a:srgbClr val="1F2533"/>
                 </a:solidFill>
                 <a:latin typeface="Calibri"/>
               </a:rPr>
@@ -11990,7 +13688,7 @@
             <a:r>
               <a:rPr sz="1200">
                 <a:solidFill>
-                  <a:srgbClr val="1F2A24"/>
+                  <a:srgbClr val="1F2533"/>
                 </a:solidFill>
                 <a:latin typeface="Calibri"/>
               </a:rPr>
@@ -12014,7 +13712,7 @@
             <a:avLst/>
           </a:prstGeom>
           <a:solidFill>
-            <a:srgbClr val="C9A227"/>
+            <a:srgbClr val="E07A18"/>
           </a:solidFill>
           <a:ln>
             <a:noFill/>
@@ -12070,7 +13768,7 @@
           </a:solidFill>
           <a:ln w="9525">
             <a:solidFill>
-              <a:srgbClr val="C9A227"/>
+              <a:srgbClr val="E07A18"/>
             </a:solidFill>
           </a:ln>
         </p:spPr>
@@ -12100,7 +13798,7 @@
             <a:r>
               <a:rPr sz="1200">
                 <a:solidFill>
-                  <a:srgbClr val="1F2A24"/>
+                  <a:srgbClr val="1F2533"/>
                 </a:solidFill>
                 <a:latin typeface="Calibri"/>
               </a:rPr>
@@ -12116,7 +13814,7 @@
             <a:r>
               <a:rPr sz="1200">
                 <a:solidFill>
-                  <a:srgbClr val="1F2A24"/>
+                  <a:srgbClr val="1F2533"/>
                 </a:solidFill>
                 <a:latin typeface="Calibri"/>
               </a:rPr>
@@ -12132,7 +13830,7 @@
             <a:r>
               <a:rPr sz="1200">
                 <a:solidFill>
-                  <a:srgbClr val="1F2A24"/>
+                  <a:srgbClr val="1F2533"/>
                 </a:solidFill>
                 <a:latin typeface="Calibri"/>
               </a:rPr>
@@ -12148,7 +13846,7 @@
             <a:r>
               <a:rPr sz="1200">
                 <a:solidFill>
-                  <a:srgbClr val="1F2A24"/>
+                  <a:srgbClr val="1F2533"/>
                 </a:solidFill>
                 <a:latin typeface="Calibri"/>
               </a:rPr>
@@ -12164,7 +13862,7 @@
             <a:r>
               <a:rPr sz="1200">
                 <a:solidFill>
-                  <a:srgbClr val="1F2A24"/>
+                  <a:srgbClr val="1F2533"/>
                 </a:solidFill>
                 <a:latin typeface="Calibri"/>
               </a:rPr>
@@ -12188,7 +13886,7 @@
             <a:avLst/>
           </a:prstGeom>
           <a:solidFill>
-            <a:srgbClr val="0B3D2E"/>
+            <a:srgbClr val="2E86AB"/>
           </a:solidFill>
           <a:ln>
             <a:noFill/>
@@ -12244,7 +13942,7 @@
           </a:solidFill>
           <a:ln w="9525">
             <a:solidFill>
-              <a:srgbClr val="0B3D2E"/>
+              <a:srgbClr val="2E86AB"/>
             </a:solidFill>
           </a:ln>
         </p:spPr>
@@ -12274,7 +13972,7 @@
             <a:r>
               <a:rPr sz="1200">
                 <a:solidFill>
-                  <a:srgbClr val="1F2A24"/>
+                  <a:srgbClr val="1F2533"/>
                 </a:solidFill>
                 <a:latin typeface="Calibri"/>
               </a:rPr>
@@ -12290,7 +13988,7 @@
             <a:r>
               <a:rPr sz="1200">
                 <a:solidFill>
-                  <a:srgbClr val="1F2A24"/>
+                  <a:srgbClr val="1F2533"/>
                 </a:solidFill>
                 <a:latin typeface="Calibri"/>
               </a:rPr>
@@ -12306,7 +14004,7 @@
             <a:r>
               <a:rPr sz="1200">
                 <a:solidFill>
-                  <a:srgbClr val="1F2A24"/>
+                  <a:srgbClr val="1F2533"/>
                 </a:solidFill>
                 <a:latin typeface="Calibri"/>
               </a:rPr>
@@ -12322,7 +14020,7 @@
             <a:r>
               <a:rPr sz="1200">
                 <a:solidFill>
-                  <a:srgbClr val="1F2A24"/>
+                  <a:srgbClr val="1F2533"/>
                 </a:solidFill>
                 <a:latin typeface="Calibri"/>
               </a:rPr>
@@ -12338,7 +14036,7 @@
             <a:r>
               <a:rPr sz="1200">
                 <a:solidFill>
-                  <a:srgbClr val="1F2A24"/>
+                  <a:srgbClr val="1F2533"/>
                 </a:solidFill>
                 <a:latin typeface="Calibri"/>
               </a:rPr>
@@ -12362,7 +14060,7 @@
             <a:avLst/>
           </a:prstGeom>
           <a:solidFill>
-            <a:srgbClr val="C9A227"/>
+            <a:srgbClr val="1B3A57"/>
           </a:solidFill>
           <a:ln>
             <a:noFill/>
@@ -12418,7 +14116,7 @@
           </a:solidFill>
           <a:ln w="9525">
             <a:solidFill>
-              <a:srgbClr val="C9A227"/>
+              <a:srgbClr val="1B3A57"/>
             </a:solidFill>
           </a:ln>
         </p:spPr>
@@ -12448,7 +14146,7 @@
             <a:r>
               <a:rPr sz="1200">
                 <a:solidFill>
-                  <a:srgbClr val="1F2A24"/>
+                  <a:srgbClr val="1F2533"/>
                 </a:solidFill>
                 <a:latin typeface="Calibri"/>
               </a:rPr>
@@ -12464,7 +14162,7 @@
             <a:r>
               <a:rPr sz="1200">
                 <a:solidFill>
-                  <a:srgbClr val="1F2A24"/>
+                  <a:srgbClr val="1F2533"/>
                 </a:solidFill>
                 <a:latin typeface="Calibri"/>
               </a:rPr>
@@ -12480,7 +14178,7 @@
             <a:r>
               <a:rPr sz="1200">
                 <a:solidFill>
-                  <a:srgbClr val="1F2A24"/>
+                  <a:srgbClr val="1F2533"/>
                 </a:solidFill>
                 <a:latin typeface="Calibri"/>
               </a:rPr>
@@ -12496,7 +14194,7 @@
             <a:r>
               <a:rPr sz="1200">
                 <a:solidFill>
-                  <a:srgbClr val="1F2A24"/>
+                  <a:srgbClr val="1F2533"/>
                 </a:solidFill>
                 <a:latin typeface="Calibri"/>
               </a:rPr>
@@ -12512,7 +14210,7 @@
             <a:r>
               <a:rPr sz="1200">
                 <a:solidFill>
-                  <a:srgbClr val="1F2A24"/>
+                  <a:srgbClr val="1F2533"/>
                 </a:solidFill>
                 <a:latin typeface="Calibri"/>
               </a:rPr>
@@ -12547,7 +14245,7 @@
             <a:r>
               <a:rPr sz="1000">
                 <a:solidFill>
-                  <a:srgbClr val="555555"/>
+                  <a:srgbClr val="555C66"/>
                 </a:solidFill>
                 <a:latin typeface="Calibri"/>
               </a:rPr>
@@ -12582,11 +14280,11 @@
             <a:r>
               <a:rPr sz="1000">
                 <a:solidFill>
-                  <a:srgbClr val="555555"/>
-                </a:solidFill>
-                <a:latin typeface="Calibri"/>
-              </a:rPr>
-              <a:t>6 / 18</a:t>
+                  <a:srgbClr val="555C66"/>
+                </a:solidFill>
+                <a:latin typeface="Calibri"/>
+              </a:rPr>
+              <a:t>6 / 19</a:t>
             </a:r>
           </a:p>
         </p:txBody>
@@ -12624,7 +14322,7 @@
             <a:avLst/>
           </a:prstGeom>
           <a:solidFill>
-            <a:srgbClr val="F5F1E8"/>
+            <a:srgbClr val="F7F3EB"/>
           </a:solidFill>
           <a:ln>
             <a:noFill/>
@@ -12661,13 +14359,13 @@
         <p:spPr>
           <a:xfrm>
             <a:off x="0" y="0"/>
-            <a:ext cx="320040" cy="6858000"/>
-          </a:xfrm>
-          <a:prstGeom prst="rect">
-            <a:avLst/>
-          </a:prstGeom>
-          <a:solidFill>
-            <a:srgbClr val="0B3D2E"/>
+            <a:ext cx="292608" cy="6858000"/>
+          </a:xfrm>
+          <a:prstGeom prst="rect">
+            <a:avLst/>
+          </a:prstGeom>
+          <a:solidFill>
+            <a:srgbClr val="1B3A57"/>
           </a:solidFill>
           <a:ln>
             <a:noFill/>
@@ -12703,14 +14401,14 @@
         </p:nvSpPr>
         <p:spPr>
           <a:xfrm>
-            <a:off x="320040" y="0"/>
-            <a:ext cx="73152" cy="6858000"/>
-          </a:xfrm>
-          <a:prstGeom prst="rect">
-            <a:avLst/>
-          </a:prstGeom>
-          <a:solidFill>
-            <a:srgbClr val="C9A227"/>
+            <a:off x="292608" y="0"/>
+            <a:ext cx="64008" cy="6858000"/>
+          </a:xfrm>
+          <a:prstGeom prst="rect">
+            <a:avLst/>
+          </a:prstGeom>
+          <a:solidFill>
+            <a:srgbClr val="E07A18"/>
           </a:solidFill>
           <a:ln>
             <a:noFill/>
@@ -12746,7 +14444,7 @@
         </p:nvSpPr>
         <p:spPr>
           <a:xfrm>
-            <a:off x="640080" y="320040"/>
+            <a:off x="594360" y="292608"/>
             <a:ext cx="11155680" cy="822960"/>
           </a:xfrm>
           <a:prstGeom prst="rect">
@@ -12763,7 +14461,7 @@
             <a:r>
               <a:rPr sz="3400" b="1">
                 <a:solidFill>
-                  <a:srgbClr val="0B3D2E"/>
+                  <a:srgbClr val="1B3A57"/>
                 </a:solidFill>
                 <a:latin typeface="Calibri"/>
               </a:rPr>
@@ -12780,14 +14478,14 @@
         </p:nvSpPr>
         <p:spPr>
           <a:xfrm>
-            <a:off x="640080" y="1078992"/>
-            <a:ext cx="1097280" cy="64008"/>
-          </a:xfrm>
-          <a:prstGeom prst="rect">
-            <a:avLst/>
-          </a:prstGeom>
-          <a:solidFill>
-            <a:srgbClr val="C9A227"/>
+            <a:off x="594360" y="1078992"/>
+            <a:ext cx="1280160" cy="64008"/>
+          </a:xfrm>
+          <a:prstGeom prst="rect">
+            <a:avLst/>
+          </a:prstGeom>
+          <a:solidFill>
+            <a:srgbClr val="E07A18"/>
           </a:solidFill>
           <a:ln>
             <a:noFill/>
@@ -12823,7 +14521,7 @@
         </p:nvSpPr>
         <p:spPr>
           <a:xfrm>
-            <a:off x="777240" y="1645920"/>
+            <a:off x="777240" y="1691640"/>
             <a:ext cx="10972800" cy="4572000"/>
           </a:xfrm>
           <a:prstGeom prst="rect">
@@ -12843,9 +14541,9 @@
               </a:spcAft>
             </a:pPr>
             <a:r>
-              <a:rPr sz="1700" b="0">
-                <a:solidFill>
-                  <a:srgbClr val="1F2A24"/>
+              <a:rPr sz="1700">
+                <a:solidFill>
+                  <a:srgbClr val="1F2533"/>
                 </a:solidFill>
                 <a:latin typeface="Calibri"/>
               </a:rPr>
@@ -12859,9 +14557,9 @@
               </a:spcAft>
             </a:pPr>
             <a:r>
-              <a:rPr sz="1700" b="0">
-                <a:solidFill>
-                  <a:srgbClr val="1F2A24"/>
+              <a:rPr sz="1700">
+                <a:solidFill>
+                  <a:srgbClr val="1F2533"/>
                 </a:solidFill>
                 <a:latin typeface="Calibri"/>
               </a:rPr>
@@ -12877,7 +14575,7 @@
             <a:r>
               <a:rPr sz="1500">
                 <a:solidFill>
-                  <a:srgbClr val="1F2A24"/>
+                  <a:srgbClr val="1F2533"/>
                 </a:solidFill>
                 <a:latin typeface="Calibri"/>
               </a:rPr>
@@ -12893,7 +14591,7 @@
             <a:r>
               <a:rPr sz="1500">
                 <a:solidFill>
-                  <a:srgbClr val="1F2A24"/>
+                  <a:srgbClr val="1F2533"/>
                 </a:solidFill>
                 <a:latin typeface="Calibri"/>
               </a:rPr>
@@ -12909,7 +14607,7 @@
             <a:r>
               <a:rPr sz="1500">
                 <a:solidFill>
-                  <a:srgbClr val="1F2A24"/>
+                  <a:srgbClr val="1F2533"/>
                 </a:solidFill>
                 <a:latin typeface="Calibri"/>
               </a:rPr>
@@ -12925,7 +14623,7 @@
             <a:r>
               <a:rPr sz="1500">
                 <a:solidFill>
-                  <a:srgbClr val="1F2A24"/>
+                  <a:srgbClr val="1F2533"/>
                 </a:solidFill>
                 <a:latin typeface="Calibri"/>
               </a:rPr>
@@ -12941,7 +14639,7 @@
             <a:r>
               <a:rPr sz="1500">
                 <a:solidFill>
-                  <a:srgbClr val="1F2A24"/>
+                  <a:srgbClr val="1F2533"/>
                 </a:solidFill>
                 <a:latin typeface="Calibri"/>
               </a:rPr>
@@ -12957,7 +14655,7 @@
             <a:r>
               <a:rPr sz="1500">
                 <a:solidFill>
-                  <a:srgbClr val="1F2A24"/>
+                  <a:srgbClr val="1F2533"/>
                 </a:solidFill>
                 <a:latin typeface="Calibri"/>
               </a:rPr>
@@ -12971,9 +14669,9 @@
               </a:spcAft>
             </a:pPr>
             <a:r>
-              <a:rPr sz="1700" b="0">
-                <a:solidFill>
-                  <a:srgbClr val="1F2A24"/>
+              <a:rPr sz="1700">
+                <a:solidFill>
+                  <a:srgbClr val="1F2533"/>
                 </a:solidFill>
                 <a:latin typeface="Calibri"/>
               </a:rPr>
@@ -12987,9 +14685,9 @@
               </a:spcAft>
             </a:pPr>
             <a:r>
-              <a:rPr sz="1700" b="0">
-                <a:solidFill>
-                  <a:srgbClr val="1F2A24"/>
+              <a:rPr sz="1700">
+                <a:solidFill>
+                  <a:srgbClr val="1F2533"/>
                 </a:solidFill>
                 <a:latin typeface="Calibri"/>
               </a:rPr>
@@ -13003,9 +14701,9 @@
               </a:spcAft>
             </a:pPr>
             <a:r>
-              <a:rPr sz="1700" b="0">
-                <a:solidFill>
-                  <a:srgbClr val="1F2A24"/>
+              <a:rPr sz="1700">
+                <a:solidFill>
+                  <a:srgbClr val="1F2533"/>
                 </a:solidFill>
                 <a:latin typeface="Calibri"/>
               </a:rPr>
@@ -13040,7 +14738,7 @@
             <a:r>
               <a:rPr sz="1000">
                 <a:solidFill>
-                  <a:srgbClr val="555555"/>
+                  <a:srgbClr val="555C66"/>
                 </a:solidFill>
                 <a:latin typeface="Calibri"/>
               </a:rPr>
@@ -13075,11 +14773,11 @@
             <a:r>
               <a:rPr sz="1000">
                 <a:solidFill>
-                  <a:srgbClr val="555555"/>
-                </a:solidFill>
-                <a:latin typeface="Calibri"/>
-              </a:rPr>
-              <a:t>7 / 18</a:t>
+                  <a:srgbClr val="555C66"/>
+                </a:solidFill>
+                <a:latin typeface="Calibri"/>
+              </a:rPr>
+              <a:t>7 / 19</a:t>
             </a:r>
           </a:p>
         </p:txBody>
@@ -13117,7 +14815,7 @@
             <a:avLst/>
           </a:prstGeom>
           <a:solidFill>
-            <a:srgbClr val="F5F1E8"/>
+            <a:srgbClr val="F7F3EB"/>
           </a:solidFill>
           <a:ln>
             <a:noFill/>
@@ -13154,13 +14852,13 @@
         <p:spPr>
           <a:xfrm>
             <a:off x="0" y="0"/>
-            <a:ext cx="320040" cy="6858000"/>
-          </a:xfrm>
-          <a:prstGeom prst="rect">
-            <a:avLst/>
-          </a:prstGeom>
-          <a:solidFill>
-            <a:srgbClr val="0B3D2E"/>
+            <a:ext cx="292608" cy="6858000"/>
+          </a:xfrm>
+          <a:prstGeom prst="rect">
+            <a:avLst/>
+          </a:prstGeom>
+          <a:solidFill>
+            <a:srgbClr val="1B3A57"/>
           </a:solidFill>
           <a:ln>
             <a:noFill/>
@@ -13196,14 +14894,14 @@
         </p:nvSpPr>
         <p:spPr>
           <a:xfrm>
-            <a:off x="320040" y="0"/>
-            <a:ext cx="73152" cy="6858000"/>
-          </a:xfrm>
-          <a:prstGeom prst="rect">
-            <a:avLst/>
-          </a:prstGeom>
-          <a:solidFill>
-            <a:srgbClr val="C9A227"/>
+            <a:off x="292608" y="0"/>
+            <a:ext cx="64008" cy="6858000"/>
+          </a:xfrm>
+          <a:prstGeom prst="rect">
+            <a:avLst/>
+          </a:prstGeom>
+          <a:solidFill>
+            <a:srgbClr val="E07A18"/>
           </a:solidFill>
           <a:ln>
             <a:noFill/>
@@ -13239,7 +14937,7 @@
         </p:nvSpPr>
         <p:spPr>
           <a:xfrm>
-            <a:off x="640080" y="320040"/>
+            <a:off x="594360" y="292608"/>
             <a:ext cx="11155680" cy="822960"/>
           </a:xfrm>
           <a:prstGeom prst="rect">
@@ -13256,7 +14954,7 @@
             <a:r>
               <a:rPr sz="3400" b="1">
                 <a:solidFill>
-                  <a:srgbClr val="0B3D2E"/>
+                  <a:srgbClr val="1B3A57"/>
                 </a:solidFill>
                 <a:latin typeface="Calibri"/>
               </a:rPr>
@@ -13273,14 +14971,14 @@
         </p:nvSpPr>
         <p:spPr>
           <a:xfrm>
-            <a:off x="640080" y="1078992"/>
-            <a:ext cx="1097280" cy="64008"/>
-          </a:xfrm>
-          <a:prstGeom prst="rect">
-            <a:avLst/>
-          </a:prstGeom>
-          <a:solidFill>
-            <a:srgbClr val="C9A227"/>
+            <a:off x="594360" y="1078992"/>
+            <a:ext cx="1280160" cy="64008"/>
+          </a:xfrm>
+          <a:prstGeom prst="rect">
+            <a:avLst/>
+          </a:prstGeom>
+          <a:solidFill>
+            <a:srgbClr val="E07A18"/>
           </a:solidFill>
           <a:ln>
             <a:noFill/>
@@ -13316,7 +15014,7 @@
         </p:nvSpPr>
         <p:spPr>
           <a:xfrm>
-            <a:off x="777240" y="1645920"/>
+            <a:off x="777240" y="1691640"/>
             <a:ext cx="10972800" cy="4572000"/>
           </a:xfrm>
           <a:prstGeom prst="rect">
@@ -13336,9 +15034,9 @@
               </a:spcAft>
             </a:pPr>
             <a:r>
-              <a:rPr sz="1700" b="0">
-                <a:solidFill>
-                  <a:srgbClr val="1F2A24"/>
+              <a:rPr sz="1700">
+                <a:solidFill>
+                  <a:srgbClr val="1F2533"/>
                 </a:solidFill>
                 <a:latin typeface="Calibri"/>
               </a:rPr>
@@ -13352,9 +15050,9 @@
               </a:spcAft>
             </a:pPr>
             <a:r>
-              <a:rPr sz="1700" b="0">
-                <a:solidFill>
-                  <a:srgbClr val="1F2A24"/>
+              <a:rPr sz="1700">
+                <a:solidFill>
+                  <a:srgbClr val="1F2533"/>
                 </a:solidFill>
                 <a:latin typeface="Calibri"/>
               </a:rPr>
@@ -13368,9 +15066,9 @@
               </a:spcAft>
             </a:pPr>
             <a:r>
-              <a:rPr sz="1700" b="0">
-                <a:solidFill>
-                  <a:srgbClr val="1F2A24"/>
+              <a:rPr sz="1700">
+                <a:solidFill>
+                  <a:srgbClr val="1F2533"/>
                 </a:solidFill>
                 <a:latin typeface="Calibri"/>
               </a:rPr>
@@ -13386,7 +15084,7 @@
             <a:r>
               <a:rPr sz="1500">
                 <a:solidFill>
-                  <a:srgbClr val="1F2A24"/>
+                  <a:srgbClr val="1F2533"/>
                 </a:solidFill>
                 <a:latin typeface="Calibri"/>
               </a:rPr>
@@ -13402,7 +15100,7 @@
             <a:r>
               <a:rPr sz="1500">
                 <a:solidFill>
-                  <a:srgbClr val="1F2A24"/>
+                  <a:srgbClr val="1F2533"/>
                 </a:solidFill>
                 <a:latin typeface="Calibri"/>
               </a:rPr>
@@ -13418,7 +15116,7 @@
             <a:r>
               <a:rPr sz="1500">
                 <a:solidFill>
-                  <a:srgbClr val="1F2A24"/>
+                  <a:srgbClr val="1F2533"/>
                 </a:solidFill>
                 <a:latin typeface="Calibri"/>
               </a:rPr>
@@ -13434,7 +15132,7 @@
             <a:r>
               <a:rPr sz="1500">
                 <a:solidFill>
-                  <a:srgbClr val="1F2A24"/>
+                  <a:srgbClr val="1F2533"/>
                 </a:solidFill>
                 <a:latin typeface="Calibri"/>
               </a:rPr>
@@ -13450,7 +15148,7 @@
             <a:r>
               <a:rPr sz="1500">
                 <a:solidFill>
-                  <a:srgbClr val="1F2A24"/>
+                  <a:srgbClr val="1F2533"/>
                 </a:solidFill>
                 <a:latin typeface="Calibri"/>
               </a:rPr>
@@ -13464,9 +15162,9 @@
               </a:spcAft>
             </a:pPr>
             <a:r>
-              <a:rPr sz="1700" b="0">
-                <a:solidFill>
-                  <a:srgbClr val="1F2A24"/>
+              <a:rPr sz="1700">
+                <a:solidFill>
+                  <a:srgbClr val="1F2533"/>
                 </a:solidFill>
                 <a:latin typeface="Calibri"/>
               </a:rPr>
@@ -13480,9 +15178,9 @@
               </a:spcAft>
             </a:pPr>
             <a:r>
-              <a:rPr sz="1700" b="0">
-                <a:solidFill>
-                  <a:srgbClr val="1F2A24"/>
+              <a:rPr sz="1700">
+                <a:solidFill>
+                  <a:srgbClr val="1F2533"/>
                 </a:solidFill>
                 <a:latin typeface="Calibri"/>
               </a:rPr>
@@ -13517,7 +15215,7 @@
             <a:r>
               <a:rPr sz="1000">
                 <a:solidFill>
-                  <a:srgbClr val="555555"/>
+                  <a:srgbClr val="555C66"/>
                 </a:solidFill>
                 <a:latin typeface="Calibri"/>
               </a:rPr>
@@ -13552,11 +15250,11 @@
             <a:r>
               <a:rPr sz="1000">
                 <a:solidFill>
-                  <a:srgbClr val="555555"/>
-                </a:solidFill>
-                <a:latin typeface="Calibri"/>
-              </a:rPr>
-              <a:t>8 / 18</a:t>
+                  <a:srgbClr val="555C66"/>
+                </a:solidFill>
+                <a:latin typeface="Calibri"/>
+              </a:rPr>
+              <a:t>8 / 19</a:t>
             </a:r>
           </a:p>
         </p:txBody>
@@ -13594,7 +15292,7 @@
             <a:avLst/>
           </a:prstGeom>
           <a:solidFill>
-            <a:srgbClr val="F5F1E8"/>
+            <a:srgbClr val="F7F3EB"/>
           </a:solidFill>
           <a:ln>
             <a:noFill/>
@@ -13631,13 +15329,13 @@
         <p:spPr>
           <a:xfrm>
             <a:off x="0" y="0"/>
-            <a:ext cx="320040" cy="6858000"/>
-          </a:xfrm>
-          <a:prstGeom prst="rect">
-            <a:avLst/>
-          </a:prstGeom>
-          <a:solidFill>
-            <a:srgbClr val="0B3D2E"/>
+            <a:ext cx="292608" cy="6858000"/>
+          </a:xfrm>
+          <a:prstGeom prst="rect">
+            <a:avLst/>
+          </a:prstGeom>
+          <a:solidFill>
+            <a:srgbClr val="1B3A57"/>
           </a:solidFill>
           <a:ln>
             <a:noFill/>
@@ -13673,14 +15371,14 @@
         </p:nvSpPr>
         <p:spPr>
           <a:xfrm>
-            <a:off x="320040" y="0"/>
-            <a:ext cx="73152" cy="6858000"/>
-          </a:xfrm>
-          <a:prstGeom prst="rect">
-            <a:avLst/>
-          </a:prstGeom>
-          <a:solidFill>
-            <a:srgbClr val="C9A227"/>
+            <a:off x="292608" y="0"/>
+            <a:ext cx="64008" cy="6858000"/>
+          </a:xfrm>
+          <a:prstGeom prst="rect">
+            <a:avLst/>
+          </a:prstGeom>
+          <a:solidFill>
+            <a:srgbClr val="E07A18"/>
           </a:solidFill>
           <a:ln>
             <a:noFill/>
@@ -13716,7 +15414,7 @@
         </p:nvSpPr>
         <p:spPr>
           <a:xfrm>
-            <a:off x="640080" y="320040"/>
+            <a:off x="594360" y="292608"/>
             <a:ext cx="11155680" cy="822960"/>
           </a:xfrm>
           <a:prstGeom prst="rect">
@@ -13733,7 +15431,7 @@
             <a:r>
               <a:rPr sz="3400" b="1">
                 <a:solidFill>
-                  <a:srgbClr val="0B3D2E"/>
+                  <a:srgbClr val="1B3A57"/>
                 </a:solidFill>
                 <a:latin typeface="Calibri"/>
               </a:rPr>
@@ -13750,14 +15448,14 @@
         </p:nvSpPr>
         <p:spPr>
           <a:xfrm>
-            <a:off x="640080" y="1078992"/>
-            <a:ext cx="1097280" cy="64008"/>
-          </a:xfrm>
-          <a:prstGeom prst="rect">
-            <a:avLst/>
-          </a:prstGeom>
-          <a:solidFill>
-            <a:srgbClr val="C9A227"/>
+            <a:off x="594360" y="1078992"/>
+            <a:ext cx="1280160" cy="64008"/>
+          </a:xfrm>
+          <a:prstGeom prst="rect">
+            <a:avLst/>
+          </a:prstGeom>
+          <a:solidFill>
+            <a:srgbClr val="E07A18"/>
           </a:solidFill>
           <a:ln>
             <a:noFill/>
@@ -13793,7 +15491,7 @@
         </p:nvSpPr>
         <p:spPr>
           <a:xfrm>
-            <a:off x="777240" y="1645920"/>
+            <a:off x="777240" y="1691640"/>
             <a:ext cx="10972800" cy="4572000"/>
           </a:xfrm>
           <a:prstGeom prst="rect">
@@ -13813,9 +15511,9 @@
               </a:spcAft>
             </a:pPr>
             <a:r>
-              <a:rPr sz="1800" b="0">
-                <a:solidFill>
-                  <a:srgbClr val="1F2A24"/>
+              <a:rPr sz="1800">
+                <a:solidFill>
+                  <a:srgbClr val="1F2533"/>
                 </a:solidFill>
                 <a:latin typeface="Calibri"/>
               </a:rPr>
@@ -13829,9 +15527,9 @@
               </a:spcAft>
             </a:pPr>
             <a:r>
-              <a:rPr sz="1800" b="0">
-                <a:solidFill>
-                  <a:srgbClr val="1F2A24"/>
+              <a:rPr sz="1800">
+                <a:solidFill>
+                  <a:srgbClr val="1F2533"/>
                 </a:solidFill>
                 <a:latin typeface="Calibri"/>
               </a:rPr>
@@ -13845,9 +15543,9 @@
               </a:spcAft>
             </a:pPr>
             <a:r>
-              <a:rPr sz="1800" b="0">
-                <a:solidFill>
-                  <a:srgbClr val="1F2A24"/>
+              <a:rPr sz="1800">
+                <a:solidFill>
+                  <a:srgbClr val="1F2533"/>
                 </a:solidFill>
                 <a:latin typeface="Calibri"/>
               </a:rPr>
@@ -13861,9 +15559,9 @@
               </a:spcAft>
             </a:pPr>
             <a:r>
-              <a:rPr sz="1800" b="0">
-                <a:solidFill>
-                  <a:srgbClr val="1F2A24"/>
+              <a:rPr sz="1800">
+                <a:solidFill>
+                  <a:srgbClr val="1F2533"/>
                 </a:solidFill>
                 <a:latin typeface="Calibri"/>
               </a:rPr>
@@ -13877,9 +15575,9 @@
               </a:spcAft>
             </a:pPr>
             <a:r>
-              <a:rPr sz="1800" b="0">
-                <a:solidFill>
-                  <a:srgbClr val="1F2A24"/>
+              <a:rPr sz="1800">
+                <a:solidFill>
+                  <a:srgbClr val="1F2533"/>
                 </a:solidFill>
                 <a:latin typeface="Calibri"/>
               </a:rPr>
@@ -13893,9 +15591,9 @@
               </a:spcAft>
             </a:pPr>
             <a:r>
-              <a:rPr sz="1800" b="0">
-                <a:solidFill>
-                  <a:srgbClr val="1F2A24"/>
+              <a:rPr sz="1800">
+                <a:solidFill>
+                  <a:srgbClr val="1F2533"/>
                 </a:solidFill>
                 <a:latin typeface="Calibri"/>
               </a:rPr>
@@ -13909,9 +15607,9 @@
               </a:spcAft>
             </a:pPr>
             <a:r>
-              <a:rPr sz="1800" b="0">
-                <a:solidFill>
-                  <a:srgbClr val="1F2A24"/>
+              <a:rPr sz="1800">
+                <a:solidFill>
+                  <a:srgbClr val="1F2533"/>
                 </a:solidFill>
                 <a:latin typeface="Calibri"/>
               </a:rPr>
@@ -13946,7 +15644,7 @@
             <a:r>
               <a:rPr sz="1000">
                 <a:solidFill>
-                  <a:srgbClr val="555555"/>
+                  <a:srgbClr val="555C66"/>
                 </a:solidFill>
                 <a:latin typeface="Calibri"/>
               </a:rPr>
@@ -13981,11 +15679,11 @@
             <a:r>
               <a:rPr sz="1000">
                 <a:solidFill>
-                  <a:srgbClr val="555555"/>
-                </a:solidFill>
-                <a:latin typeface="Calibri"/>
-              </a:rPr>
-              <a:t>9 / 18</a:t>
+                  <a:srgbClr val="555C66"/>
+                </a:solidFill>
+                <a:latin typeface="Calibri"/>
+              </a:rPr>
+              <a:t>9 / 19</a:t>
             </a:r>
           </a:p>
         </p:txBody>
